--- a/muKV_full_deck.pptx
+++ b/muKV_full_deck.pptx
@@ -16361,7 +16361,7 @@
                 </a:solidFill>
                 <a:latin typeface="Arial"/>
               </a:rPr>
-              <a:t>There is no online policy learning on the user's phone. The decision is a deterministic table walk.</a:t>
+              <a:t>Stages are lettered A to F so they never collide with the numbered components above. Stage D is steps 1 to 3. No online policy learning runs on the phone; the decision is a deterministic table walk.</a:t>
             </a:r>
           </a:p>
         </p:txBody>
@@ -16603,7 +16603,7 @@
                 </a:solidFill>
                 <a:latin typeface="Arial"/>
               </a:rPr>
-              <a:t>Each CPU cluster takes the lower of the battery and skin ladders. DDR above 71 °C floors both to 1267 MHz.</a:t>
+              <a:t>Each CPU cluster takes the lower of the battery and skin ladders. DDR above 71 °C floors both to 1267 MHz. Battery here is temperature in °C, not charge in %; the scheduler tiers use charge.</a:t>
             </a:r>
           </a:p>
         </p:txBody>
@@ -18139,7 +18139,7 @@
                           </a:solidFill>
                           <a:latin typeface="Arial"/>
                         </a:rPr>
-                        <a:t>Battery</a:t>
+                        <a:t>Battery charge</a:t>
                       </a:r>
                     </a:p>
                   </a:txBody>
@@ -18161,7 +18161,7 @@
                           </a:solidFill>
                           <a:latin typeface="Arial"/>
                         </a:rPr>
-                        <a:t>GPU plan</a:t>
+                        <a:t>GPU plan (MHz)</a:t>
                       </a:r>
                     </a:p>
                   </a:txBody>
@@ -18183,7 +18183,7 @@
                           </a:solidFill>
                           <a:latin typeface="Arial"/>
                         </a:rPr>
-                        <a:t>Answer cap</a:t>
+                        <a:t>Answer cap (tokens)</a:t>
                       </a:r>
                     </a:p>
                   </a:txBody>
@@ -18808,8 +18808,47 @@
         </p:nvSpPr>
         <p:spPr>
           <a:xfrm>
-            <a:off x="548640" y="3840480"/>
-            <a:ext cx="11064240" cy="2194560"/>
+            <a:off x="548640" y="3767328"/>
+            <a:ext cx="11064240" cy="411480"/>
+          </a:xfrm>
+          <a:prstGeom prst="rect">
+            <a:avLst/>
+          </a:prstGeom>
+          <a:noFill/>
+        </p:spPr>
+        <p:txBody>
+          <a:bodyPr wrap="square" anchor="t" lIns="36576" rIns="36576" tIns="18288" bIns="18288">
+            <a:spAutoFit/>
+          </a:bodyPr>
+          <a:lstStyle/>
+          <a:p>
+            <a:pPr algn="l">
+              <a:lnSpc>
+                <a:spcPct val="115000"/>
+              </a:lnSpc>
+            </a:pPr>
+            <a:r>
+              <a:rPr sz="1500" b="1">
+                <a:solidFill>
+                  <a:srgbClr val="C4581A"/>
+                </a:solidFill>
+                <a:latin typeface="Arial"/>
+              </a:rPr>
+              <a:t>The cache budget K stays at 1024 cells in every tier. The answer cap is a token count. Same number, different quantity.</a:t>
+            </a:r>
+          </a:p>
+        </p:txBody>
+      </p:sp>
+      <p:sp>
+        <p:nvSpPr>
+          <p:cNvPr id="8" name="TextBox 7"/>
+          <p:cNvSpPr txBox="1"/>
+          <p:nvPr/>
+        </p:nvSpPr>
+        <p:spPr>
+          <a:xfrm>
+            <a:off x="548640" y="4297680"/>
+            <a:ext cx="11064240" cy="1920240"/>
           </a:xfrm>
           <a:prstGeom prst="rect">
             <a:avLst/>
@@ -28185,7 +28224,7 @@
                 </a:solidFill>
                 <a:latin typeface="Arial"/>
               </a:rPr>
-              <a:t>Scoring runs inside the FlashAttention prefill graph, so content awareness costs 1.9% of prefill and no decode bandwidth.</a:t>
+              <a:t>Circled 1 to 9 are components. 1-3 are the pass, 4 is the watchdog, 5-9 are the scheduler. The control-plane figure letters its stages A to F so the two never collide.</a:t>
             </a:r>
           </a:p>
         </p:txBody>

--- a/muKV_full_deck.pptx
+++ b/muKV_full_deck.pptx
@@ -35,6 +35,7 @@
     <p:sldId id="283" r:id="rId34"/>
     <p:sldId id="284" r:id="rId35"/>
     <p:sldId id="285" r:id="rId36"/>
+    <p:sldId id="286" r:id="rId37"/>
   </p:sldIdLst>
   <p:sldSz cx="12191695" cy="6858000" type="screen4x3"/>
   <p:notesSz cx="6858000" cy="9144000"/>
@@ -3416,6 +3417,847 @@
                 </a:solidFill>
                 <a:latin typeface="Arial"/>
               </a:rPr>
+              <a:t>FINDING 1  ·  THE REALIZABILITY GAP</a:t>
+            </a:r>
+          </a:p>
+        </p:txBody>
+      </p:sp>
+      <p:sp>
+        <p:nvSpPr>
+          <p:cNvPr id="3" name="TextBox 2"/>
+          <p:cNvSpPr txBox="1"/>
+          <p:nvPr/>
+        </p:nvSpPr>
+        <p:spPr>
+          <a:xfrm>
+            <a:off x="548640" y="603504"/>
+            <a:ext cx="11064240" cy="640080"/>
+          </a:xfrm>
+          <a:prstGeom prst="rect">
+            <a:avLst/>
+          </a:prstGeom>
+          <a:noFill/>
+        </p:spPr>
+        <p:txBody>
+          <a:bodyPr wrap="square" anchor="t" lIns="36576" rIns="36576" tIns="18288" bIns="18288">
+            <a:spAutoFit/>
+          </a:bodyPr>
+          <a:lstStyle/>
+          <a:p>
+            <a:pPr algn="l">
+              <a:lnSpc>
+                <a:spcPct val="115000"/>
+              </a:lnSpc>
+            </a:pPr>
+            <a:r>
+              <a:rPr sz="2800" b="1">
+                <a:solidFill>
+                  <a:srgbClr val="0C1116"/>
+                </a:solidFill>
+                <a:latin typeface="Arial"/>
+              </a:rPr>
+              <a:t>What the papers claim, and what the phone gives back</a:t>
+            </a:r>
+          </a:p>
+        </p:txBody>
+      </p:sp>
+      <p:sp>
+        <p:nvSpPr>
+          <p:cNvPr id="4" name="Rectangle 3"/>
+          <p:cNvSpPr/>
+          <p:nvPr/>
+        </p:nvSpPr>
+        <p:spPr>
+          <a:xfrm>
+            <a:off x="548640" y="1298448"/>
+            <a:ext cx="11064240" cy="9525"/>
+          </a:xfrm>
+          <a:prstGeom prst="rect">
+            <a:avLst/>
+          </a:prstGeom>
+          <a:solidFill>
+            <a:srgbClr val="D9DEE4"/>
+          </a:solidFill>
+          <a:ln>
+            <a:noFill/>
+          </a:ln>
+          <a:effectLst/>
+        </p:spPr>
+        <p:style>
+          <a:lnRef idx="1">
+            <a:schemeClr val="accent1"/>
+          </a:lnRef>
+          <a:fillRef idx="3">
+            <a:schemeClr val="accent1"/>
+          </a:fillRef>
+          <a:effectRef idx="2">
+            <a:schemeClr val="accent1"/>
+          </a:effectRef>
+          <a:fontRef idx="minor">
+            <a:schemeClr val="lt1"/>
+          </a:fontRef>
+        </p:style>
+        <p:txBody>
+          <a:bodyPr rtlCol="0" anchor="ctr"/>
+          <a:lstStyle/>
+          <a:p>
+            <a:pPr algn="ctr"/>
+          </a:p>
+        </p:txBody>
+      </p:sp>
+      <p:sp>
+        <p:nvSpPr>
+          <p:cNvPr id="5" name="TextBox 4"/>
+          <p:cNvSpPr txBox="1"/>
+          <p:nvPr/>
+        </p:nvSpPr>
+        <p:spPr>
+          <a:xfrm>
+            <a:off x="11155680" y="6400800"/>
+            <a:ext cx="548640" cy="274320"/>
+          </a:xfrm>
+          <a:prstGeom prst="rect">
+            <a:avLst/>
+          </a:prstGeom>
+          <a:noFill/>
+        </p:spPr>
+        <p:txBody>
+          <a:bodyPr wrap="square" anchor="t" lIns="36576" rIns="36576" tIns="18288" bIns="18288">
+            <a:spAutoFit/>
+          </a:bodyPr>
+          <a:lstStyle/>
+          <a:p>
+            <a:pPr algn="r">
+              <a:lnSpc>
+                <a:spcPct val="115000"/>
+              </a:lnSpc>
+            </a:pPr>
+            <a:r>
+              <a:rPr sz="1000" b="0">
+                <a:solidFill>
+                  <a:srgbClr val="6B7785"/>
+                </a:solidFill>
+                <a:latin typeface="Arial"/>
+              </a:rPr>
+              <a:t>10</a:t>
+            </a:r>
+          </a:p>
+        </p:txBody>
+      </p:sp>
+      <p:graphicFrame>
+        <p:nvGraphicFramePr>
+          <p:cNvPr id="6" name="Table 5"/>
+          <p:cNvGraphicFramePr>
+            <a:graphicFrameLocks noGrp="1"/>
+          </p:cNvGraphicFramePr>
+          <p:nvPr/>
+        </p:nvGraphicFramePr>
+        <p:xfrm>
+          <a:off x="548640" y="1737360"/>
+          <a:ext cx="11064240" cy="2011680"/>
+        </p:xfrm>
+        <a:graphic>
+          <a:graphicData uri="http://schemas.openxmlformats.org/drawingml/2006/table">
+            <a:tbl>
+              <a:tblPr firstRow="1" bandRow="1">
+                <a:tableStyleId>{5C22544A-7EE6-4342-B048-85BDC9FD1C3A}</a:tableStyleId>
+              </a:tblPr>
+              <a:tblGrid>
+                <a:gridCol w="2011680"/>
+                <a:gridCol w="3566160"/>
+                <a:gridCol w="3108960"/>
+                <a:gridCol w="2377440"/>
+              </a:tblGrid>
+              <a:tr h="335280">
+                <a:tc>
+                  <a:txBody>
+                    <a:bodyPr wrap="square"/>
+                    <a:lstStyle/>
+                    <a:p>
+                      <a:r>
+                        <a:rPr sz="1400" b="1">
+                          <a:solidFill>
+                            <a:srgbClr val="0C1116"/>
+                          </a:solidFill>
+                          <a:latin typeface="Arial"/>
+                        </a:rPr>
+                        <a:t>Policy</a:t>
+                      </a:r>
+                    </a:p>
+                  </a:txBody>
+                  <a:tcPr marL="73152" marR="73152" marT="45720" marB="45720">
+                    <a:solidFill>
+                      <a:srgbClr val="EEF1F4"/>
+                    </a:solidFill>
+                  </a:tcPr>
+                </a:tc>
+                <a:tc>
+                  <a:txBody>
+                    <a:bodyPr wrap="square"/>
+                    <a:lstStyle/>
+                    <a:p>
+                      <a:r>
+                        <a:rPr sz="1400" b="1">
+                          <a:solidFill>
+                            <a:srgbClr val="0C1116"/>
+                          </a:solidFill>
+                          <a:latin typeface="Arial"/>
+                        </a:rPr>
+                        <a:t>Its own paper claims</a:t>
+                      </a:r>
+                    </a:p>
+                  </a:txBody>
+                  <a:tcPr marL="73152" marR="73152" marT="45720" marB="45720">
+                    <a:solidFill>
+                      <a:srgbClr val="EEF1F4"/>
+                    </a:solidFill>
+                  </a:tcPr>
+                </a:tc>
+                <a:tc>
+                  <a:txBody>
+                    <a:bodyPr wrap="square"/>
+                    <a:lstStyle/>
+                    <a:p>
+                      <a:r>
+                        <a:rPr sz="1400" b="1">
+                          <a:solidFill>
+                            <a:srgbClr val="0C1116"/>
+                          </a:solidFill>
+                          <a:latin typeface="Arial"/>
+                        </a:rPr>
+                        <a:t>At its own budget on the phone</a:t>
+                      </a:r>
+                    </a:p>
+                  </a:txBody>
+                  <a:tcPr marL="73152" marR="73152" marT="45720" marB="45720">
+                    <a:solidFill>
+                      <a:srgbClr val="EEF1F4"/>
+                    </a:solidFill>
+                  </a:tcPr>
+                </a:tc>
+                <a:tc>
+                  <a:txBody>
+                    <a:bodyPr wrap="square"/>
+                    <a:lstStyle/>
+                    <a:p>
+                      <a:r>
+                        <a:rPr sz="1400" b="1">
+                          <a:solidFill>
+                            <a:srgbClr val="0C1116"/>
+                          </a:solidFill>
+                          <a:latin typeface="Arial"/>
+                        </a:rPr>
+                        <a:t>Cache actually kept</a:t>
+                      </a:r>
+                    </a:p>
+                  </a:txBody>
+                  <a:tcPr marL="73152" marR="73152" marT="45720" marB="45720">
+                    <a:solidFill>
+                      <a:srgbClr val="EEF1F4"/>
+                    </a:solidFill>
+                  </a:tcPr>
+                </a:tc>
+              </a:tr>
+              <a:tr h="335280">
+                <a:tc>
+                  <a:txBody>
+                    <a:bodyPr wrap="square"/>
+                    <a:lstStyle/>
+                    <a:p>
+                      <a:r>
+                        <a:rPr sz="1400" b="0">
+                          <a:solidFill>
+                            <a:srgbClr val="38424E"/>
+                          </a:solidFill>
+                          <a:latin typeface="Arial"/>
+                        </a:rPr>
+                        <a:t>SnapKV</a:t>
+                      </a:r>
+                    </a:p>
+                  </a:txBody>
+                  <a:tcPr marL="73152" marR="73152" marT="45720" marB="45720">
+                    <a:solidFill>
+                      <a:srgbClr val="FFFFFF"/>
+                    </a:solidFill>
+                  </a:tcPr>
+                </a:tc>
+                <a:tc>
+                  <a:txBody>
+                    <a:bodyPr wrap="square"/>
+                    <a:lstStyle/>
+                    <a:p>
+                      <a:r>
+                        <a:rPr sz="1400" b="0">
+                          <a:solidFill>
+                            <a:srgbClr val="38424E"/>
+                          </a:solidFill>
+                          <a:latin typeface="Arial"/>
+                        </a:rPr>
+                        <a:t>8.2x smaller cache at 16K</a:t>
+                      </a:r>
+                    </a:p>
+                  </a:txBody>
+                  <a:tcPr marL="73152" marR="73152" marT="45720" marB="45720">
+                    <a:solidFill>
+                      <a:srgbClr val="FFFFFF"/>
+                    </a:solidFill>
+                  </a:tcPr>
+                </a:tc>
+                <a:tc>
+                  <a:txBody>
+                    <a:bodyPr wrap="square"/>
+                    <a:lstStyle/>
+                    <a:p>
+                      <a:r>
+                        <a:rPr sz="1400" b="0">
+                          <a:solidFill>
+                            <a:srgbClr val="38424E"/>
+                          </a:solidFill>
+                          <a:latin typeface="Arial"/>
+                        </a:rPr>
+                        <a:t>2048 per head</a:t>
+                      </a:r>
+                    </a:p>
+                  </a:txBody>
+                  <a:tcPr marL="73152" marR="73152" marT="45720" marB="45720">
+                    <a:solidFill>
+                      <a:srgbClr val="FFFFFF"/>
+                    </a:solidFill>
+                  </a:tcPr>
+                </a:tc>
+                <a:tc>
+                  <a:txBody>
+                    <a:bodyPr wrap="square"/>
+                    <a:lstStyle/>
+                    <a:p>
+                      <a:r>
+                        <a:rPr sz="1400" b="0">
+                          <a:solidFill>
+                            <a:srgbClr val="38424E"/>
+                          </a:solidFill>
+                          <a:latin typeface="Arial"/>
+                        </a:rPr>
+                        <a:t>94%</a:t>
+                      </a:r>
+                    </a:p>
+                  </a:txBody>
+                  <a:tcPr marL="73152" marR="73152" marT="45720" marB="45720">
+                    <a:solidFill>
+                      <a:srgbClr val="FFFFFF"/>
+                    </a:solidFill>
+                  </a:tcPr>
+                </a:tc>
+              </a:tr>
+              <a:tr h="335280">
+                <a:tc>
+                  <a:txBody>
+                    <a:bodyPr wrap="square"/>
+                    <a:lstStyle/>
+                    <a:p>
+                      <a:r>
+                        <a:rPr sz="1400" b="0">
+                          <a:solidFill>
+                            <a:srgbClr val="38424E"/>
+                          </a:solidFill>
+                          <a:latin typeface="Arial"/>
+                        </a:rPr>
+                        <a:t>H2O</a:t>
+                      </a:r>
+                    </a:p>
+                  </a:txBody>
+                  <a:tcPr marL="73152" marR="73152" marT="45720" marB="45720">
+                    <a:solidFill>
+                      <a:srgbClr val="F7F9FB"/>
+                    </a:solidFill>
+                  </a:tcPr>
+                </a:tc>
+                <a:tc>
+                  <a:txBody>
+                    <a:bodyPr wrap="square"/>
+                    <a:lstStyle/>
+                    <a:p>
+                      <a:r>
+                        <a:rPr sz="1400" b="0">
+                          <a:solidFill>
+                            <a:srgbClr val="38424E"/>
+                          </a:solidFill>
+                          <a:latin typeface="Arial"/>
+                        </a:rPr>
+                        <a:t>5 to 10x at a 20% budget</a:t>
+                      </a:r>
+                    </a:p>
+                  </a:txBody>
+                  <a:tcPr marL="73152" marR="73152" marT="45720" marB="45720">
+                    <a:solidFill>
+                      <a:srgbClr val="F7F9FB"/>
+                    </a:solidFill>
+                  </a:tcPr>
+                </a:tc>
+                <a:tc>
+                  <a:txBody>
+                    <a:bodyPr wrap="square"/>
+                    <a:lstStyle/>
+                    <a:p>
+                      <a:r>
+                        <a:rPr sz="1400" b="0">
+                          <a:solidFill>
+                            <a:srgbClr val="38424E"/>
+                          </a:solidFill>
+                          <a:latin typeface="Arial"/>
+                        </a:rPr>
+                        <a:t>20% of the prompt</a:t>
+                      </a:r>
+                    </a:p>
+                  </a:txBody>
+                  <a:tcPr marL="73152" marR="73152" marT="45720" marB="45720">
+                    <a:solidFill>
+                      <a:srgbClr val="F7F9FB"/>
+                    </a:solidFill>
+                  </a:tcPr>
+                </a:tc>
+                <a:tc>
+                  <a:txBody>
+                    <a:bodyPr wrap="square"/>
+                    <a:lstStyle/>
+                    <a:p>
+                      <a:r>
+                        <a:rPr sz="1400" b="0">
+                          <a:solidFill>
+                            <a:srgbClr val="38424E"/>
+                          </a:solidFill>
+                          <a:latin typeface="Arial"/>
+                        </a:rPr>
+                        <a:t>92%</a:t>
+                      </a:r>
+                    </a:p>
+                  </a:txBody>
+                  <a:tcPr marL="73152" marR="73152" marT="45720" marB="45720">
+                    <a:solidFill>
+                      <a:srgbClr val="F7F9FB"/>
+                    </a:solidFill>
+                  </a:tcPr>
+                </a:tc>
+              </a:tr>
+              <a:tr h="335280">
+                <a:tc>
+                  <a:txBody>
+                    <a:bodyPr wrap="square"/>
+                    <a:lstStyle/>
+                    <a:p>
+                      <a:r>
+                        <a:rPr sz="1400" b="0">
+                          <a:solidFill>
+                            <a:srgbClr val="38424E"/>
+                          </a:solidFill>
+                          <a:latin typeface="Arial"/>
+                        </a:rPr>
+                        <a:t>TOVA</a:t>
+                      </a:r>
+                    </a:p>
+                  </a:txBody>
+                  <a:tcPr marL="73152" marR="73152" marT="45720" marB="45720">
+                    <a:solidFill>
+                      <a:srgbClr val="FFFFFF"/>
+                    </a:solidFill>
+                  </a:tcPr>
+                </a:tc>
+                <a:tc>
+                  <a:txBody>
+                    <a:bodyPr wrap="square"/>
+                    <a:lstStyle/>
+                    <a:p>
+                      <a:r>
+                        <a:rPr sz="1400" b="0">
+                          <a:solidFill>
+                            <a:srgbClr val="38424E"/>
+                          </a:solidFill>
+                          <a:latin typeface="Arial"/>
+                        </a:rPr>
+                        <a:t>per-layer budget</a:t>
+                      </a:r>
+                    </a:p>
+                  </a:txBody>
+                  <a:tcPr marL="73152" marR="73152" marT="45720" marB="45720">
+                    <a:solidFill>
+                      <a:srgbClr val="FFFFFF"/>
+                    </a:solidFill>
+                  </a:tcPr>
+                </a:tc>
+                <a:tc>
+                  <a:txBody>
+                    <a:bodyPr wrap="square"/>
+                    <a:lstStyle/>
+                    <a:p>
+                      <a:r>
+                        <a:rPr sz="1400" b="0">
+                          <a:solidFill>
+                            <a:srgbClr val="38424E"/>
+                          </a:solidFill>
+                          <a:latin typeface="Arial"/>
+                        </a:rPr>
+                        <a:t>2048 per layer</a:t>
+                      </a:r>
+                    </a:p>
+                  </a:txBody>
+                  <a:tcPr marL="73152" marR="73152" marT="45720" marB="45720">
+                    <a:solidFill>
+                      <a:srgbClr val="FFFFFF"/>
+                    </a:solidFill>
+                  </a:tcPr>
+                </a:tc>
+                <a:tc>
+                  <a:txBody>
+                    <a:bodyPr wrap="square"/>
+                    <a:lstStyle/>
+                    <a:p>
+                      <a:r>
+                        <a:rPr sz="1400" b="0">
+                          <a:solidFill>
+                            <a:srgbClr val="38424E"/>
+                          </a:solidFill>
+                          <a:latin typeface="Arial"/>
+                        </a:rPr>
+                        <a:t>77%</a:t>
+                      </a:r>
+                    </a:p>
+                  </a:txBody>
+                  <a:tcPr marL="73152" marR="73152" marT="45720" marB="45720">
+                    <a:solidFill>
+                      <a:srgbClr val="FFFFFF"/>
+                    </a:solidFill>
+                  </a:tcPr>
+                </a:tc>
+              </a:tr>
+              <a:tr h="335280">
+                <a:tc>
+                  <a:txBody>
+                    <a:bodyPr wrap="square"/>
+                    <a:lstStyle/>
+                    <a:p>
+                      <a:r>
+                        <a:rPr sz="1400" b="0">
+                          <a:solidFill>
+                            <a:srgbClr val="38424E"/>
+                          </a:solidFill>
+                          <a:latin typeface="Arial"/>
+                        </a:rPr>
+                        <a:t>Ada-KV</a:t>
+                      </a:r>
+                    </a:p>
+                  </a:txBody>
+                  <a:tcPr marL="73152" marR="73152" marT="45720" marB="45720">
+                    <a:solidFill>
+                      <a:srgbClr val="F7F9FB"/>
+                    </a:solidFill>
+                  </a:tcPr>
+                </a:tc>
+                <a:tc>
+                  <a:txBody>
+                    <a:bodyPr wrap="square"/>
+                    <a:lstStyle/>
+                    <a:p>
+                      <a:r>
+                        <a:rPr sz="1400" b="0">
+                          <a:solidFill>
+                            <a:srgbClr val="38424E"/>
+                          </a:solidFill>
+                          <a:latin typeface="Arial"/>
+                        </a:rPr>
+                        <a:t>adaptive per-head budget</a:t>
+                      </a:r>
+                    </a:p>
+                  </a:txBody>
+                  <a:tcPr marL="73152" marR="73152" marT="45720" marB="45720">
+                    <a:solidFill>
+                      <a:srgbClr val="F7F9FB"/>
+                    </a:solidFill>
+                  </a:tcPr>
+                </a:tc>
+                <a:tc>
+                  <a:txBody>
+                    <a:bodyPr wrap="square"/>
+                    <a:lstStyle/>
+                    <a:p>
+                      <a:r>
+                        <a:rPr sz="1400" b="0">
+                          <a:solidFill>
+                            <a:srgbClr val="38424E"/>
+                          </a:solidFill>
+                          <a:latin typeface="Arial"/>
+                        </a:rPr>
+                        <a:t>2048</a:t>
+                      </a:r>
+                    </a:p>
+                  </a:txBody>
+                  <a:tcPr marL="73152" marR="73152" marT="45720" marB="45720">
+                    <a:solidFill>
+                      <a:srgbClr val="F7F9FB"/>
+                    </a:solidFill>
+                  </a:tcPr>
+                </a:tc>
+                <a:tc>
+                  <a:txBody>
+                    <a:bodyPr wrap="square"/>
+                    <a:lstStyle/>
+                    <a:p>
+                      <a:r>
+                        <a:rPr sz="1400" b="0">
+                          <a:solidFill>
+                            <a:srgbClr val="38424E"/>
+                          </a:solidFill>
+                          <a:latin typeface="Arial"/>
+                        </a:rPr>
+                        <a:t>71%</a:t>
+                      </a:r>
+                    </a:p>
+                  </a:txBody>
+                  <a:tcPr marL="73152" marR="73152" marT="45720" marB="45720">
+                    <a:solidFill>
+                      <a:srgbClr val="F7F9FB"/>
+                    </a:solidFill>
+                  </a:tcPr>
+                </a:tc>
+              </a:tr>
+              <a:tr h="335280">
+                <a:tc>
+                  <a:txBody>
+                    <a:bodyPr wrap="square"/>
+                    <a:lstStyle/>
+                    <a:p>
+                      <a:r>
+                        <a:rPr sz="1400" b="1">
+                          <a:solidFill>
+                            <a:srgbClr val="0C1116"/>
+                          </a:solidFill>
+                          <a:latin typeface="Arial"/>
+                        </a:rPr>
+                        <a:t>μKV</a:t>
+                      </a:r>
+                    </a:p>
+                  </a:txBody>
+                  <a:tcPr marL="73152" marR="73152" marT="45720" marB="45720">
+                    <a:solidFill>
+                      <a:srgbClr val="FFFFFF"/>
+                    </a:solidFill>
+                  </a:tcPr>
+                </a:tc>
+                <a:tc>
+                  <a:txBody>
+                    <a:bodyPr wrap="square"/>
+                    <a:lstStyle/>
+                    <a:p>
+                      <a:r>
+                        <a:rPr sz="1400" b="1">
+                          <a:solidFill>
+                            <a:srgbClr val="0C1116"/>
+                          </a:solidFill>
+                          <a:latin typeface="Arial"/>
+                        </a:rPr>
+                        <a:t>this work</a:t>
+                      </a:r>
+                    </a:p>
+                  </a:txBody>
+                  <a:tcPr marL="73152" marR="73152" marT="45720" marB="45720">
+                    <a:solidFill>
+                      <a:srgbClr val="FFFFFF"/>
+                    </a:solidFill>
+                  </a:tcPr>
+                </a:tc>
+                <a:tc>
+                  <a:txBody>
+                    <a:bodyPr wrap="square"/>
+                    <a:lstStyle/>
+                    <a:p>
+                      <a:r>
+                        <a:rPr sz="1400" b="1">
+                          <a:solidFill>
+                            <a:srgbClr val="0C1116"/>
+                          </a:solidFill>
+                          <a:latin typeface="Arial"/>
+                        </a:rPr>
+                        <a:t>1024, sequence-level</a:t>
+                      </a:r>
+                    </a:p>
+                  </a:txBody>
+                  <a:tcPr marL="73152" marR="73152" marT="45720" marB="45720">
+                    <a:solidFill>
+                      <a:srgbClr val="FFFFFF"/>
+                    </a:solidFill>
+                  </a:tcPr>
+                </a:tc>
+                <a:tc>
+                  <a:txBody>
+                    <a:bodyPr wrap="square"/>
+                    <a:lstStyle/>
+                    <a:p>
+                      <a:r>
+                        <a:rPr sz="1400" b="1">
+                          <a:solidFill>
+                            <a:srgbClr val="0C1116"/>
+                          </a:solidFill>
+                          <a:latin typeface="Arial"/>
+                        </a:rPr>
+                        <a:t>14%</a:t>
+                      </a:r>
+                    </a:p>
+                  </a:txBody>
+                  <a:tcPr marL="73152" marR="73152" marT="45720" marB="45720">
+                    <a:solidFill>
+                      <a:srgbClr val="FFFFFF"/>
+                    </a:solidFill>
+                  </a:tcPr>
+                </a:tc>
+              </a:tr>
+            </a:tbl>
+          </a:graphicData>
+        </a:graphic>
+      </p:graphicFrame>
+      <p:sp>
+        <p:nvSpPr>
+          <p:cNvPr id="7" name="TextBox 6"/>
+          <p:cNvSpPr txBox="1"/>
+          <p:nvPr/>
+        </p:nvSpPr>
+        <p:spPr>
+          <a:xfrm>
+            <a:off x="548640" y="4023360"/>
+            <a:ext cx="11064240" cy="1828800"/>
+          </a:xfrm>
+          <a:prstGeom prst="rect">
+            <a:avLst/>
+          </a:prstGeom>
+          <a:noFill/>
+        </p:spPr>
+        <p:txBody>
+          <a:bodyPr wrap="square" anchor="t" lIns="36576" rIns="36576" tIns="18288" bIns="18288">
+            <a:spAutoFit/>
+          </a:bodyPr>
+          <a:lstStyle/>
+          <a:p>
+            <a:pPr algn="l">
+              <a:lnSpc>
+                <a:spcPct val="115000"/>
+              </a:lnSpc>
+            </a:pPr>
+            <a:r>
+              <a:rPr sz="1700" b="0">
+                <a:solidFill>
+                  <a:srgbClr val="38424E"/>
+                </a:solidFill>
+                <a:latin typeface="Arial"/>
+              </a:rPr>
+              <a:t>The claim is not wrong on a server. It is a claim about how many scores were dropped, not about how much memory came back.</a:t>
+            </a:r>
+          </a:p>
+          <a:p>
+            <a:pPr algn="l">
+              <a:lnSpc>
+                <a:spcPct val="115000"/>
+              </a:lnSpc>
+            </a:pPr>
+            <a:r>
+              <a:rPr sz="1700" b="0">
+                <a:solidFill>
+                  <a:srgbClr val="38424E"/>
+                </a:solidFill>
+                <a:latin typeface="Arial"/>
+              </a:rPr>
+              <a:t>On a shared cell array those are different numbers, and only the second one changes the phone's DRAM traffic.</a:t>
+            </a:r>
+          </a:p>
+        </p:txBody>
+      </p:sp>
+      <p:sp>
+        <p:nvSpPr>
+          <p:cNvPr id="8" name="TextBox 7"/>
+          <p:cNvSpPr txBox="1"/>
+          <p:nvPr/>
+        </p:nvSpPr>
+        <p:spPr>
+          <a:xfrm>
+            <a:off x="548640" y="5669280"/>
+            <a:ext cx="11064240" cy="640080"/>
+          </a:xfrm>
+          <a:prstGeom prst="rect">
+            <a:avLst/>
+          </a:prstGeom>
+          <a:noFill/>
+        </p:spPr>
+        <p:txBody>
+          <a:bodyPr wrap="square" anchor="t" lIns="36576" rIns="36576" tIns="18288" bIns="18288">
+            <a:spAutoFit/>
+          </a:bodyPr>
+          <a:lstStyle/>
+          <a:p>
+            <a:pPr algn="l">
+              <a:lnSpc>
+                <a:spcPct val="115000"/>
+              </a:lnSpc>
+            </a:pPr>
+            <a:r>
+              <a:rPr sz="2000" b="1">
+                <a:solidFill>
+                  <a:srgbClr val="C4581A"/>
+                </a:solidFill>
+                <a:latin typeface="Arial"/>
+              </a:rPr>
+              <a:t>Report realized cells, not selection ratios.</a:t>
+            </a:r>
+          </a:p>
+        </p:txBody>
+      </p:sp>
+    </p:spTree>
+  </p:cSld>
+  <p:clrMapOvr>
+    <a:masterClrMapping/>
+  </p:clrMapOvr>
+</p:sld>
+</file>
+
+<file path=ppt/slides/slide11.xml><?xml version="1.0" encoding="utf-8"?>
+<p:sld xmlns:a="http://schemas.openxmlformats.org/drawingml/2006/main" xmlns:p="http://schemas.openxmlformats.org/presentationml/2006/main" xmlns:r="http://schemas.openxmlformats.org/officeDocument/2006/relationships">
+  <p:cSld>
+    <p:spTree>
+      <p:nvGrpSpPr>
+        <p:cNvPr id="1" name=""/>
+        <p:cNvGrpSpPr/>
+        <p:nvPr/>
+      </p:nvGrpSpPr>
+      <p:grpSpPr/>
+      <p:sp>
+        <p:nvSpPr>
+          <p:cNvPr id="2" name="TextBox 1"/>
+          <p:cNvSpPr txBox="1"/>
+          <p:nvPr/>
+        </p:nvSpPr>
+        <p:spPr>
+          <a:xfrm>
+            <a:off x="548640" y="320040"/>
+            <a:ext cx="8229600" cy="274320"/>
+          </a:xfrm>
+          <a:prstGeom prst="rect">
+            <a:avLst/>
+          </a:prstGeom>
+          <a:noFill/>
+        </p:spPr>
+        <p:txBody>
+          <a:bodyPr wrap="square" anchor="t" lIns="36576" rIns="36576" tIns="18288" bIns="18288">
+            <a:spAutoFit/>
+          </a:bodyPr>
+          <a:lstStyle/>
+          <a:p>
+            <a:pPr algn="l">
+              <a:lnSpc>
+                <a:spcPct val="115000"/>
+              </a:lnSpc>
+            </a:pPr>
+            <a:r>
+              <a:rPr sz="1100" b="1">
+                <a:solidFill>
+                  <a:srgbClr val="2B6CA3"/>
+                </a:solidFill>
+                <a:latin typeface="Arial"/>
+              </a:rPr>
               <a:t>TABLE 2  ·  MOBILE GPU, GROUPED BY HOW EACH POLICY SELECTS</a:t>
             </a:r>
           </a:p>
@@ -3538,7 +4380,7 @@
                 </a:solidFill>
                 <a:latin typeface="Arial"/>
               </a:rPr>
-              <a:t>10</a:t>
+              <a:t>11</a:t>
             </a:r>
           </a:p>
         </p:txBody>
@@ -5362,7 +6204,7 @@
 </p:sld>
 </file>
 
-<file path=ppt/slides/slide11.xml><?xml version="1.0" encoding="utf-8"?>
+<file path=ppt/slides/slide12.xml><?xml version="1.0" encoding="utf-8"?>
 <p:sld xmlns:a="http://schemas.openxmlformats.org/drawingml/2006/main" xmlns:p="http://schemas.openxmlformats.org/presentationml/2006/main" xmlns:r="http://schemas.openxmlformats.org/officeDocument/2006/relationships">
   <p:cSld>
     <p:spTree>
@@ -5528,7 +6370,7 @@
                 </a:solidFill>
                 <a:latin typeface="Arial"/>
               </a:rPr>
-              <a:t>11</a:t>
+              <a:t>12</a:t>
             </a:r>
           </a:p>
         </p:txBody>
@@ -6229,7 +7071,7 @@
 </p:sld>
 </file>
 
-<file path=ppt/slides/slide12.xml><?xml version="1.0" encoding="utf-8"?>
+<file path=ppt/slides/slide13.xml><?xml version="1.0" encoding="utf-8"?>
 <p:sld xmlns:a="http://schemas.openxmlformats.org/drawingml/2006/main" xmlns:p="http://schemas.openxmlformats.org/presentationml/2006/main" xmlns:r="http://schemas.openxmlformats.org/officeDocument/2006/relationships">
   <p:cSld>
     <p:spTree>
@@ -6395,7 +7237,7 @@
                 </a:solidFill>
                 <a:latin typeface="Arial"/>
               </a:rPr>
-              <a:t>12</a:t>
+              <a:t>13</a:t>
             </a:r>
           </a:p>
         </p:txBody>
@@ -7604,7 +8446,7 @@
 </p:sld>
 </file>
 
-<file path=ppt/slides/slide13.xml><?xml version="1.0" encoding="utf-8"?>
+<file path=ppt/slides/slide14.xml><?xml version="1.0" encoding="utf-8"?>
 <p:sld xmlns:a="http://schemas.openxmlformats.org/drawingml/2006/main" xmlns:p="http://schemas.openxmlformats.org/presentationml/2006/main" xmlns:r="http://schemas.openxmlformats.org/officeDocument/2006/relationships">
   <p:cSld>
     <p:spTree>
@@ -7770,7 +8612,7 @@
                 </a:solidFill>
                 <a:latin typeface="Arial"/>
               </a:rPr>
-              <a:t>13</a:t>
+              <a:t>14</a:t>
             </a:r>
           </a:p>
         </p:txBody>
@@ -10695,7 +11537,7 @@
 </p:sld>
 </file>
 
-<file path=ppt/slides/slide14.xml><?xml version="1.0" encoding="utf-8"?>
+<file path=ppt/slides/slide15.xml><?xml version="1.0" encoding="utf-8"?>
 <p:sld xmlns:a="http://schemas.openxmlformats.org/drawingml/2006/main" xmlns:p="http://schemas.openxmlformats.org/presentationml/2006/main" xmlns:r="http://schemas.openxmlformats.org/officeDocument/2006/relationships">
   <p:cSld>
     <p:spTree>
@@ -10861,7 +11703,7 @@
                 </a:solidFill>
                 <a:latin typeface="Arial"/>
               </a:rPr>
-              <a:t>14</a:t>
+              <a:t>15</a:t>
             </a:r>
           </a:p>
         </p:txBody>
@@ -13825,7 +14667,7 @@
 </p:sld>
 </file>
 
-<file path=ppt/slides/slide15.xml><?xml version="1.0" encoding="utf-8"?>
+<file path=ppt/slides/slide16.xml><?xml version="1.0" encoding="utf-8"?>
 <p:sld xmlns:a="http://schemas.openxmlformats.org/drawingml/2006/main" xmlns:p="http://schemas.openxmlformats.org/presentationml/2006/main" xmlns:r="http://schemas.openxmlformats.org/officeDocument/2006/relationships">
   <p:cSld>
     <p:spTree>
@@ -13991,7 +14833,7 @@
                 </a:solidFill>
                 <a:latin typeface="Arial"/>
               </a:rPr>
-              <a:t>15</a:t>
+              <a:t>16</a:t>
             </a:r>
           </a:p>
         </p:txBody>
@@ -15515,7 +16357,7 @@
 </p:sld>
 </file>
 
-<file path=ppt/slides/slide16.xml><?xml version="1.0" encoding="utf-8"?>
+<file path=ppt/slides/slide17.xml><?xml version="1.0" encoding="utf-8"?>
 <p:sld xmlns:a="http://schemas.openxmlformats.org/drawingml/2006/main" xmlns:p="http://schemas.openxmlformats.org/presentationml/2006/main" xmlns:r="http://schemas.openxmlformats.org/officeDocument/2006/relationships">
   <p:cSld>
     <p:spTree>
@@ -15681,7 +16523,7 @@
                 </a:solidFill>
                 <a:latin typeface="Arial"/>
               </a:rPr>
-              <a:t>16</a:t>
+              <a:t>17</a:t>
             </a:r>
           </a:p>
         </p:txBody>
@@ -16132,7 +16974,7 @@
 </p:sld>
 </file>
 
-<file path=ppt/slides/slide17.xml><?xml version="1.0" encoding="utf-8"?>
+<file path=ppt/slides/slide18.xml><?xml version="1.0" encoding="utf-8"?>
 <p:sld xmlns:a="http://schemas.openxmlformats.org/drawingml/2006/main" xmlns:p="http://schemas.openxmlformats.org/presentationml/2006/main" xmlns:r="http://schemas.openxmlformats.org/officeDocument/2006/relationships">
   <p:cSld>
     <p:spTree>
@@ -16298,7 +17140,7 @@
                 </a:solidFill>
                 <a:latin typeface="Arial"/>
               </a:rPr>
-              <a:t>17</a:t>
+              <a:t>18</a:t>
             </a:r>
           </a:p>
         </p:txBody>
@@ -16361,7 +17203,7 @@
                 </a:solidFill>
                 <a:latin typeface="Arial"/>
               </a:rPr>
-              <a:t>Stages are lettered A to F so they never collide with the numbered components above. Stage D is steps 1 to 3. No online policy learning runs on the phone; the decision is a deterministic table walk.</a:t>
+              <a:t>Numbers match the architecture figure, so the same part carries the same number in both. Run is steps 1 to 3. No online policy learning runs on the phone; the decision is a deterministic table walk.</a:t>
             </a:r>
           </a:p>
         </p:txBody>
@@ -16374,7 +17216,7 @@
 </p:sld>
 </file>
 
-<file path=ppt/slides/slide18.xml><?xml version="1.0" encoding="utf-8"?>
+<file path=ppt/slides/slide19.xml><?xml version="1.0" encoding="utf-8"?>
 <p:sld xmlns:a="http://schemas.openxmlformats.org/drawingml/2006/main" xmlns:p="http://schemas.openxmlformats.org/presentationml/2006/main" xmlns:r="http://schemas.openxmlformats.org/officeDocument/2006/relationships">
   <p:cSld>
     <p:spTree>
@@ -16540,7 +17382,7 @@
                 </a:solidFill>
                 <a:latin typeface="Arial"/>
               </a:rPr>
-              <a:t>18</a:t>
+              <a:t>19</a:t>
             </a:r>
           </a:p>
         </p:txBody>
@@ -16604,327 +17446,6 @@
                 <a:latin typeface="Arial"/>
               </a:rPr>
               <a:t>Each CPU cluster takes the lower of the battery and skin ladders. DDR above 71 °C floors both to 1267 MHz. Battery here is temperature in °C, not charge in %; the scheduler tiers use charge.</a:t>
-            </a:r>
-          </a:p>
-        </p:txBody>
-      </p:sp>
-    </p:spTree>
-  </p:cSld>
-  <p:clrMapOvr>
-    <a:masterClrMapping/>
-  </p:clrMapOvr>
-</p:sld>
-</file>
-
-<file path=ppt/slides/slide19.xml><?xml version="1.0" encoding="utf-8"?>
-<p:sld xmlns:a="http://schemas.openxmlformats.org/drawingml/2006/main" xmlns:p="http://schemas.openxmlformats.org/presentationml/2006/main" xmlns:r="http://schemas.openxmlformats.org/officeDocument/2006/relationships">
-  <p:cSld>
-    <p:spTree>
-      <p:nvGrpSpPr>
-        <p:cNvPr id="1" name=""/>
-        <p:cNvGrpSpPr/>
-        <p:nvPr/>
-      </p:nvGrpSpPr>
-      <p:grpSpPr/>
-      <p:sp>
-        <p:nvSpPr>
-          <p:cNvPr id="2" name="TextBox 1"/>
-          <p:cNvSpPr txBox="1"/>
-          <p:nvPr/>
-        </p:nvSpPr>
-        <p:spPr>
-          <a:xfrm>
-            <a:off x="548640" y="320040"/>
-            <a:ext cx="8229600" cy="274320"/>
-          </a:xfrm>
-          <a:prstGeom prst="rect">
-            <a:avLst/>
-          </a:prstGeom>
-          <a:noFill/>
-        </p:spPr>
-        <p:txBody>
-          <a:bodyPr wrap="square" anchor="t" lIns="36576" rIns="36576" tIns="18288" bIns="18288">
-            <a:spAutoFit/>
-          </a:bodyPr>
-          <a:lstStyle/>
-          <a:p>
-            <a:pPr algn="l">
-              <a:lnSpc>
-                <a:spcPct val="115000"/>
-              </a:lnSpc>
-            </a:pPr>
-            <a:r>
-              <a:rPr sz="1100" b="1">
-                <a:solidFill>
-                  <a:srgbClr val="2B6CA3"/>
-                </a:solidFill>
-                <a:latin typeface="Arial"/>
-              </a:rPr>
-              <a:t>THE WORKLOAD THAT REACHES THE CLIFF</a:t>
-            </a:r>
-          </a:p>
-        </p:txBody>
-      </p:sp>
-      <p:sp>
-        <p:nvSpPr>
-          <p:cNvPr id="3" name="TextBox 2"/>
-          <p:cNvSpPr txBox="1"/>
-          <p:nvPr/>
-        </p:nvSpPr>
-        <p:spPr>
-          <a:xfrm>
-            <a:off x="548640" y="603504"/>
-            <a:ext cx="11064240" cy="640080"/>
-          </a:xfrm>
-          <a:prstGeom prst="rect">
-            <a:avLst/>
-          </a:prstGeom>
-          <a:noFill/>
-        </p:spPr>
-        <p:txBody>
-          <a:bodyPr wrap="square" anchor="t" lIns="36576" rIns="36576" tIns="18288" bIns="18288">
-            <a:spAutoFit/>
-          </a:bodyPr>
-          <a:lstStyle/>
-          <a:p>
-            <a:pPr algn="l">
-              <a:lnSpc>
-                <a:spcPct val="115000"/>
-              </a:lnSpc>
-            </a:pPr>
-            <a:r>
-              <a:rPr sz="2800" b="1">
-                <a:solidFill>
-                  <a:srgbClr val="0C1116"/>
-                </a:solidFill>
-                <a:latin typeface="Arial"/>
-              </a:rPr>
-              <a:t>Bonsai-8B, phone CPU, full cache against μKV</a:t>
-            </a:r>
-          </a:p>
-        </p:txBody>
-      </p:sp>
-      <p:sp>
-        <p:nvSpPr>
-          <p:cNvPr id="4" name="Rectangle 3"/>
-          <p:cNvSpPr/>
-          <p:nvPr/>
-        </p:nvSpPr>
-        <p:spPr>
-          <a:xfrm>
-            <a:off x="548640" y="1298448"/>
-            <a:ext cx="11064240" cy="9525"/>
-          </a:xfrm>
-          <a:prstGeom prst="rect">
-            <a:avLst/>
-          </a:prstGeom>
-          <a:solidFill>
-            <a:srgbClr val="D9DEE4"/>
-          </a:solidFill>
-          <a:ln>
-            <a:noFill/>
-          </a:ln>
-          <a:effectLst/>
-        </p:spPr>
-        <p:style>
-          <a:lnRef idx="1">
-            <a:schemeClr val="accent1"/>
-          </a:lnRef>
-          <a:fillRef idx="3">
-            <a:schemeClr val="accent1"/>
-          </a:fillRef>
-          <a:effectRef idx="2">
-            <a:schemeClr val="accent1"/>
-          </a:effectRef>
-          <a:fontRef idx="minor">
-            <a:schemeClr val="lt1"/>
-          </a:fontRef>
-        </p:style>
-        <p:txBody>
-          <a:bodyPr rtlCol="0" anchor="ctr"/>
-          <a:lstStyle/>
-          <a:p>
-            <a:pPr algn="ctr"/>
-          </a:p>
-        </p:txBody>
-      </p:sp>
-      <p:sp>
-        <p:nvSpPr>
-          <p:cNvPr id="5" name="TextBox 4"/>
-          <p:cNvSpPr txBox="1"/>
-          <p:nvPr/>
-        </p:nvSpPr>
-        <p:spPr>
-          <a:xfrm>
-            <a:off x="11155680" y="6400800"/>
-            <a:ext cx="548640" cy="274320"/>
-          </a:xfrm>
-          <a:prstGeom prst="rect">
-            <a:avLst/>
-          </a:prstGeom>
-          <a:noFill/>
-        </p:spPr>
-        <p:txBody>
-          <a:bodyPr wrap="square" anchor="t" lIns="36576" rIns="36576" tIns="18288" bIns="18288">
-            <a:spAutoFit/>
-          </a:bodyPr>
-          <a:lstStyle/>
-          <a:p>
-            <a:pPr algn="r">
-              <a:lnSpc>
-                <a:spcPct val="115000"/>
-              </a:lnSpc>
-            </a:pPr>
-            <a:r>
-              <a:rPr sz="1000" b="0">
-                <a:solidFill>
-                  <a:srgbClr val="6B7785"/>
-                </a:solidFill>
-                <a:latin typeface="Arial"/>
-              </a:rPr>
-              <a:t>19</a:t>
-            </a:r>
-          </a:p>
-        </p:txBody>
-      </p:sp>
-      <p:pic>
-        <p:nvPicPr>
-          <p:cNvPr id="6" name="Picture 5" descr="fig_bonsai_thermal.png"/>
-          <p:cNvPicPr>
-            <a:picLocks noChangeAspect="1"/>
-          </p:cNvPicPr>
-          <p:nvPr/>
-        </p:nvPicPr>
-        <p:blipFill>
-          <a:blip r:embed="rId2"/>
-          <a:stretch>
-            <a:fillRect/>
-          </a:stretch>
-        </p:blipFill>
-        <p:spPr>
-          <a:xfrm>
-            <a:off x="2132095" y="1600200"/>
-            <a:ext cx="3051008" cy="4571999"/>
-          </a:xfrm>
-          <a:prstGeom prst="rect">
-            <a:avLst/>
-          </a:prstGeom>
-        </p:spPr>
-      </p:pic>
-      <p:sp>
-        <p:nvSpPr>
-          <p:cNvPr id="7" name="TextBox 6"/>
-          <p:cNvSpPr txBox="1"/>
-          <p:nvPr/>
-        </p:nvSpPr>
-        <p:spPr>
-          <a:xfrm>
-            <a:off x="6400800" y="1920240"/>
-            <a:ext cx="5303520" cy="4023360"/>
-          </a:xfrm>
-          <a:prstGeom prst="rect">
-            <a:avLst/>
-          </a:prstGeom>
-          <a:noFill/>
-        </p:spPr>
-        <p:txBody>
-          <a:bodyPr wrap="square" lIns="36576" rIns="36576">
-            <a:spAutoFit/>
-          </a:bodyPr>
-          <a:lstStyle/>
-          <a:p>
-            <a:pPr>
-              <a:lnSpc>
-                <a:spcPct val="112000"/>
-              </a:lnSpc>
-              <a:spcAft>
-                <a:spcPts val="1000"/>
-              </a:spcAft>
-            </a:pPr>
-            <a:r>
-              <a:rPr sz="1500">
-                <a:solidFill>
-                  <a:srgbClr val="38424E"/>
-                </a:solidFill>
-                <a:latin typeface="Arial"/>
-              </a:rPr>
-              <a:t>•  The full cache runs 85.6 minutes and drives the battery to 50.2 °C.</a:t>
-            </a:r>
-          </a:p>
-          <a:p>
-            <a:pPr>
-              <a:lnSpc>
-                <a:spcPct val="112000"/>
-              </a:lnSpc>
-              <a:spcAft>
-                <a:spcPts val="1000"/>
-              </a:spcAft>
-            </a:pPr>
-            <a:r>
-              <a:rPr sz="1500">
-                <a:solidFill>
-                  <a:srgbClr val="38424E"/>
-                </a:solidFill>
-                <a:latin typeface="Arial"/>
-              </a:rPr>
-              <a:t>•  At 50 °C the vendor deep-throttles both clusters to 883 MHz, in a sawtooth of 17 dips totalling 923 s.</a:t>
-            </a:r>
-          </a:p>
-          <a:p>
-            <a:pPr>
-              <a:lnSpc>
-                <a:spcPct val="112000"/>
-              </a:lnSpc>
-              <a:spcAft>
-                <a:spcPts val="1000"/>
-              </a:spcAft>
-            </a:pPr>
-            <a:r>
-              <a:rPr sz="1500">
-                <a:solidFill>
-                  <a:srgbClr val="38424E"/>
-                </a:solidFill>
-                <a:latin typeface="Arial"/>
-              </a:rPr>
-              <a:t>•  μKV finishes in 33.2 minutes at a 44.2 °C peak, before the trigger ever fires.</a:t>
-            </a:r>
-          </a:p>
-          <a:p>
-            <a:pPr>
-              <a:lnSpc>
-                <a:spcPct val="112000"/>
-              </a:lnSpc>
-              <a:spcAft>
-                <a:spcPts val="1000"/>
-              </a:spcAft>
-            </a:pPr>
-            <a:r>
-              <a:rPr sz="1500">
-                <a:solidFill>
-                  <a:srgbClr val="38424E"/>
-                </a:solidFill>
-                <a:latin typeface="Arial"/>
-              </a:rPr>
-              <a:t>•  Given the watchdog, the full cache's battery rise flattens from 0.48 to 0.05 °C per minute.</a:t>
-            </a:r>
-          </a:p>
-          <a:p>
-            <a:pPr>
-              <a:lnSpc>
-                <a:spcPct val="112000"/>
-              </a:lnSpc>
-              <a:spcAft>
-                <a:spcPts val="1000"/>
-              </a:spcAft>
-            </a:pPr>
-            <a:r>
-              <a:rPr sz="1500">
-                <a:solidFill>
-                  <a:srgbClr val="38424E"/>
-                </a:solidFill>
-                <a:latin typeface="Arial"/>
-              </a:rPr>
-              <a:t>•  The watchdog never fired in any Table 1 cell. That result is pure eviction.</a:t>
             </a:r>
           </a:p>
         </p:txBody>
@@ -17634,6 +18155,327 @@
             <a:r>
               <a:rPr sz="1100" b="1">
                 <a:solidFill>
+                  <a:srgbClr val="2B6CA3"/>
+                </a:solidFill>
+                <a:latin typeface="Arial"/>
+              </a:rPr>
+              <a:t>THE WORKLOAD THAT REACHES THE CLIFF</a:t>
+            </a:r>
+          </a:p>
+        </p:txBody>
+      </p:sp>
+      <p:sp>
+        <p:nvSpPr>
+          <p:cNvPr id="3" name="TextBox 2"/>
+          <p:cNvSpPr txBox="1"/>
+          <p:nvPr/>
+        </p:nvSpPr>
+        <p:spPr>
+          <a:xfrm>
+            <a:off x="548640" y="603504"/>
+            <a:ext cx="11064240" cy="640080"/>
+          </a:xfrm>
+          <a:prstGeom prst="rect">
+            <a:avLst/>
+          </a:prstGeom>
+          <a:noFill/>
+        </p:spPr>
+        <p:txBody>
+          <a:bodyPr wrap="square" anchor="t" lIns="36576" rIns="36576" tIns="18288" bIns="18288">
+            <a:spAutoFit/>
+          </a:bodyPr>
+          <a:lstStyle/>
+          <a:p>
+            <a:pPr algn="l">
+              <a:lnSpc>
+                <a:spcPct val="115000"/>
+              </a:lnSpc>
+            </a:pPr>
+            <a:r>
+              <a:rPr sz="2800" b="1">
+                <a:solidFill>
+                  <a:srgbClr val="0C1116"/>
+                </a:solidFill>
+                <a:latin typeface="Arial"/>
+              </a:rPr>
+              <a:t>Bonsai-8B, phone CPU, full cache against μKV</a:t>
+            </a:r>
+          </a:p>
+        </p:txBody>
+      </p:sp>
+      <p:sp>
+        <p:nvSpPr>
+          <p:cNvPr id="4" name="Rectangle 3"/>
+          <p:cNvSpPr/>
+          <p:nvPr/>
+        </p:nvSpPr>
+        <p:spPr>
+          <a:xfrm>
+            <a:off x="548640" y="1298448"/>
+            <a:ext cx="11064240" cy="9525"/>
+          </a:xfrm>
+          <a:prstGeom prst="rect">
+            <a:avLst/>
+          </a:prstGeom>
+          <a:solidFill>
+            <a:srgbClr val="D9DEE4"/>
+          </a:solidFill>
+          <a:ln>
+            <a:noFill/>
+          </a:ln>
+          <a:effectLst/>
+        </p:spPr>
+        <p:style>
+          <a:lnRef idx="1">
+            <a:schemeClr val="accent1"/>
+          </a:lnRef>
+          <a:fillRef idx="3">
+            <a:schemeClr val="accent1"/>
+          </a:fillRef>
+          <a:effectRef idx="2">
+            <a:schemeClr val="accent1"/>
+          </a:effectRef>
+          <a:fontRef idx="minor">
+            <a:schemeClr val="lt1"/>
+          </a:fontRef>
+        </p:style>
+        <p:txBody>
+          <a:bodyPr rtlCol="0" anchor="ctr"/>
+          <a:lstStyle/>
+          <a:p>
+            <a:pPr algn="ctr"/>
+          </a:p>
+        </p:txBody>
+      </p:sp>
+      <p:sp>
+        <p:nvSpPr>
+          <p:cNvPr id="5" name="TextBox 4"/>
+          <p:cNvSpPr txBox="1"/>
+          <p:nvPr/>
+        </p:nvSpPr>
+        <p:spPr>
+          <a:xfrm>
+            <a:off x="11155680" y="6400800"/>
+            <a:ext cx="548640" cy="274320"/>
+          </a:xfrm>
+          <a:prstGeom prst="rect">
+            <a:avLst/>
+          </a:prstGeom>
+          <a:noFill/>
+        </p:spPr>
+        <p:txBody>
+          <a:bodyPr wrap="square" anchor="t" lIns="36576" rIns="36576" tIns="18288" bIns="18288">
+            <a:spAutoFit/>
+          </a:bodyPr>
+          <a:lstStyle/>
+          <a:p>
+            <a:pPr algn="r">
+              <a:lnSpc>
+                <a:spcPct val="115000"/>
+              </a:lnSpc>
+            </a:pPr>
+            <a:r>
+              <a:rPr sz="1000" b="0">
+                <a:solidFill>
+                  <a:srgbClr val="6B7785"/>
+                </a:solidFill>
+                <a:latin typeface="Arial"/>
+              </a:rPr>
+              <a:t>20</a:t>
+            </a:r>
+          </a:p>
+        </p:txBody>
+      </p:sp>
+      <p:pic>
+        <p:nvPicPr>
+          <p:cNvPr id="6" name="Picture 5" descr="fig_bonsai_thermal.png"/>
+          <p:cNvPicPr>
+            <a:picLocks noChangeAspect="1"/>
+          </p:cNvPicPr>
+          <p:nvPr/>
+        </p:nvPicPr>
+        <p:blipFill>
+          <a:blip r:embed="rId2"/>
+          <a:stretch>
+            <a:fillRect/>
+          </a:stretch>
+        </p:blipFill>
+        <p:spPr>
+          <a:xfrm>
+            <a:off x="2132095" y="1600200"/>
+            <a:ext cx="3051008" cy="4571999"/>
+          </a:xfrm>
+          <a:prstGeom prst="rect">
+            <a:avLst/>
+          </a:prstGeom>
+        </p:spPr>
+      </p:pic>
+      <p:sp>
+        <p:nvSpPr>
+          <p:cNvPr id="7" name="TextBox 6"/>
+          <p:cNvSpPr txBox="1"/>
+          <p:nvPr/>
+        </p:nvSpPr>
+        <p:spPr>
+          <a:xfrm>
+            <a:off x="6400800" y="1920240"/>
+            <a:ext cx="5303520" cy="4023360"/>
+          </a:xfrm>
+          <a:prstGeom prst="rect">
+            <a:avLst/>
+          </a:prstGeom>
+          <a:noFill/>
+        </p:spPr>
+        <p:txBody>
+          <a:bodyPr wrap="square" lIns="36576" rIns="36576">
+            <a:spAutoFit/>
+          </a:bodyPr>
+          <a:lstStyle/>
+          <a:p>
+            <a:pPr>
+              <a:lnSpc>
+                <a:spcPct val="112000"/>
+              </a:lnSpc>
+              <a:spcAft>
+                <a:spcPts val="1000"/>
+              </a:spcAft>
+            </a:pPr>
+            <a:r>
+              <a:rPr sz="1500">
+                <a:solidFill>
+                  <a:srgbClr val="38424E"/>
+                </a:solidFill>
+                <a:latin typeface="Arial"/>
+              </a:rPr>
+              <a:t>•  The full cache runs 85.6 minutes and drives the battery to 50.2 °C.</a:t>
+            </a:r>
+          </a:p>
+          <a:p>
+            <a:pPr>
+              <a:lnSpc>
+                <a:spcPct val="112000"/>
+              </a:lnSpc>
+              <a:spcAft>
+                <a:spcPts val="1000"/>
+              </a:spcAft>
+            </a:pPr>
+            <a:r>
+              <a:rPr sz="1500">
+                <a:solidFill>
+                  <a:srgbClr val="38424E"/>
+                </a:solidFill>
+                <a:latin typeface="Arial"/>
+              </a:rPr>
+              <a:t>•  At 50 °C the vendor deep-throttles both clusters to 883 MHz, in a sawtooth of 17 dips totalling 923 s.</a:t>
+            </a:r>
+          </a:p>
+          <a:p>
+            <a:pPr>
+              <a:lnSpc>
+                <a:spcPct val="112000"/>
+              </a:lnSpc>
+              <a:spcAft>
+                <a:spcPts val="1000"/>
+              </a:spcAft>
+            </a:pPr>
+            <a:r>
+              <a:rPr sz="1500">
+                <a:solidFill>
+                  <a:srgbClr val="38424E"/>
+                </a:solidFill>
+                <a:latin typeface="Arial"/>
+              </a:rPr>
+              <a:t>•  μKV finishes in 33.2 minutes at a 44.2 °C peak, before the trigger ever fires.</a:t>
+            </a:r>
+          </a:p>
+          <a:p>
+            <a:pPr>
+              <a:lnSpc>
+                <a:spcPct val="112000"/>
+              </a:lnSpc>
+              <a:spcAft>
+                <a:spcPts val="1000"/>
+              </a:spcAft>
+            </a:pPr>
+            <a:r>
+              <a:rPr sz="1500">
+                <a:solidFill>
+                  <a:srgbClr val="38424E"/>
+                </a:solidFill>
+                <a:latin typeface="Arial"/>
+              </a:rPr>
+              <a:t>•  Given the watchdog, the full cache's battery rise flattens from 0.48 to 0.05 °C per minute.</a:t>
+            </a:r>
+          </a:p>
+          <a:p>
+            <a:pPr>
+              <a:lnSpc>
+                <a:spcPct val="112000"/>
+              </a:lnSpc>
+              <a:spcAft>
+                <a:spcPts val="1000"/>
+              </a:spcAft>
+            </a:pPr>
+            <a:r>
+              <a:rPr sz="1500">
+                <a:solidFill>
+                  <a:srgbClr val="38424E"/>
+                </a:solidFill>
+                <a:latin typeface="Arial"/>
+              </a:rPr>
+              <a:t>•  The watchdog never fired in any Table 1 cell. That result is pure eviction.</a:t>
+            </a:r>
+          </a:p>
+        </p:txBody>
+      </p:sp>
+    </p:spTree>
+  </p:cSld>
+  <p:clrMapOvr>
+    <a:masterClrMapping/>
+  </p:clrMapOvr>
+</p:sld>
+</file>
+
+<file path=ppt/slides/slide21.xml><?xml version="1.0" encoding="utf-8"?>
+<p:sld xmlns:a="http://schemas.openxmlformats.org/drawingml/2006/main" xmlns:p="http://schemas.openxmlformats.org/presentationml/2006/main" xmlns:r="http://schemas.openxmlformats.org/officeDocument/2006/relationships">
+  <p:cSld>
+    <p:spTree>
+      <p:nvGrpSpPr>
+        <p:cNvPr id="1" name=""/>
+        <p:cNvGrpSpPr/>
+        <p:nvPr/>
+      </p:nvGrpSpPr>
+      <p:grpSpPr/>
+      <p:sp>
+        <p:nvSpPr>
+          <p:cNvPr id="2" name="TextBox 1"/>
+          <p:cNvSpPr txBox="1"/>
+          <p:nvPr/>
+        </p:nvSpPr>
+        <p:spPr>
+          <a:xfrm>
+            <a:off x="548640" y="320040"/>
+            <a:ext cx="8229600" cy="274320"/>
+          </a:xfrm>
+          <a:prstGeom prst="rect">
+            <a:avLst/>
+          </a:prstGeom>
+          <a:noFill/>
+        </p:spPr>
+        <p:txBody>
+          <a:bodyPr wrap="square" anchor="t" lIns="36576" rIns="36576" tIns="18288" bIns="18288">
+            <a:spAutoFit/>
+          </a:bodyPr>
+          <a:lstStyle/>
+          <a:p>
+            <a:pPr algn="l">
+              <a:lnSpc>
+                <a:spcPct val="115000"/>
+              </a:lnSpc>
+            </a:pPr>
+            <a:r>
+              <a:rPr sz="1100" b="1">
+                <a:solidFill>
                   <a:srgbClr val="C4581A"/>
                 </a:solidFill>
                 <a:latin typeface="Arial"/>
@@ -17760,7 +18602,7 @@
                 </a:solidFill>
                 <a:latin typeface="Arial"/>
               </a:rPr>
-              <a:t>20</a:t>
+              <a:t>21</a:t>
             </a:r>
           </a:p>
         </p:txBody>
@@ -17929,7 +18771,7 @@
 </p:sld>
 </file>
 
-<file path=ppt/slides/slide21.xml><?xml version="1.0" encoding="utf-8"?>
+<file path=ppt/slides/slide22.xml><?xml version="1.0" encoding="utf-8"?>
 <p:sld xmlns:a="http://schemas.openxmlformats.org/drawingml/2006/main" xmlns:p="http://schemas.openxmlformats.org/presentationml/2006/main" xmlns:r="http://schemas.openxmlformats.org/officeDocument/2006/relationships">
   <p:cSld>
     <p:spTree>
@@ -18095,7 +18937,7 @@
                 </a:solidFill>
                 <a:latin typeface="Arial"/>
               </a:rPr>
-              <a:t>21</a:t>
+              <a:t>22</a:t>
             </a:r>
           </a:p>
         </p:txBody>
@@ -18946,7 +19788,7 @@
 </p:sld>
 </file>
 
-<file path=ppt/slides/slide22.xml><?xml version="1.0" encoding="utf-8"?>
+<file path=ppt/slides/slide23.xml><?xml version="1.0" encoding="utf-8"?>
 <p:sld xmlns:a="http://schemas.openxmlformats.org/drawingml/2006/main" xmlns:p="http://schemas.openxmlformats.org/presentationml/2006/main" xmlns:r="http://schemas.openxmlformats.org/officeDocument/2006/relationships">
   <p:cSld>
     <p:spTree>
@@ -19112,7 +19954,7 @@
                 </a:solidFill>
                 <a:latin typeface="Arial"/>
               </a:rPr>
-              <a:t>22</a:t>
+              <a:t>23</a:t>
             </a:r>
           </a:p>
         </p:txBody>
@@ -19188,7 +20030,7 @@
 </p:sld>
 </file>
 
-<file path=ppt/slides/slide23.xml><?xml version="1.0" encoding="utf-8"?>
+<file path=ppt/slides/slide24.xml><?xml version="1.0" encoding="utf-8"?>
 <p:sld xmlns:a="http://schemas.openxmlformats.org/drawingml/2006/main" xmlns:p="http://schemas.openxmlformats.org/presentationml/2006/main" xmlns:r="http://schemas.openxmlformats.org/officeDocument/2006/relationships">
   <p:cSld>
     <p:spTree>
@@ -19354,7 +20196,7 @@
                 </a:solidFill>
                 <a:latin typeface="Arial"/>
               </a:rPr>
-              <a:t>23</a:t>
+              <a:t>24</a:t>
             </a:r>
           </a:p>
         </p:txBody>
@@ -19430,7 +20272,7 @@
 </p:sld>
 </file>
 
-<file path=ppt/slides/slide24.xml><?xml version="1.0" encoding="utf-8"?>
+<file path=ppt/slides/slide25.xml><?xml version="1.0" encoding="utf-8"?>
 <p:sld xmlns:a="http://schemas.openxmlformats.org/drawingml/2006/main" xmlns:p="http://schemas.openxmlformats.org/presentationml/2006/main" xmlns:r="http://schemas.openxmlformats.org/officeDocument/2006/relationships">
   <p:cSld>
     <p:spTree>
@@ -19596,7 +20438,7 @@
                 </a:solidFill>
                 <a:latin typeface="Arial"/>
               </a:rPr>
-              <a:t>24</a:t>
+              <a:t>25</a:t>
             </a:r>
           </a:p>
         </p:txBody>
@@ -20364,7 +21206,7 @@
 </p:sld>
 </file>
 
-<file path=ppt/slides/slide25.xml><?xml version="1.0" encoding="utf-8"?>
+<file path=ppt/slides/slide26.xml><?xml version="1.0" encoding="utf-8"?>
 <p:sld xmlns:a="http://schemas.openxmlformats.org/drawingml/2006/main" xmlns:p="http://schemas.openxmlformats.org/presentationml/2006/main" xmlns:r="http://schemas.openxmlformats.org/officeDocument/2006/relationships">
   <p:cSld>
     <p:spTree>
@@ -20530,7 +21372,7 @@
                 </a:solidFill>
                 <a:latin typeface="Arial"/>
               </a:rPr>
-              <a:t>25</a:t>
+              <a:t>26</a:t>
             </a:r>
           </a:p>
         </p:txBody>
@@ -22173,7 +23015,7 @@
 </p:sld>
 </file>
 
-<file path=ppt/slides/slide26.xml><?xml version="1.0" encoding="utf-8"?>
+<file path=ppt/slides/slide27.xml><?xml version="1.0" encoding="utf-8"?>
 <p:sld xmlns:a="http://schemas.openxmlformats.org/drawingml/2006/main" xmlns:p="http://schemas.openxmlformats.org/presentationml/2006/main" xmlns:r="http://schemas.openxmlformats.org/officeDocument/2006/relationships">
   <p:cSld>
     <p:spTree>
@@ -22339,7 +23181,7 @@
                 </a:solidFill>
                 <a:latin typeface="Arial"/>
               </a:rPr>
-              <a:t>26</a:t>
+              <a:t>27</a:t>
             </a:r>
           </a:p>
         </p:txBody>
@@ -23473,7 +24315,7 @@
 </p:sld>
 </file>
 
-<file path=ppt/slides/slide27.xml><?xml version="1.0" encoding="utf-8"?>
+<file path=ppt/slides/slide28.xml><?xml version="1.0" encoding="utf-8"?>
 <p:sld xmlns:a="http://schemas.openxmlformats.org/drawingml/2006/main" xmlns:p="http://schemas.openxmlformats.org/presentationml/2006/main" xmlns:r="http://schemas.openxmlformats.org/officeDocument/2006/relationships">
   <p:cSld>
     <p:spTree>
@@ -23639,7 +24481,7 @@
                 </a:solidFill>
                 <a:latin typeface="Arial"/>
               </a:rPr>
-              <a:t>27</a:t>
+              <a:t>28</a:t>
             </a:r>
           </a:p>
         </p:txBody>
@@ -24276,7 +25118,7 @@
 </p:sld>
 </file>
 
-<file path=ppt/slides/slide28.xml><?xml version="1.0" encoding="utf-8"?>
+<file path=ppt/slides/slide29.xml><?xml version="1.0" encoding="utf-8"?>
 <p:sld xmlns:a="http://schemas.openxmlformats.org/drawingml/2006/main" xmlns:p="http://schemas.openxmlformats.org/presentationml/2006/main" xmlns:r="http://schemas.openxmlformats.org/officeDocument/2006/relationships">
   <p:cSld>
     <p:spTree>
@@ -24442,7 +25284,7 @@
                 </a:solidFill>
                 <a:latin typeface="Arial"/>
               </a:rPr>
-              <a:t>28</a:t>
+              <a:t>29</a:t>
             </a:r>
           </a:p>
         </p:txBody>
@@ -26487,322 +27329,6 @@
           </a:graphicData>
         </a:graphic>
       </p:graphicFrame>
-    </p:spTree>
-  </p:cSld>
-  <p:clrMapOvr>
-    <a:masterClrMapping/>
-  </p:clrMapOvr>
-</p:sld>
-</file>
-
-<file path=ppt/slides/slide29.xml><?xml version="1.0" encoding="utf-8"?>
-<p:sld xmlns:a="http://schemas.openxmlformats.org/drawingml/2006/main" xmlns:p="http://schemas.openxmlformats.org/presentationml/2006/main" xmlns:r="http://schemas.openxmlformats.org/officeDocument/2006/relationships">
-  <p:cSld>
-    <p:spTree>
-      <p:nvGrpSpPr>
-        <p:cNvPr id="1" name=""/>
-        <p:cNvGrpSpPr/>
-        <p:nvPr/>
-      </p:nvGrpSpPr>
-      <p:grpSpPr/>
-      <p:sp>
-        <p:nvSpPr>
-          <p:cNvPr id="2" name="TextBox 1"/>
-          <p:cNvSpPr txBox="1"/>
-          <p:nvPr/>
-        </p:nvSpPr>
-        <p:spPr>
-          <a:xfrm>
-            <a:off x="548640" y="320040"/>
-            <a:ext cx="8229600" cy="274320"/>
-          </a:xfrm>
-          <a:prstGeom prst="rect">
-            <a:avLst/>
-          </a:prstGeom>
-          <a:noFill/>
-        </p:spPr>
-        <p:txBody>
-          <a:bodyPr wrap="square" anchor="t" lIns="36576" rIns="36576" tIns="18288" bIns="18288">
-            <a:spAutoFit/>
-          </a:bodyPr>
-          <a:lstStyle/>
-          <a:p>
-            <a:pPr algn="l">
-              <a:lnSpc>
-                <a:spcPct val="115000"/>
-              </a:lnSpc>
-            </a:pPr>
-            <a:r>
-              <a:rPr sz="1100" b="1">
-                <a:solidFill>
-                  <a:srgbClr val="C4581A"/>
-                </a:solidFill>
-                <a:latin typeface="Arial"/>
-              </a:rPr>
-              <a:t>WHAT IS OPEN</a:t>
-            </a:r>
-          </a:p>
-        </p:txBody>
-      </p:sp>
-      <p:sp>
-        <p:nvSpPr>
-          <p:cNvPr id="3" name="TextBox 2"/>
-          <p:cNvSpPr txBox="1"/>
-          <p:nvPr/>
-        </p:nvSpPr>
-        <p:spPr>
-          <a:xfrm>
-            <a:off x="548640" y="603504"/>
-            <a:ext cx="11064240" cy="640080"/>
-          </a:xfrm>
-          <a:prstGeom prst="rect">
-            <a:avLst/>
-          </a:prstGeom>
-          <a:noFill/>
-        </p:spPr>
-        <p:txBody>
-          <a:bodyPr wrap="square" anchor="t" lIns="36576" rIns="36576" tIns="18288" bIns="18288">
-            <a:spAutoFit/>
-          </a:bodyPr>
-          <a:lstStyle/>
-          <a:p>
-            <a:pPr algn="l">
-              <a:lnSpc>
-                <a:spcPct val="115000"/>
-              </a:lnSpc>
-            </a:pPr>
-            <a:r>
-              <a:rPr sz="2800" b="1">
-                <a:solidFill>
-                  <a:srgbClr val="0C1116"/>
-                </a:solidFill>
-                <a:latin typeface="Arial"/>
-              </a:rPr>
-              <a:t>Stated plainly, because a workshop paper should</a:t>
-            </a:r>
-          </a:p>
-        </p:txBody>
-      </p:sp>
-      <p:sp>
-        <p:nvSpPr>
-          <p:cNvPr id="4" name="Rectangle 3"/>
-          <p:cNvSpPr/>
-          <p:nvPr/>
-        </p:nvSpPr>
-        <p:spPr>
-          <a:xfrm>
-            <a:off x="548640" y="1298448"/>
-            <a:ext cx="11064240" cy="9525"/>
-          </a:xfrm>
-          <a:prstGeom prst="rect">
-            <a:avLst/>
-          </a:prstGeom>
-          <a:solidFill>
-            <a:srgbClr val="D9DEE4"/>
-          </a:solidFill>
-          <a:ln>
-            <a:noFill/>
-          </a:ln>
-          <a:effectLst/>
-        </p:spPr>
-        <p:style>
-          <a:lnRef idx="1">
-            <a:schemeClr val="accent1"/>
-          </a:lnRef>
-          <a:fillRef idx="3">
-            <a:schemeClr val="accent1"/>
-          </a:fillRef>
-          <a:effectRef idx="2">
-            <a:schemeClr val="accent1"/>
-          </a:effectRef>
-          <a:fontRef idx="minor">
-            <a:schemeClr val="lt1"/>
-          </a:fontRef>
-        </p:style>
-        <p:txBody>
-          <a:bodyPr rtlCol="0" anchor="ctr"/>
-          <a:lstStyle/>
-          <a:p>
-            <a:pPr algn="ctr"/>
-          </a:p>
-        </p:txBody>
-      </p:sp>
-      <p:sp>
-        <p:nvSpPr>
-          <p:cNvPr id="5" name="TextBox 4"/>
-          <p:cNvSpPr txBox="1"/>
-          <p:nvPr/>
-        </p:nvSpPr>
-        <p:spPr>
-          <a:xfrm>
-            <a:off x="11155680" y="6400800"/>
-            <a:ext cx="548640" cy="274320"/>
-          </a:xfrm>
-          <a:prstGeom prst="rect">
-            <a:avLst/>
-          </a:prstGeom>
-          <a:noFill/>
-        </p:spPr>
-        <p:txBody>
-          <a:bodyPr wrap="square" anchor="t" lIns="36576" rIns="36576" tIns="18288" bIns="18288">
-            <a:spAutoFit/>
-          </a:bodyPr>
-          <a:lstStyle/>
-          <a:p>
-            <a:pPr algn="r">
-              <a:lnSpc>
-                <a:spcPct val="115000"/>
-              </a:lnSpc>
-            </a:pPr>
-            <a:r>
-              <a:rPr sz="1000" b="0">
-                <a:solidFill>
-                  <a:srgbClr val="6B7785"/>
-                </a:solidFill>
-                <a:latin typeface="Arial"/>
-              </a:rPr>
-              <a:t>29</a:t>
-            </a:r>
-          </a:p>
-        </p:txBody>
-      </p:sp>
-      <p:sp>
-        <p:nvSpPr>
-          <p:cNvPr id="6" name="TextBox 5"/>
-          <p:cNvSpPr txBox="1"/>
-          <p:nvPr/>
-        </p:nvSpPr>
-        <p:spPr>
-          <a:xfrm>
-            <a:off x="548640" y="1737360"/>
-            <a:ext cx="11064240" cy="3108960"/>
-          </a:xfrm>
-          <a:prstGeom prst="rect">
-            <a:avLst/>
-          </a:prstGeom>
-          <a:noFill/>
-        </p:spPr>
-        <p:txBody>
-          <a:bodyPr wrap="square" lIns="36576" rIns="36576">
-            <a:spAutoFit/>
-          </a:bodyPr>
-          <a:lstStyle/>
-          <a:p>
-            <a:pPr>
-              <a:lnSpc>
-                <a:spcPct val="112000"/>
-              </a:lnSpc>
-              <a:spcAft>
-                <a:spcPts val="1000"/>
-              </a:spcAft>
-            </a:pPr>
-            <a:r>
-              <a:rPr sz="1600">
-                <a:solidFill>
-                  <a:srgbClr val="38424E"/>
-                </a:solidFill>
-                <a:latin typeface="Arial"/>
-              </a:rPr>
-              <a:t>•  Eviction is destructive. μKV cannot recall a span it dropped.</a:t>
-            </a:r>
-          </a:p>
-          <a:p>
-            <a:pPr>
-              <a:lnSpc>
-                <a:spcPct val="112000"/>
-              </a:lnSpc>
-              <a:spcAft>
-                <a:spcPts val="1000"/>
-              </a:spcAft>
-            </a:pPr>
-            <a:r>
-              <a:rPr sz="1600">
-                <a:solidFill>
-                  <a:srgbClr val="38424E"/>
-                </a:solidFill>
-                <a:latin typeface="Arial"/>
-              </a:rPr>
-              <a:t>•  The natural next step is a third tier: park mid-scored cells in NAND using the scores μKV already computes. Reload is 23 MB for 721 cells, single-digit ms at UFS 4.0.</a:t>
-            </a:r>
-          </a:p>
-          <a:p>
-            <a:pPr>
-              <a:lnSpc>
-                <a:spcPct val="112000"/>
-              </a:lnSpc>
-              <a:spcAft>
-                <a:spcPts val="1000"/>
-              </a:spcAft>
-            </a:pPr>
-            <a:r>
-              <a:rPr sz="1600">
-                <a:solidFill>
-                  <a:srgbClr val="38424E"/>
-                </a:solidFill>
-                <a:latin typeface="Arial"/>
-              </a:rPr>
-              <a:t>•  The blocker is not reload cost. No mobile engine can shrink and regrow its KV pool, so parking frees nothing today.</a:t>
-            </a:r>
-          </a:p>
-          <a:p>
-            <a:pPr>
-              <a:lnSpc>
-                <a:spcPct val="112000"/>
-              </a:lnSpc>
-              <a:spcAft>
-                <a:spcPts val="1000"/>
-              </a:spcAft>
-            </a:pPr>
-            <a:r>
-              <a:rPr sz="1600">
-                <a:solidFill>
-                  <a:srgbClr val="38424E"/>
-                </a:solidFill>
-                <a:latin typeface="Arial"/>
-              </a:rPr>
-              <a:t>•  Nobody has measured what parking costs in flash write energy and wear. That is the number that decides whether the tier is worth having.</a:t>
-            </a:r>
-          </a:p>
-          <a:p>
-            <a:pPr>
-              <a:lnSpc>
-                <a:spcPct val="112000"/>
-              </a:lnSpc>
-              <a:spcAft>
-                <a:spcPts val="1000"/>
-              </a:spcAft>
-            </a:pPr>
-            <a:r>
-              <a:rPr sz="1600">
-                <a:solidFill>
-                  <a:srgbClr val="38424E"/>
-                </a:solidFill>
-                <a:latin typeface="Arial"/>
-              </a:rPr>
-              <a:t>•  The ladders are calibrated to one SoC. What generalizes is the protocol of anchoring a ladder above a measured vendor trigger, not the thresholds.</a:t>
-            </a:r>
-          </a:p>
-          <a:p>
-            <a:pPr>
-              <a:lnSpc>
-                <a:spcPct val="112000"/>
-              </a:lnSpc>
-              <a:spcAft>
-                <a:spcPts val="1000"/>
-              </a:spcAft>
-            </a:pPr>
-            <a:r>
-              <a:rPr sz="1600">
-                <a:solidFill>
-                  <a:srgbClr val="38424E"/>
-                </a:solidFill>
-                <a:latin typeface="Arial"/>
-              </a:rPr>
-              <a:t>•  Four of the per-head GPU cells are n = 1. The CPU StreamingLLM row still carries our fused-kernel omission.</a:t>
-            </a:r>
-          </a:p>
-        </p:txBody>
-      </p:sp>
     </p:spTree>
   </p:cSld>
   <p:clrMapOvr>
@@ -27537,6 +28063,322 @@
             <a:r>
               <a:rPr sz="1100" b="1">
                 <a:solidFill>
+                  <a:srgbClr val="C4581A"/>
+                </a:solidFill>
+                <a:latin typeface="Arial"/>
+              </a:rPr>
+              <a:t>WHAT IS OPEN</a:t>
+            </a:r>
+          </a:p>
+        </p:txBody>
+      </p:sp>
+      <p:sp>
+        <p:nvSpPr>
+          <p:cNvPr id="3" name="TextBox 2"/>
+          <p:cNvSpPr txBox="1"/>
+          <p:nvPr/>
+        </p:nvSpPr>
+        <p:spPr>
+          <a:xfrm>
+            <a:off x="548640" y="603504"/>
+            <a:ext cx="11064240" cy="640080"/>
+          </a:xfrm>
+          <a:prstGeom prst="rect">
+            <a:avLst/>
+          </a:prstGeom>
+          <a:noFill/>
+        </p:spPr>
+        <p:txBody>
+          <a:bodyPr wrap="square" anchor="t" lIns="36576" rIns="36576" tIns="18288" bIns="18288">
+            <a:spAutoFit/>
+          </a:bodyPr>
+          <a:lstStyle/>
+          <a:p>
+            <a:pPr algn="l">
+              <a:lnSpc>
+                <a:spcPct val="115000"/>
+              </a:lnSpc>
+            </a:pPr>
+            <a:r>
+              <a:rPr sz="2800" b="1">
+                <a:solidFill>
+                  <a:srgbClr val="0C1116"/>
+                </a:solidFill>
+                <a:latin typeface="Arial"/>
+              </a:rPr>
+              <a:t>Stated plainly, because a workshop paper should</a:t>
+            </a:r>
+          </a:p>
+        </p:txBody>
+      </p:sp>
+      <p:sp>
+        <p:nvSpPr>
+          <p:cNvPr id="4" name="Rectangle 3"/>
+          <p:cNvSpPr/>
+          <p:nvPr/>
+        </p:nvSpPr>
+        <p:spPr>
+          <a:xfrm>
+            <a:off x="548640" y="1298448"/>
+            <a:ext cx="11064240" cy="9525"/>
+          </a:xfrm>
+          <a:prstGeom prst="rect">
+            <a:avLst/>
+          </a:prstGeom>
+          <a:solidFill>
+            <a:srgbClr val="D9DEE4"/>
+          </a:solidFill>
+          <a:ln>
+            <a:noFill/>
+          </a:ln>
+          <a:effectLst/>
+        </p:spPr>
+        <p:style>
+          <a:lnRef idx="1">
+            <a:schemeClr val="accent1"/>
+          </a:lnRef>
+          <a:fillRef idx="3">
+            <a:schemeClr val="accent1"/>
+          </a:fillRef>
+          <a:effectRef idx="2">
+            <a:schemeClr val="accent1"/>
+          </a:effectRef>
+          <a:fontRef idx="minor">
+            <a:schemeClr val="lt1"/>
+          </a:fontRef>
+        </p:style>
+        <p:txBody>
+          <a:bodyPr rtlCol="0" anchor="ctr"/>
+          <a:lstStyle/>
+          <a:p>
+            <a:pPr algn="ctr"/>
+          </a:p>
+        </p:txBody>
+      </p:sp>
+      <p:sp>
+        <p:nvSpPr>
+          <p:cNvPr id="5" name="TextBox 4"/>
+          <p:cNvSpPr txBox="1"/>
+          <p:nvPr/>
+        </p:nvSpPr>
+        <p:spPr>
+          <a:xfrm>
+            <a:off x="11155680" y="6400800"/>
+            <a:ext cx="548640" cy="274320"/>
+          </a:xfrm>
+          <a:prstGeom prst="rect">
+            <a:avLst/>
+          </a:prstGeom>
+          <a:noFill/>
+        </p:spPr>
+        <p:txBody>
+          <a:bodyPr wrap="square" anchor="t" lIns="36576" rIns="36576" tIns="18288" bIns="18288">
+            <a:spAutoFit/>
+          </a:bodyPr>
+          <a:lstStyle/>
+          <a:p>
+            <a:pPr algn="r">
+              <a:lnSpc>
+                <a:spcPct val="115000"/>
+              </a:lnSpc>
+            </a:pPr>
+            <a:r>
+              <a:rPr sz="1000" b="0">
+                <a:solidFill>
+                  <a:srgbClr val="6B7785"/>
+                </a:solidFill>
+                <a:latin typeface="Arial"/>
+              </a:rPr>
+              <a:t>30</a:t>
+            </a:r>
+          </a:p>
+        </p:txBody>
+      </p:sp>
+      <p:sp>
+        <p:nvSpPr>
+          <p:cNvPr id="6" name="TextBox 5"/>
+          <p:cNvSpPr txBox="1"/>
+          <p:nvPr/>
+        </p:nvSpPr>
+        <p:spPr>
+          <a:xfrm>
+            <a:off x="548640" y="1737360"/>
+            <a:ext cx="11064240" cy="3108960"/>
+          </a:xfrm>
+          <a:prstGeom prst="rect">
+            <a:avLst/>
+          </a:prstGeom>
+          <a:noFill/>
+        </p:spPr>
+        <p:txBody>
+          <a:bodyPr wrap="square" lIns="36576" rIns="36576">
+            <a:spAutoFit/>
+          </a:bodyPr>
+          <a:lstStyle/>
+          <a:p>
+            <a:pPr>
+              <a:lnSpc>
+                <a:spcPct val="112000"/>
+              </a:lnSpc>
+              <a:spcAft>
+                <a:spcPts val="1000"/>
+              </a:spcAft>
+            </a:pPr>
+            <a:r>
+              <a:rPr sz="1600">
+                <a:solidFill>
+                  <a:srgbClr val="38424E"/>
+                </a:solidFill>
+                <a:latin typeface="Arial"/>
+              </a:rPr>
+              <a:t>•  Eviction is destructive. μKV cannot recall a span it dropped.</a:t>
+            </a:r>
+          </a:p>
+          <a:p>
+            <a:pPr>
+              <a:lnSpc>
+                <a:spcPct val="112000"/>
+              </a:lnSpc>
+              <a:spcAft>
+                <a:spcPts val="1000"/>
+              </a:spcAft>
+            </a:pPr>
+            <a:r>
+              <a:rPr sz="1600">
+                <a:solidFill>
+                  <a:srgbClr val="38424E"/>
+                </a:solidFill>
+                <a:latin typeface="Arial"/>
+              </a:rPr>
+              <a:t>•  The natural next step is a third tier: park mid-scored cells in NAND using the scores μKV already computes. Reload is 23 MB for 721 cells, single-digit ms at UFS 4.0.</a:t>
+            </a:r>
+          </a:p>
+          <a:p>
+            <a:pPr>
+              <a:lnSpc>
+                <a:spcPct val="112000"/>
+              </a:lnSpc>
+              <a:spcAft>
+                <a:spcPts val="1000"/>
+              </a:spcAft>
+            </a:pPr>
+            <a:r>
+              <a:rPr sz="1600">
+                <a:solidFill>
+                  <a:srgbClr val="38424E"/>
+                </a:solidFill>
+                <a:latin typeface="Arial"/>
+              </a:rPr>
+              <a:t>•  The blocker is not reload cost. No mobile engine can shrink and regrow its KV pool, so parking frees nothing today.</a:t>
+            </a:r>
+          </a:p>
+          <a:p>
+            <a:pPr>
+              <a:lnSpc>
+                <a:spcPct val="112000"/>
+              </a:lnSpc>
+              <a:spcAft>
+                <a:spcPts val="1000"/>
+              </a:spcAft>
+            </a:pPr>
+            <a:r>
+              <a:rPr sz="1600">
+                <a:solidFill>
+                  <a:srgbClr val="38424E"/>
+                </a:solidFill>
+                <a:latin typeface="Arial"/>
+              </a:rPr>
+              <a:t>•  Nobody has measured what parking costs in flash write energy and wear. That is the number that decides whether the tier is worth having.</a:t>
+            </a:r>
+          </a:p>
+          <a:p>
+            <a:pPr>
+              <a:lnSpc>
+                <a:spcPct val="112000"/>
+              </a:lnSpc>
+              <a:spcAft>
+                <a:spcPts val="1000"/>
+              </a:spcAft>
+            </a:pPr>
+            <a:r>
+              <a:rPr sz="1600">
+                <a:solidFill>
+                  <a:srgbClr val="38424E"/>
+                </a:solidFill>
+                <a:latin typeface="Arial"/>
+              </a:rPr>
+              <a:t>•  The ladders are calibrated to one SoC. What generalizes is the protocol of anchoring a ladder above a measured vendor trigger, not the thresholds.</a:t>
+            </a:r>
+          </a:p>
+          <a:p>
+            <a:pPr>
+              <a:lnSpc>
+                <a:spcPct val="112000"/>
+              </a:lnSpc>
+              <a:spcAft>
+                <a:spcPts val="1000"/>
+              </a:spcAft>
+            </a:pPr>
+            <a:r>
+              <a:rPr sz="1600">
+                <a:solidFill>
+                  <a:srgbClr val="38424E"/>
+                </a:solidFill>
+                <a:latin typeface="Arial"/>
+              </a:rPr>
+              <a:t>•  Four of the per-head GPU cells are n = 1. The CPU StreamingLLM row still carries our fused-kernel omission.</a:t>
+            </a:r>
+          </a:p>
+        </p:txBody>
+      </p:sp>
+    </p:spTree>
+  </p:cSld>
+  <p:clrMapOvr>
+    <a:masterClrMapping/>
+  </p:clrMapOvr>
+</p:sld>
+</file>
+
+<file path=ppt/slides/slide31.xml><?xml version="1.0" encoding="utf-8"?>
+<p:sld xmlns:a="http://schemas.openxmlformats.org/drawingml/2006/main" xmlns:p="http://schemas.openxmlformats.org/presentationml/2006/main" xmlns:r="http://schemas.openxmlformats.org/officeDocument/2006/relationships">
+  <p:cSld>
+    <p:spTree>
+      <p:nvGrpSpPr>
+        <p:cNvPr id="1" name=""/>
+        <p:cNvGrpSpPr/>
+        <p:nvPr/>
+      </p:nvGrpSpPr>
+      <p:grpSpPr/>
+      <p:sp>
+        <p:nvSpPr>
+          <p:cNvPr id="2" name="TextBox 1"/>
+          <p:cNvSpPr txBox="1"/>
+          <p:nvPr/>
+        </p:nvSpPr>
+        <p:spPr>
+          <a:xfrm>
+            <a:off x="548640" y="320040"/>
+            <a:ext cx="8229600" cy="274320"/>
+          </a:xfrm>
+          <a:prstGeom prst="rect">
+            <a:avLst/>
+          </a:prstGeom>
+          <a:noFill/>
+        </p:spPr>
+        <p:txBody>
+          <a:bodyPr wrap="square" anchor="t" lIns="36576" rIns="36576" tIns="18288" bIns="18288">
+            <a:spAutoFit/>
+          </a:bodyPr>
+          <a:lstStyle/>
+          <a:p>
+            <a:pPr algn="l">
+              <a:lnSpc>
+                <a:spcPct val="115000"/>
+              </a:lnSpc>
+            </a:pPr>
+            <a:r>
+              <a:rPr sz="1100" b="1">
+                <a:solidFill>
                   <a:srgbClr val="2B6CA3"/>
                 </a:solidFill>
                 <a:latin typeface="Arial"/>
@@ -27663,7 +28505,7 @@
                 </a:solidFill>
                 <a:latin typeface="Arial"/>
               </a:rPr>
-              <a:t>30</a:t>
+              <a:t>31</a:t>
             </a:r>
           </a:p>
         </p:txBody>
@@ -28224,7 +29066,7 @@
                 </a:solidFill>
                 <a:latin typeface="Arial"/>
               </a:rPr>
-              <a:t>Circled 1 to 9 are components. 1-3 are the pass, 4 is the watchdog, 5-9 are the scheduler. The control-plane figure letters its stages A to F so the two never collide.</a:t>
+              <a:t>Circled numbers are shared with the control-plane figure: 1-3 the pass, 4 sense, 5 decide, 6 act, 7 measure, 8 learn, 9 thermal guard. Same part, same number, both figures.</a:t>
             </a:r>
           </a:p>
         </p:txBody>
@@ -28602,6 +29444,1277 @@
                 </a:solidFill>
                 <a:latin typeface="Arial"/>
               </a:rPr>
+              <a:t>FROM THE SIDE NODE TO THE KEEP SET</a:t>
+            </a:r>
+          </a:p>
+        </p:txBody>
+      </p:sp>
+      <p:sp>
+        <p:nvSpPr>
+          <p:cNvPr id="3" name="TextBox 2"/>
+          <p:cNvSpPr txBox="1"/>
+          <p:nvPr/>
+        </p:nvSpPr>
+        <p:spPr>
+          <a:xfrm>
+            <a:off x="548640" y="603504"/>
+            <a:ext cx="11064240" cy="640080"/>
+          </a:xfrm>
+          <a:prstGeom prst="rect">
+            <a:avLst/>
+          </a:prstGeom>
+          <a:noFill/>
+        </p:spPr>
+        <p:txBody>
+          <a:bodyPr wrap="square" anchor="t" lIns="36576" rIns="36576" tIns="18288" bIns="18288">
+            <a:spAutoFit/>
+          </a:bodyPr>
+          <a:lstStyle/>
+          <a:p>
+            <a:pPr algn="l">
+              <a:lnSpc>
+                <a:spcPct val="115000"/>
+              </a:lnSpc>
+            </a:pPr>
+            <a:r>
+              <a:rPr sz="2800" b="1">
+                <a:solidFill>
+                  <a:srgbClr val="0C1116"/>
+                </a:solidFill>
+                <a:latin typeface="Arial"/>
+              </a:rPr>
+              <a:t>Every stage in order, and what each one produces</a:t>
+            </a:r>
+          </a:p>
+        </p:txBody>
+      </p:sp>
+      <p:sp>
+        <p:nvSpPr>
+          <p:cNvPr id="4" name="Rectangle 3"/>
+          <p:cNvSpPr/>
+          <p:nvPr/>
+        </p:nvSpPr>
+        <p:spPr>
+          <a:xfrm>
+            <a:off x="548640" y="1298448"/>
+            <a:ext cx="11064240" cy="9525"/>
+          </a:xfrm>
+          <a:prstGeom prst="rect">
+            <a:avLst/>
+          </a:prstGeom>
+          <a:solidFill>
+            <a:srgbClr val="D9DEE4"/>
+          </a:solidFill>
+          <a:ln>
+            <a:noFill/>
+          </a:ln>
+          <a:effectLst/>
+        </p:spPr>
+        <p:style>
+          <a:lnRef idx="1">
+            <a:schemeClr val="accent1"/>
+          </a:lnRef>
+          <a:fillRef idx="3">
+            <a:schemeClr val="accent1"/>
+          </a:fillRef>
+          <a:effectRef idx="2">
+            <a:schemeClr val="accent1"/>
+          </a:effectRef>
+          <a:fontRef idx="minor">
+            <a:schemeClr val="lt1"/>
+          </a:fontRef>
+        </p:style>
+        <p:txBody>
+          <a:bodyPr rtlCol="0" anchor="ctr"/>
+          <a:lstStyle/>
+          <a:p>
+            <a:pPr algn="ctr"/>
+          </a:p>
+        </p:txBody>
+      </p:sp>
+      <p:sp>
+        <p:nvSpPr>
+          <p:cNvPr id="5" name="TextBox 4"/>
+          <p:cNvSpPr txBox="1"/>
+          <p:nvPr/>
+        </p:nvSpPr>
+        <p:spPr>
+          <a:xfrm>
+            <a:off x="11155680" y="6400800"/>
+            <a:ext cx="548640" cy="274320"/>
+          </a:xfrm>
+          <a:prstGeom prst="rect">
+            <a:avLst/>
+          </a:prstGeom>
+          <a:noFill/>
+        </p:spPr>
+        <p:txBody>
+          <a:bodyPr wrap="square" anchor="t" lIns="36576" rIns="36576" tIns="18288" bIns="18288">
+            <a:spAutoFit/>
+          </a:bodyPr>
+          <a:lstStyle/>
+          <a:p>
+            <a:pPr algn="r">
+              <a:lnSpc>
+                <a:spcPct val="115000"/>
+              </a:lnSpc>
+            </a:pPr>
+            <a:r>
+              <a:rPr sz="1000" b="0">
+                <a:solidFill>
+                  <a:srgbClr val="6B7785"/>
+                </a:solidFill>
+                <a:latin typeface="Arial"/>
+              </a:rPr>
+              <a:t>6</a:t>
+            </a:r>
+          </a:p>
+        </p:txBody>
+      </p:sp>
+      <p:graphicFrame>
+        <p:nvGraphicFramePr>
+          <p:cNvPr id="6" name="Table 5"/>
+          <p:cNvGraphicFramePr>
+            <a:graphicFrameLocks noGrp="1"/>
+          </p:cNvGraphicFramePr>
+          <p:nvPr/>
+        </p:nvGraphicFramePr>
+        <p:xfrm>
+          <a:off x="411480" y="1481328"/>
+          <a:ext cx="10881360" cy="4114800"/>
+        </p:xfrm>
+        <a:graphic>
+          <a:graphicData uri="http://schemas.openxmlformats.org/drawingml/2006/table">
+            <a:tbl>
+              <a:tblPr firstRow="1" bandRow="1">
+                <a:tableStyleId>{5C22544A-7EE6-4342-B048-85BDC9FD1C3A}</a:tableStyleId>
+              </a:tblPr>
+              <a:tblGrid>
+                <a:gridCol w="365760"/>
+                <a:gridCol w="2011680"/>
+                <a:gridCol w="5029200"/>
+                <a:gridCol w="2834640"/>
+                <a:gridCol w="640080"/>
+              </a:tblGrid>
+              <a:tr h="457200">
+                <a:tc>
+                  <a:txBody>
+                    <a:bodyPr wrap="square"/>
+                    <a:lstStyle/>
+                    <a:p>
+                      <a:r>
+                        <a:rPr sz="1200" b="1">
+                          <a:solidFill>
+                            <a:srgbClr val="0C1116"/>
+                          </a:solidFill>
+                          <a:latin typeface="Arial"/>
+                        </a:rPr>
+                        <a:t/>
+                      </a:r>
+                    </a:p>
+                  </a:txBody>
+                  <a:tcPr marL="73152" marR="73152" marT="45720" marB="45720">
+                    <a:solidFill>
+                      <a:srgbClr val="EEF1F4"/>
+                    </a:solidFill>
+                  </a:tcPr>
+                </a:tc>
+                <a:tc>
+                  <a:txBody>
+                    <a:bodyPr wrap="square"/>
+                    <a:lstStyle/>
+                    <a:p>
+                      <a:r>
+                        <a:rPr sz="1200" b="1">
+                          <a:solidFill>
+                            <a:srgbClr val="0C1116"/>
+                          </a:solidFill>
+                          <a:latin typeface="Arial"/>
+                        </a:rPr>
+                        <a:t>Stage</a:t>
+                      </a:r>
+                    </a:p>
+                  </a:txBody>
+                  <a:tcPr marL="73152" marR="73152" marT="45720" marB="45720">
+                    <a:solidFill>
+                      <a:srgbClr val="EEF1F4"/>
+                    </a:solidFill>
+                  </a:tcPr>
+                </a:tc>
+                <a:tc>
+                  <a:txBody>
+                    <a:bodyPr wrap="square"/>
+                    <a:lstStyle/>
+                    <a:p>
+                      <a:r>
+                        <a:rPr sz="1200" b="1">
+                          <a:solidFill>
+                            <a:srgbClr val="0C1116"/>
+                          </a:solidFill>
+                          <a:latin typeface="Arial"/>
+                        </a:rPr>
+                        <a:t>What it does</a:t>
+                      </a:r>
+                    </a:p>
+                  </a:txBody>
+                  <a:tcPr marL="73152" marR="73152" marT="45720" marB="45720">
+                    <a:solidFill>
+                      <a:srgbClr val="EEF1F4"/>
+                    </a:solidFill>
+                  </a:tcPr>
+                </a:tc>
+                <a:tc>
+                  <a:txBody>
+                    <a:bodyPr wrap="square"/>
+                    <a:lstStyle/>
+                    <a:p>
+                      <a:r>
+                        <a:rPr sz="1200" b="1">
+                          <a:solidFill>
+                            <a:srgbClr val="0C1116"/>
+                          </a:solidFill>
+                          <a:latin typeface="Arial"/>
+                        </a:rPr>
+                        <a:t>What comes out</a:t>
+                      </a:r>
+                    </a:p>
+                  </a:txBody>
+                  <a:tcPr marL="73152" marR="73152" marT="45720" marB="45720">
+                    <a:solidFill>
+                      <a:srgbClr val="EEF1F4"/>
+                    </a:solidFill>
+                  </a:tcPr>
+                </a:tc>
+                <a:tc>
+                  <a:txBody>
+                    <a:bodyPr wrap="square"/>
+                    <a:lstStyle/>
+                    <a:p>
+                      <a:r>
+                        <a:rPr sz="1200" b="1">
+                          <a:solidFill>
+                            <a:srgbClr val="0C1116"/>
+                          </a:solidFill>
+                          <a:latin typeface="Arial"/>
+                        </a:rPr>
+                        <a:t>Fig 1</a:t>
+                      </a:r>
+                    </a:p>
+                  </a:txBody>
+                  <a:tcPr marL="73152" marR="73152" marT="45720" marB="45720">
+                    <a:solidFill>
+                      <a:srgbClr val="EEF1F4"/>
+                    </a:solidFill>
+                  </a:tcPr>
+                </a:tc>
+              </a:tr>
+              <a:tr h="457200">
+                <a:tc>
+                  <a:txBody>
+                    <a:bodyPr wrap="square"/>
+                    <a:lstStyle/>
+                    <a:p>
+                      <a:r>
+                        <a:rPr sz="1200">
+                          <a:solidFill>
+                            <a:srgbClr val="38424E"/>
+                          </a:solidFill>
+                          <a:latin typeface="Arial"/>
+                        </a:rPr>
+                        <a:t>a</a:t>
+                      </a:r>
+                    </a:p>
+                  </a:txBody>
+                  <a:tcPr marL="73152" marR="73152" marT="45720" marB="45720">
+                    <a:solidFill>
+                      <a:srgbClr val="FFFFFF"/>
+                    </a:solidFill>
+                  </a:tcPr>
+                </a:tc>
+                <a:tc>
+                  <a:txBody>
+                    <a:bodyPr wrap="square"/>
+                    <a:lstStyle/>
+                    <a:p>
+                      <a:r>
+                        <a:rPr sz="1200">
+                          <a:solidFill>
+                            <a:srgbClr val="38424E"/>
+                          </a:solidFill>
+                          <a:latin typeface="Arial"/>
+                        </a:rPr>
+                        <a:t>flash attention</a:t>
+                      </a:r>
+                    </a:p>
+                  </a:txBody>
+                  <a:tcPr marL="73152" marR="73152" marT="45720" marB="45720">
+                    <a:solidFill>
+                      <a:srgbClr val="FFFFFF"/>
+                    </a:solidFill>
+                  </a:tcPr>
+                </a:tc>
+                <a:tc>
+                  <a:txBody>
+                    <a:bodyPr wrap="square"/>
+                    <a:lstStyle/>
+                    <a:p>
+                      <a:r>
+                        <a:rPr sz="1200">
+                          <a:solidFill>
+                            <a:srgbClr val="38424E"/>
+                          </a:solidFill>
+                          <a:latin typeface="Arial"/>
+                        </a:rPr>
+                        <a:t>fuses softmax into the kernel, so the attention matrix is never written to memory</a:t>
+                      </a:r>
+                    </a:p>
+                  </a:txBody>
+                  <a:tcPr marL="73152" marR="73152" marT="45720" marB="45720">
+                    <a:solidFill>
+                      <a:srgbClr val="FFFFFF"/>
+                    </a:solidFill>
+                  </a:tcPr>
+                </a:tc>
+                <a:tc>
+                  <a:txBody>
+                    <a:bodyPr wrap="square"/>
+                    <a:lstStyle/>
+                    <a:p>
+                      <a:r>
+                        <a:rPr sz="1200">
+                          <a:solidFill>
+                            <a:srgbClr val="38424E"/>
+                          </a:solidFill>
+                          <a:latin typeface="Arial"/>
+                        </a:rPr>
+                        <a:t>layer output only</a:t>
+                      </a:r>
+                    </a:p>
+                  </a:txBody>
+                  <a:tcPr marL="73152" marR="73152" marT="45720" marB="45720">
+                    <a:solidFill>
+                      <a:srgbClr val="FFFFFF"/>
+                    </a:solidFill>
+                  </a:tcPr>
+                </a:tc>
+                <a:tc>
+                  <a:txBody>
+                    <a:bodyPr wrap="square"/>
+                    <a:lstStyle/>
+                    <a:p>
+                      <a:r>
+                        <a:rPr sz="1200">
+                          <a:solidFill>
+                            <a:srgbClr val="38424E"/>
+                          </a:solidFill>
+                          <a:latin typeface="Arial"/>
+                        </a:rPr>
+                        <a:t>—</a:t>
+                      </a:r>
+                    </a:p>
+                  </a:txBody>
+                  <a:tcPr marL="73152" marR="73152" marT="45720" marB="45720">
+                    <a:solidFill>
+                      <a:srgbClr val="FFFFFF"/>
+                    </a:solidFill>
+                  </a:tcPr>
+                </a:tc>
+              </a:tr>
+              <a:tr h="457200">
+                <a:tc>
+                  <a:txBody>
+                    <a:bodyPr wrap="square"/>
+                    <a:lstStyle/>
+                    <a:p>
+                      <a:r>
+                        <a:rPr sz="1200">
+                          <a:solidFill>
+                            <a:srgbClr val="38424E"/>
+                          </a:solidFill>
+                          <a:latin typeface="Arial"/>
+                        </a:rPr>
+                        <a:t>b</a:t>
+                      </a:r>
+                    </a:p>
+                  </a:txBody>
+                  <a:tcPr marL="73152" marR="73152" marT="45720" marB="45720">
+                    <a:solidFill>
+                      <a:srgbClr val="F7F9FB"/>
+                    </a:solidFill>
+                  </a:tcPr>
+                </a:tc>
+                <a:tc>
+                  <a:txBody>
+                    <a:bodyPr wrap="square"/>
+                    <a:lstStyle/>
+                    <a:p>
+                      <a:r>
+                        <a:rPr sz="1200">
+                          <a:solidFill>
+                            <a:srgbClr val="38424E"/>
+                          </a:solidFill>
+                          <a:latin typeface="Arial"/>
+                        </a:rPr>
+                        <a:t>kq_evict side node</a:t>
+                      </a:r>
+                    </a:p>
+                  </a:txBody>
+                  <a:tcPr marL="73152" marR="73152" marT="45720" marB="45720">
+                    <a:solidFill>
+                      <a:srgbClr val="F7F9FB"/>
+                    </a:solidFill>
+                  </a:tcPr>
+                </a:tc>
+                <a:tc>
+                  <a:txBody>
+                    <a:bodyPr wrap="square"/>
+                    <a:lstStyle/>
+                    <a:p>
+                      <a:r>
+                        <a:rPr sz="1200">
+                          <a:solidFill>
+                            <a:srgbClr val="38424E"/>
+                          </a:solidFill>
+                          <a:latin typeface="Arial"/>
+                        </a:rPr>
+                        <a:t>recomputes softmax(K Qᵀ) for the last 16 queries, on the last prefill chunk only, as a graph output rather than a mid-graph read</a:t>
+                      </a:r>
+                    </a:p>
+                  </a:txBody>
+                  <a:tcPr marL="73152" marR="73152" marT="45720" marB="45720">
+                    <a:solidFill>
+                      <a:srgbClr val="F7F9FB"/>
+                    </a:solidFill>
+                  </a:tcPr>
+                </a:tc>
+                <a:tc>
+                  <a:txBody>
+                    <a:bodyPr wrap="square"/>
+                    <a:lstStyle/>
+                    <a:p>
+                      <a:r>
+                        <a:rPr sz="1200">
+                          <a:solidFill>
+                            <a:srgbClr val="38424E"/>
+                          </a:solidFill>
+                          <a:latin typeface="Arial"/>
+                        </a:rPr>
+                        <a:t>A, 16 x N scores</a:t>
+                      </a:r>
+                    </a:p>
+                  </a:txBody>
+                  <a:tcPr marL="73152" marR="73152" marT="45720" marB="45720">
+                    <a:solidFill>
+                      <a:srgbClr val="F7F9FB"/>
+                    </a:solidFill>
+                  </a:tcPr>
+                </a:tc>
+                <a:tc>
+                  <a:txBody>
+                    <a:bodyPr wrap="square"/>
+                    <a:lstStyle/>
+                    <a:p>
+                      <a:r>
+                        <a:rPr sz="1200">
+                          <a:solidFill>
+                            <a:srgbClr val="38424E"/>
+                          </a:solidFill>
+                          <a:latin typeface="Arial"/>
+                        </a:rPr>
+                        <a:t>1</a:t>
+                      </a:r>
+                    </a:p>
+                  </a:txBody>
+                  <a:tcPr marL="73152" marR="73152" marT="45720" marB="45720">
+                    <a:solidFill>
+                      <a:srgbClr val="F7F9FB"/>
+                    </a:solidFill>
+                  </a:tcPr>
+                </a:tc>
+              </a:tr>
+              <a:tr h="457200">
+                <a:tc>
+                  <a:txBody>
+                    <a:bodyPr wrap="square"/>
+                    <a:lstStyle/>
+                    <a:p>
+                      <a:r>
+                        <a:rPr sz="1200">
+                          <a:solidFill>
+                            <a:srgbClr val="38424E"/>
+                          </a:solidFill>
+                          <a:latin typeface="Arial"/>
+                        </a:rPr>
+                        <a:t>c</a:t>
+                      </a:r>
+                    </a:p>
+                  </a:txBody>
+                  <a:tcPr marL="73152" marR="73152" marT="45720" marB="45720">
+                    <a:solidFill>
+                      <a:srgbClr val="FFFFFF"/>
+                    </a:solidFill>
+                  </a:tcPr>
+                </a:tc>
+                <a:tc>
+                  <a:txBody>
+                    <a:bodyPr wrap="square"/>
+                    <a:lstStyle/>
+                    <a:p>
+                      <a:r>
+                        <a:rPr sz="1200">
+                          <a:solidFill>
+                            <a:srgbClr val="38424E"/>
+                          </a:solidFill>
+                          <a:latin typeface="Arial"/>
+                        </a:rPr>
+                        <a:t>reduce over queries</a:t>
+                      </a:r>
+                    </a:p>
+                  </a:txBody>
+                  <a:tcPr marL="73152" marR="73152" marT="45720" marB="45720">
+                    <a:solidFill>
+                      <a:srgbClr val="FFFFFF"/>
+                    </a:solidFill>
+                  </a:tcPr>
+                </a:tc>
+                <a:tc>
+                  <a:txBody>
+                    <a:bodyPr wrap="square"/>
+                    <a:lstStyle/>
+                    <a:p>
+                      <a:r>
+                        <a:rPr sz="1200">
+                          <a:solidFill>
+                            <a:srgbClr val="38424E"/>
+                          </a:solidFill>
+                          <a:latin typeface="Arial"/>
+                        </a:rPr>
+                        <a:t>averages the 16 query rows away</a:t>
+                      </a:r>
+                    </a:p>
+                  </a:txBody>
+                  <a:tcPr marL="73152" marR="73152" marT="45720" marB="45720">
+                    <a:solidFill>
+                      <a:srgbClr val="FFFFFF"/>
+                    </a:solidFill>
+                  </a:tcPr>
+                </a:tc>
+                <a:tc>
+                  <a:txBody>
+                    <a:bodyPr wrap="square"/>
+                    <a:lstStyle/>
+                    <a:p>
+                      <a:r>
+                        <a:rPr sz="1200">
+                          <a:solidFill>
+                            <a:srgbClr val="38424E"/>
+                          </a:solidFill>
+                          <a:latin typeface="Arial"/>
+                        </a:rPr>
+                        <a:t>s, L x N: one score per layer per position</a:t>
+                      </a:r>
+                    </a:p>
+                  </a:txBody>
+                  <a:tcPr marL="73152" marR="73152" marT="45720" marB="45720">
+                    <a:solidFill>
+                      <a:srgbClr val="FFFFFF"/>
+                    </a:solidFill>
+                  </a:tcPr>
+                </a:tc>
+                <a:tc>
+                  <a:txBody>
+                    <a:bodyPr wrap="square"/>
+                    <a:lstStyle/>
+                    <a:p>
+                      <a:r>
+                        <a:rPr sz="1200">
+                          <a:solidFill>
+                            <a:srgbClr val="38424E"/>
+                          </a:solidFill>
+                          <a:latin typeface="Arial"/>
+                        </a:rPr>
+                        <a:t>1</a:t>
+                      </a:r>
+                    </a:p>
+                  </a:txBody>
+                  <a:tcPr marL="73152" marR="73152" marT="45720" marB="45720">
+                    <a:solidFill>
+                      <a:srgbClr val="FFFFFF"/>
+                    </a:solidFill>
+                  </a:tcPr>
+                </a:tc>
+              </a:tr>
+              <a:tr h="457200">
+                <a:tc>
+                  <a:txBody>
+                    <a:bodyPr wrap="square"/>
+                    <a:lstStyle/>
+                    <a:p>
+                      <a:r>
+                        <a:rPr sz="1200">
+                          <a:solidFill>
+                            <a:srgbClr val="38424E"/>
+                          </a:solidFill>
+                          <a:latin typeface="Arial"/>
+                        </a:rPr>
+                        <a:t>d</a:t>
+                      </a:r>
+                    </a:p>
+                  </a:txBody>
+                  <a:tcPr marL="73152" marR="73152" marT="45720" marB="45720">
+                    <a:solidFill>
+                      <a:srgbClr val="F7F9FB"/>
+                    </a:solidFill>
+                  </a:tcPr>
+                </a:tc>
+                <a:tc>
+                  <a:txBody>
+                    <a:bodyPr wrap="square"/>
+                    <a:lstStyle/>
+                    <a:p>
+                      <a:r>
+                        <a:rPr sz="1200">
+                          <a:solidFill>
+                            <a:srgbClr val="38424E"/>
+                          </a:solidFill>
+                          <a:latin typeface="Arial"/>
+                        </a:rPr>
+                        <a:t>aggregate layers and heads</a:t>
+                      </a:r>
+                    </a:p>
+                  </a:txBody>
+                  <a:tcPr marL="73152" marR="73152" marT="45720" marB="45720">
+                    <a:solidFill>
+                      <a:srgbClr val="F7F9FB"/>
+                    </a:solidFill>
+                  </a:tcPr>
+                </a:tc>
+                <a:tc>
+                  <a:txBody>
+                    <a:bodyPr wrap="square"/>
+                    <a:lstStyle/>
+                    <a:p>
+                      <a:r>
+                        <a:rPr sz="1200">
+                          <a:solidFill>
+                            <a:srgbClr val="38424E"/>
+                          </a:solidFill>
+                          <a:latin typeface="Arial"/>
+                        </a:rPr>
+                        <a:t>mean over l and h. This is the step that makes selection sequence-level</a:t>
+                      </a:r>
+                    </a:p>
+                  </a:txBody>
+                  <a:tcPr marL="73152" marR="73152" marT="45720" marB="45720">
+                    <a:solidFill>
+                      <a:srgbClr val="F7F9FB"/>
+                    </a:solidFill>
+                  </a:tcPr>
+                </a:tc>
+                <a:tc>
+                  <a:txBody>
+                    <a:bodyPr wrap="square"/>
+                    <a:lstStyle/>
+                    <a:p>
+                      <a:r>
+                        <a:rPr sz="1200">
+                          <a:solidFill>
+                            <a:srgbClr val="38424E"/>
+                          </a:solidFill>
+                          <a:latin typeface="Arial"/>
+                        </a:rPr>
+                        <a:t>one score per position, length N</a:t>
+                      </a:r>
+                    </a:p>
+                  </a:txBody>
+                  <a:tcPr marL="73152" marR="73152" marT="45720" marB="45720">
+                    <a:solidFill>
+                      <a:srgbClr val="F7F9FB"/>
+                    </a:solidFill>
+                  </a:tcPr>
+                </a:tc>
+                <a:tc>
+                  <a:txBody>
+                    <a:bodyPr wrap="square"/>
+                    <a:lstStyle/>
+                    <a:p>
+                      <a:r>
+                        <a:rPr sz="1200">
+                          <a:solidFill>
+                            <a:srgbClr val="38424E"/>
+                          </a:solidFill>
+                          <a:latin typeface="Arial"/>
+                        </a:rPr>
+                        <a:t>2</a:t>
+                      </a:r>
+                    </a:p>
+                  </a:txBody>
+                  <a:tcPr marL="73152" marR="73152" marT="45720" marB="45720">
+                    <a:solidFill>
+                      <a:srgbClr val="F7F9FB"/>
+                    </a:solidFill>
+                  </a:tcPr>
+                </a:tc>
+              </a:tr>
+              <a:tr h="457200">
+                <a:tc>
+                  <a:txBody>
+                    <a:bodyPr wrap="square"/>
+                    <a:lstStyle/>
+                    <a:p>
+                      <a:r>
+                        <a:rPr sz="1200">
+                          <a:solidFill>
+                            <a:srgbClr val="38424E"/>
+                          </a:solidFill>
+                          <a:latin typeface="Arial"/>
+                        </a:rPr>
+                        <a:t>e</a:t>
+                      </a:r>
+                    </a:p>
+                  </a:txBody>
+                  <a:tcPr marL="73152" marR="73152" marT="45720" marB="45720">
+                    <a:solidFill>
+                      <a:srgbClr val="FFFFFF"/>
+                    </a:solidFill>
+                  </a:tcPr>
+                </a:tc>
+                <a:tc>
+                  <a:txBody>
+                    <a:bodyPr wrap="square"/>
+                    <a:lstStyle/>
+                    <a:p>
+                      <a:r>
+                        <a:rPr sz="1200">
+                          <a:solidFill>
+                            <a:srgbClr val="38424E"/>
+                          </a:solidFill>
+                          <a:latin typeface="Arial"/>
+                        </a:rPr>
+                        <a:t>max-pool, kernel 7</a:t>
+                      </a:r>
+                    </a:p>
+                  </a:txBody>
+                  <a:tcPr marL="73152" marR="73152" marT="45720" marB="45720">
+                    <a:solidFill>
+                      <a:srgbClr val="FFFFFF"/>
+                    </a:solidFill>
+                  </a:tcPr>
+                </a:tc>
+                <a:tc>
+                  <a:txBody>
+                    <a:bodyPr wrap="square"/>
+                    <a:lstStyle/>
+                    <a:p>
+                      <a:r>
+                        <a:rPr sz="1200">
+                          <a:solidFill>
+                            <a:srgbClr val="38424E"/>
+                          </a:solidFill>
+                          <a:latin typeface="Arial"/>
+                        </a:rPr>
+                        <a:t>each position takes the max of its 7-wide neighbourhood, so clusters survive and isolated spikes do not</a:t>
+                      </a:r>
+                    </a:p>
+                  </a:txBody>
+                  <a:tcPr marL="73152" marR="73152" marT="45720" marB="45720">
+                    <a:solidFill>
+                      <a:srgbClr val="FFFFFF"/>
+                    </a:solidFill>
+                  </a:tcPr>
+                </a:tc>
+                <a:tc>
+                  <a:txBody>
+                    <a:bodyPr wrap="square"/>
+                    <a:lstStyle/>
+                    <a:p>
+                      <a:r>
+                        <a:rPr sz="1200">
+                          <a:solidFill>
+                            <a:srgbClr val="38424E"/>
+                          </a:solidFill>
+                          <a:latin typeface="Arial"/>
+                        </a:rPr>
+                        <a:t>smoothed score, length N</a:t>
+                      </a:r>
+                    </a:p>
+                  </a:txBody>
+                  <a:tcPr marL="73152" marR="73152" marT="45720" marB="45720">
+                    <a:solidFill>
+                      <a:srgbClr val="FFFFFF"/>
+                    </a:solidFill>
+                  </a:tcPr>
+                </a:tc>
+                <a:tc>
+                  <a:txBody>
+                    <a:bodyPr wrap="square"/>
+                    <a:lstStyle/>
+                    <a:p>
+                      <a:r>
+                        <a:rPr sz="1200">
+                          <a:solidFill>
+                            <a:srgbClr val="38424E"/>
+                          </a:solidFill>
+                          <a:latin typeface="Arial"/>
+                        </a:rPr>
+                        <a:t>2</a:t>
+                      </a:r>
+                    </a:p>
+                  </a:txBody>
+                  <a:tcPr marL="73152" marR="73152" marT="45720" marB="45720">
+                    <a:solidFill>
+                      <a:srgbClr val="FFFFFF"/>
+                    </a:solidFill>
+                  </a:tcPr>
+                </a:tc>
+              </a:tr>
+              <a:tr h="457200">
+                <a:tc>
+                  <a:txBody>
+                    <a:bodyPr wrap="square"/>
+                    <a:lstStyle/>
+                    <a:p>
+                      <a:r>
+                        <a:rPr sz="1200">
+                          <a:solidFill>
+                            <a:srgbClr val="38424E"/>
+                          </a:solidFill>
+                          <a:latin typeface="Arial"/>
+                        </a:rPr>
+                        <a:t>f</a:t>
+                      </a:r>
+                    </a:p>
+                  </a:txBody>
+                  <a:tcPr marL="73152" marR="73152" marT="45720" marB="45720">
+                    <a:solidFill>
+                      <a:srgbClr val="F7F9FB"/>
+                    </a:solidFill>
+                  </a:tcPr>
+                </a:tc>
+                <a:tc>
+                  <a:txBody>
+                    <a:bodyPr wrap="square"/>
+                    <a:lstStyle/>
+                    <a:p>
+                      <a:r>
+                        <a:rPr sz="1200">
+                          <a:solidFill>
+                            <a:srgbClr val="38424E"/>
+                          </a:solidFill>
+                          <a:latin typeface="Arial"/>
+                        </a:rPr>
+                        <a:t>α-gate</a:t>
+                      </a:r>
+                    </a:p>
+                  </a:txBody>
+                  <a:tcPr marL="73152" marR="73152" marT="45720" marB="45720">
+                    <a:solidFill>
+                      <a:srgbClr val="F7F9FB"/>
+                    </a:solidFill>
+                  </a:tcPr>
+                </a:tc>
+                <a:tc>
+                  <a:txBody>
+                    <a:bodyPr wrap="square"/>
+                    <a:lstStyle/>
+                    <a:p>
+                      <a:r>
+                        <a:rPr sz="1200">
+                          <a:solidFill>
+                            <a:srgbClr val="38424E"/>
+                          </a:solidFill>
+                          <a:latin typeface="Arial"/>
+                        </a:rPr>
+                        <a:t>measures αa, the attention mass outside the recent window, floored at 0.70 and capped at 0.95, then splits the K budget</a:t>
+                      </a:r>
+                    </a:p>
+                  </a:txBody>
+                  <a:tcPr marL="73152" marR="73152" marT="45720" marB="45720">
+                    <a:solidFill>
+                      <a:srgbClr val="F7F9FB"/>
+                    </a:solidFill>
+                  </a:tcPr>
+                </a:tc>
+                <a:tc>
+                  <a:txBody>
+                    <a:bodyPr wrap="square"/>
+                    <a:lstStyle/>
+                    <a:p>
+                      <a:r>
+                        <a:rPr sz="1200">
+                          <a:solidFill>
+                            <a:srgbClr val="38424E"/>
+                          </a:solidFill>
+                          <a:latin typeface="Arial"/>
+                        </a:rPr>
+                        <a:t>n_anchor and n_recent</a:t>
+                      </a:r>
+                    </a:p>
+                  </a:txBody>
+                  <a:tcPr marL="73152" marR="73152" marT="45720" marB="45720">
+                    <a:solidFill>
+                      <a:srgbClr val="F7F9FB"/>
+                    </a:solidFill>
+                  </a:tcPr>
+                </a:tc>
+                <a:tc>
+                  <a:txBody>
+                    <a:bodyPr wrap="square"/>
+                    <a:lstStyle/>
+                    <a:p>
+                      <a:r>
+                        <a:rPr sz="1200">
+                          <a:solidFill>
+                            <a:srgbClr val="38424E"/>
+                          </a:solidFill>
+                          <a:latin typeface="Arial"/>
+                        </a:rPr>
+                        <a:t>2</a:t>
+                      </a:r>
+                    </a:p>
+                  </a:txBody>
+                  <a:tcPr marL="73152" marR="73152" marT="45720" marB="45720">
+                    <a:solidFill>
+                      <a:srgbClr val="F7F9FB"/>
+                    </a:solidFill>
+                  </a:tcPr>
+                </a:tc>
+              </a:tr>
+              <a:tr h="457200">
+                <a:tc>
+                  <a:txBody>
+                    <a:bodyPr wrap="square"/>
+                    <a:lstStyle/>
+                    <a:p>
+                      <a:r>
+                        <a:rPr sz="1200">
+                          <a:solidFill>
+                            <a:srgbClr val="38424E"/>
+                          </a:solidFill>
+                          <a:latin typeface="Arial"/>
+                        </a:rPr>
+                        <a:t>g</a:t>
+                      </a:r>
+                    </a:p>
+                  </a:txBody>
+                  <a:tcPr marL="73152" marR="73152" marT="45720" marB="45720">
+                    <a:solidFill>
+                      <a:srgbClr val="FFFFFF"/>
+                    </a:solidFill>
+                  </a:tcPr>
+                </a:tc>
+                <a:tc>
+                  <a:txBody>
+                    <a:bodyPr wrap="square"/>
+                    <a:lstStyle/>
+                    <a:p>
+                      <a:r>
+                        <a:rPr sz="1200">
+                          <a:solidFill>
+                            <a:srgbClr val="38424E"/>
+                          </a:solidFill>
+                          <a:latin typeface="Arial"/>
+                        </a:rPr>
+                        <a:t>select</a:t>
+                      </a:r>
+                    </a:p>
+                  </a:txBody>
+                  <a:tcPr marL="73152" marR="73152" marT="45720" marB="45720">
+                    <a:solidFill>
+                      <a:srgbClr val="FFFFFF"/>
+                    </a:solidFill>
+                  </a:tcPr>
+                </a:tc>
+                <a:tc>
+                  <a:txBody>
+                    <a:bodyPr wrap="square"/>
+                    <a:lstStyle/>
+                    <a:p>
+                      <a:r>
+                        <a:rPr sz="1200">
+                          <a:solidFill>
+                            <a:srgbClr val="38424E"/>
+                          </a:solidFill>
+                          <a:latin typeface="Arial"/>
+                        </a:rPr>
+                        <a:t>takes the top n_anchor positions by score, plus 4 sink tokens, plus the recent window</a:t>
+                      </a:r>
+                    </a:p>
+                  </a:txBody>
+                  <a:tcPr marL="73152" marR="73152" marT="45720" marB="45720">
+                    <a:solidFill>
+                      <a:srgbClr val="FFFFFF"/>
+                    </a:solidFill>
+                  </a:tcPr>
+                </a:tc>
+                <a:tc>
+                  <a:txBody>
+                    <a:bodyPr wrap="square"/>
+                    <a:lstStyle/>
+                    <a:p>
+                      <a:r>
+                        <a:rPr sz="1200">
+                          <a:solidFill>
+                            <a:srgbClr val="38424E"/>
+                          </a:solidFill>
+                          <a:latin typeface="Arial"/>
+                        </a:rPr>
+                        <a:t>joint keep set, K positions</a:t>
+                      </a:r>
+                    </a:p>
+                  </a:txBody>
+                  <a:tcPr marL="73152" marR="73152" marT="45720" marB="45720">
+                    <a:solidFill>
+                      <a:srgbClr val="FFFFFF"/>
+                    </a:solidFill>
+                  </a:tcPr>
+                </a:tc>
+                <a:tc>
+                  <a:txBody>
+                    <a:bodyPr wrap="square"/>
+                    <a:lstStyle/>
+                    <a:p>
+                      <a:r>
+                        <a:rPr sz="1200">
+                          <a:solidFill>
+                            <a:srgbClr val="38424E"/>
+                          </a:solidFill>
+                          <a:latin typeface="Arial"/>
+                        </a:rPr>
+                        <a:t>2</a:t>
+                      </a:r>
+                    </a:p>
+                  </a:txBody>
+                  <a:tcPr marL="73152" marR="73152" marT="45720" marB="45720">
+                    <a:solidFill>
+                      <a:srgbClr val="FFFFFF"/>
+                    </a:solidFill>
+                  </a:tcPr>
+                </a:tc>
+              </a:tr>
+              <a:tr h="457200">
+                <a:tc>
+                  <a:txBody>
+                    <a:bodyPr wrap="square"/>
+                    <a:lstStyle/>
+                    <a:p>
+                      <a:r>
+                        <a:rPr sz="1200">
+                          <a:solidFill>
+                            <a:srgbClr val="38424E"/>
+                          </a:solidFill>
+                          <a:latin typeface="Arial"/>
+                        </a:rPr>
+                        <a:t>h</a:t>
+                      </a:r>
+                    </a:p>
+                  </a:txBody>
+                  <a:tcPr marL="73152" marR="73152" marT="45720" marB="45720">
+                    <a:solidFill>
+                      <a:srgbClr val="F7F9FB"/>
+                    </a:solidFill>
+                  </a:tcPr>
+                </a:tc>
+                <a:tc>
+                  <a:txBody>
+                    <a:bodyPr wrap="square"/>
+                    <a:lstStyle/>
+                    <a:p>
+                      <a:r>
+                        <a:rPr sz="1200">
+                          <a:solidFill>
+                            <a:srgbClr val="38424E"/>
+                          </a:solidFill>
+                          <a:latin typeface="Arial"/>
+                        </a:rPr>
+                        <a:t>compact in place</a:t>
+                      </a:r>
+                    </a:p>
+                  </a:txBody>
+                  <a:tcPr marL="73152" marR="73152" marT="45720" marB="45720">
+                    <a:solidFill>
+                      <a:srgbClr val="F7F9FB"/>
+                    </a:solidFill>
+                  </a:tcPr>
+                </a:tc>
+                <a:tc>
+                  <a:txBody>
+                    <a:bodyPr wrap="square"/>
+                    <a:lstStyle/>
+                    <a:p>
+                      <a:r>
+                        <a:rPr sz="1200">
+                          <a:solidFill>
+                            <a:srgbClr val="38424E"/>
+                          </a:solidFill>
+                          <a:latin typeface="Arial"/>
+                        </a:rPr>
+                        <a:t>survivors slide into a dense prefix inside the tensors prefill already allocated</a:t>
+                      </a:r>
+                    </a:p>
+                  </a:txBody>
+                  <a:tcPr marL="73152" marR="73152" marT="45720" marB="45720">
+                    <a:solidFill>
+                      <a:srgbClr val="F7F9FB"/>
+                    </a:solidFill>
+                  </a:tcPr>
+                </a:tc>
+                <a:tc>
+                  <a:txBody>
+                    <a:bodyPr wrap="square"/>
+                    <a:lstStyle/>
+                    <a:p>
+                      <a:r>
+                        <a:rPr sz="1200">
+                          <a:solidFill>
+                            <a:srgbClr val="38424E"/>
+                          </a:solidFill>
+                          <a:latin typeface="Arial"/>
+                        </a:rPr>
+                        <a:t>live = K, contiguous</a:t>
+                      </a:r>
+                    </a:p>
+                  </a:txBody>
+                  <a:tcPr marL="73152" marR="73152" marT="45720" marB="45720">
+                    <a:solidFill>
+                      <a:srgbClr val="F7F9FB"/>
+                    </a:solidFill>
+                  </a:tcPr>
+                </a:tc>
+                <a:tc>
+                  <a:txBody>
+                    <a:bodyPr wrap="square"/>
+                    <a:lstStyle/>
+                    <a:p>
+                      <a:r>
+                        <a:rPr sz="1200">
+                          <a:solidFill>
+                            <a:srgbClr val="38424E"/>
+                          </a:solidFill>
+                          <a:latin typeface="Arial"/>
+                        </a:rPr>
+                        <a:t>3</a:t>
+                      </a:r>
+                    </a:p>
+                  </a:txBody>
+                  <a:tcPr marL="73152" marR="73152" marT="45720" marB="45720">
+                    <a:solidFill>
+                      <a:srgbClr val="F7F9FB"/>
+                    </a:solidFill>
+                  </a:tcPr>
+                </a:tc>
+              </a:tr>
+            </a:tbl>
+          </a:graphicData>
+        </a:graphic>
+      </p:graphicFrame>
+      <p:sp>
+        <p:nvSpPr>
+          <p:cNvPr id="7" name="TextBox 6"/>
+          <p:cNvSpPr txBox="1"/>
+          <p:nvPr/>
+        </p:nvSpPr>
+        <p:spPr>
+          <a:xfrm>
+            <a:off x="411480" y="5715000"/>
+            <a:ext cx="11384280" cy="822960"/>
+          </a:xfrm>
+          <a:prstGeom prst="rect">
+            <a:avLst/>
+          </a:prstGeom>
+          <a:noFill/>
+        </p:spPr>
+        <p:txBody>
+          <a:bodyPr wrap="square" anchor="t" lIns="36576" rIns="36576" tIns="18288" bIns="18288">
+            <a:spAutoFit/>
+          </a:bodyPr>
+          <a:lstStyle/>
+          <a:p>
+            <a:pPr algn="l">
+              <a:lnSpc>
+                <a:spcPct val="115000"/>
+              </a:lnSpc>
+            </a:pPr>
+            <a:r>
+              <a:rPr sz="1400" b="0">
+                <a:solidFill>
+                  <a:srgbClr val="38424E"/>
+                </a:solidFill>
+                <a:latin typeface="Arial"/>
+              </a:rPr>
+              <a:t>Measured instance: on the 9737-token prompt αa came out at 0.71, so K = 1024 is 4 sinks, 721 anchors and 299 recent cells.</a:t>
+            </a:r>
+          </a:p>
+          <a:p>
+            <a:pPr algn="l">
+              <a:lnSpc>
+                <a:spcPct val="115000"/>
+              </a:lnSpc>
+            </a:pPr>
+            <a:r>
+              <a:rPr sz="1400" b="0">
+                <a:solidFill>
+                  <a:srgbClr val="38424E"/>
+                </a:solidFill>
+                <a:latin typeface="Arial"/>
+              </a:rPr>
+              <a:t>A per-head evictor skips stage d. Each head then keeps its own K, the union across heads leaves live ≫ K, and the array cannot compact.</a:t>
+            </a:r>
+          </a:p>
+        </p:txBody>
+      </p:sp>
+    </p:spTree>
+  </p:cSld>
+  <p:clrMapOvr>
+    <a:masterClrMapping/>
+  </p:clrMapOvr>
+</p:sld>
+</file>
+
+<file path=ppt/slides/slide7.xml><?xml version="1.0" encoding="utf-8"?>
+<p:sld xmlns:a="http://schemas.openxmlformats.org/drawingml/2006/main" xmlns:p="http://schemas.openxmlformats.org/presentationml/2006/main" xmlns:r="http://schemas.openxmlformats.org/officeDocument/2006/relationships">
+  <p:cSld>
+    <p:spTree>
+      <p:nvGrpSpPr>
+        <p:cNvPr id="1" name=""/>
+        <p:cNvGrpSpPr/>
+        <p:nvPr/>
+      </p:nvGrpSpPr>
+      <p:grpSpPr/>
+      <p:sp>
+        <p:nvSpPr>
+          <p:cNvPr id="2" name="TextBox 1"/>
+          <p:cNvSpPr txBox="1"/>
+          <p:nvPr/>
+        </p:nvSpPr>
+        <p:spPr>
+          <a:xfrm>
+            <a:off x="548640" y="320040"/>
+            <a:ext cx="8229600" cy="274320"/>
+          </a:xfrm>
+          <a:prstGeom prst="rect">
+            <a:avLst/>
+          </a:prstGeom>
+          <a:noFill/>
+        </p:spPr>
+        <p:txBody>
+          <a:bodyPr wrap="square" anchor="t" lIns="36576" rIns="36576" tIns="18288" bIns="18288">
+            <a:spAutoFit/>
+          </a:bodyPr>
+          <a:lstStyle/>
+          <a:p>
+            <a:pPr algn="l">
+              <a:lnSpc>
+                <a:spcPct val="115000"/>
+              </a:lnSpc>
+            </a:pPr>
+            <a:r>
+              <a:rPr sz="1100" b="1">
+                <a:solidFill>
+                  <a:srgbClr val="2B6CA3"/>
+                </a:solidFill>
+                <a:latin typeface="Arial"/>
+              </a:rPr>
               <a:t>WHY BUDGETS DO NOT MATERIALIZE</a:t>
             </a:r>
           </a:p>
@@ -28724,7 +30837,7 @@
                 </a:solidFill>
                 <a:latin typeface="Arial"/>
               </a:rPr>
-              <a:t>6</a:t>
+              <a:t>7</a:t>
             </a:r>
           </a:p>
         </p:txBody>
@@ -28860,7 +30973,7 @@
 </p:sld>
 </file>
 
-<file path=ppt/slides/slide7.xml><?xml version="1.0" encoding="utf-8"?>
+<file path=ppt/slides/slide8.xml><?xml version="1.0" encoding="utf-8"?>
 <p:sld xmlns:a="http://schemas.openxmlformats.org/drawingml/2006/main" xmlns:p="http://schemas.openxmlformats.org/presentationml/2006/main" xmlns:r="http://schemas.openxmlformats.org/officeDocument/2006/relationships">
   <p:cSld>
     <p:spTree>
@@ -29026,7 +31139,7 @@
                 </a:solidFill>
                 <a:latin typeface="Arial"/>
               </a:rPr>
-              <a:t>7</a:t>
+              <a:t>8</a:t>
             </a:r>
           </a:p>
         </p:txBody>
@@ -30274,7 +32387,7 @@
 </p:sld>
 </file>
 
-<file path=ppt/slides/slide8.xml><?xml version="1.0" encoding="utf-8"?>
+<file path=ppt/slides/slide9.xml><?xml version="1.0" encoding="utf-8"?>
 <p:sld xmlns:a="http://schemas.openxmlformats.org/drawingml/2006/main" xmlns:p="http://schemas.openxmlformats.org/presentationml/2006/main" xmlns:r="http://schemas.openxmlformats.org/officeDocument/2006/relationships">
   <p:cSld>
     <p:spTree>
@@ -30440,7 +32553,7 @@
                 </a:solidFill>
                 <a:latin typeface="Arial"/>
               </a:rPr>
-              <a:t>8</a:t>
+              <a:t>9</a:t>
             </a:r>
           </a:p>
         </p:txBody>
@@ -31279,847 +33392,6 @@
                 <a:latin typeface="Arial"/>
               </a:rPr>
               <a:t>On Bonsai-8B the full cache reaches a 72.2 °C DDR peak. μKV reaches 62.5 °C, 9.7 °C cooler, with no change to the model's parameters.</a:t>
-            </a:r>
-          </a:p>
-        </p:txBody>
-      </p:sp>
-    </p:spTree>
-  </p:cSld>
-  <p:clrMapOvr>
-    <a:masterClrMapping/>
-  </p:clrMapOvr>
-</p:sld>
-</file>
-
-<file path=ppt/slides/slide9.xml><?xml version="1.0" encoding="utf-8"?>
-<p:sld xmlns:a="http://schemas.openxmlformats.org/drawingml/2006/main" xmlns:p="http://schemas.openxmlformats.org/presentationml/2006/main" xmlns:r="http://schemas.openxmlformats.org/officeDocument/2006/relationships">
-  <p:cSld>
-    <p:spTree>
-      <p:nvGrpSpPr>
-        <p:cNvPr id="1" name=""/>
-        <p:cNvGrpSpPr/>
-        <p:nvPr/>
-      </p:nvGrpSpPr>
-      <p:grpSpPr/>
-      <p:sp>
-        <p:nvSpPr>
-          <p:cNvPr id="2" name="TextBox 1"/>
-          <p:cNvSpPr txBox="1"/>
-          <p:nvPr/>
-        </p:nvSpPr>
-        <p:spPr>
-          <a:xfrm>
-            <a:off x="548640" y="320040"/>
-            <a:ext cx="8229600" cy="274320"/>
-          </a:xfrm>
-          <a:prstGeom prst="rect">
-            <a:avLst/>
-          </a:prstGeom>
-          <a:noFill/>
-        </p:spPr>
-        <p:txBody>
-          <a:bodyPr wrap="square" anchor="t" lIns="36576" rIns="36576" tIns="18288" bIns="18288">
-            <a:spAutoFit/>
-          </a:bodyPr>
-          <a:lstStyle/>
-          <a:p>
-            <a:pPr algn="l">
-              <a:lnSpc>
-                <a:spcPct val="115000"/>
-              </a:lnSpc>
-            </a:pPr>
-            <a:r>
-              <a:rPr sz="1100" b="1">
-                <a:solidFill>
-                  <a:srgbClr val="2B6CA3"/>
-                </a:solidFill>
-                <a:latin typeface="Arial"/>
-              </a:rPr>
-              <a:t>FINDING 1  ·  THE REALIZABILITY GAP</a:t>
-            </a:r>
-          </a:p>
-        </p:txBody>
-      </p:sp>
-      <p:sp>
-        <p:nvSpPr>
-          <p:cNvPr id="3" name="TextBox 2"/>
-          <p:cNvSpPr txBox="1"/>
-          <p:nvPr/>
-        </p:nvSpPr>
-        <p:spPr>
-          <a:xfrm>
-            <a:off x="548640" y="603504"/>
-            <a:ext cx="11064240" cy="640080"/>
-          </a:xfrm>
-          <a:prstGeom prst="rect">
-            <a:avLst/>
-          </a:prstGeom>
-          <a:noFill/>
-        </p:spPr>
-        <p:txBody>
-          <a:bodyPr wrap="square" anchor="t" lIns="36576" rIns="36576" tIns="18288" bIns="18288">
-            <a:spAutoFit/>
-          </a:bodyPr>
-          <a:lstStyle/>
-          <a:p>
-            <a:pPr algn="l">
-              <a:lnSpc>
-                <a:spcPct val="115000"/>
-              </a:lnSpc>
-            </a:pPr>
-            <a:r>
-              <a:rPr sz="2800" b="1">
-                <a:solidFill>
-                  <a:srgbClr val="0C1116"/>
-                </a:solidFill>
-                <a:latin typeface="Arial"/>
-              </a:rPr>
-              <a:t>What the papers claim, and what the phone gives back</a:t>
-            </a:r>
-          </a:p>
-        </p:txBody>
-      </p:sp>
-      <p:sp>
-        <p:nvSpPr>
-          <p:cNvPr id="4" name="Rectangle 3"/>
-          <p:cNvSpPr/>
-          <p:nvPr/>
-        </p:nvSpPr>
-        <p:spPr>
-          <a:xfrm>
-            <a:off x="548640" y="1298448"/>
-            <a:ext cx="11064240" cy="9525"/>
-          </a:xfrm>
-          <a:prstGeom prst="rect">
-            <a:avLst/>
-          </a:prstGeom>
-          <a:solidFill>
-            <a:srgbClr val="D9DEE4"/>
-          </a:solidFill>
-          <a:ln>
-            <a:noFill/>
-          </a:ln>
-          <a:effectLst/>
-        </p:spPr>
-        <p:style>
-          <a:lnRef idx="1">
-            <a:schemeClr val="accent1"/>
-          </a:lnRef>
-          <a:fillRef idx="3">
-            <a:schemeClr val="accent1"/>
-          </a:fillRef>
-          <a:effectRef idx="2">
-            <a:schemeClr val="accent1"/>
-          </a:effectRef>
-          <a:fontRef idx="minor">
-            <a:schemeClr val="lt1"/>
-          </a:fontRef>
-        </p:style>
-        <p:txBody>
-          <a:bodyPr rtlCol="0" anchor="ctr"/>
-          <a:lstStyle/>
-          <a:p>
-            <a:pPr algn="ctr"/>
-          </a:p>
-        </p:txBody>
-      </p:sp>
-      <p:sp>
-        <p:nvSpPr>
-          <p:cNvPr id="5" name="TextBox 4"/>
-          <p:cNvSpPr txBox="1"/>
-          <p:nvPr/>
-        </p:nvSpPr>
-        <p:spPr>
-          <a:xfrm>
-            <a:off x="11155680" y="6400800"/>
-            <a:ext cx="548640" cy="274320"/>
-          </a:xfrm>
-          <a:prstGeom prst="rect">
-            <a:avLst/>
-          </a:prstGeom>
-          <a:noFill/>
-        </p:spPr>
-        <p:txBody>
-          <a:bodyPr wrap="square" anchor="t" lIns="36576" rIns="36576" tIns="18288" bIns="18288">
-            <a:spAutoFit/>
-          </a:bodyPr>
-          <a:lstStyle/>
-          <a:p>
-            <a:pPr algn="r">
-              <a:lnSpc>
-                <a:spcPct val="115000"/>
-              </a:lnSpc>
-            </a:pPr>
-            <a:r>
-              <a:rPr sz="1000" b="0">
-                <a:solidFill>
-                  <a:srgbClr val="6B7785"/>
-                </a:solidFill>
-                <a:latin typeface="Arial"/>
-              </a:rPr>
-              <a:t>9</a:t>
-            </a:r>
-          </a:p>
-        </p:txBody>
-      </p:sp>
-      <p:graphicFrame>
-        <p:nvGraphicFramePr>
-          <p:cNvPr id="6" name="Table 5"/>
-          <p:cNvGraphicFramePr>
-            <a:graphicFrameLocks noGrp="1"/>
-          </p:cNvGraphicFramePr>
-          <p:nvPr/>
-        </p:nvGraphicFramePr>
-        <p:xfrm>
-          <a:off x="548640" y="1737360"/>
-          <a:ext cx="11064240" cy="2011680"/>
-        </p:xfrm>
-        <a:graphic>
-          <a:graphicData uri="http://schemas.openxmlformats.org/drawingml/2006/table">
-            <a:tbl>
-              <a:tblPr firstRow="1" bandRow="1">
-                <a:tableStyleId>{5C22544A-7EE6-4342-B048-85BDC9FD1C3A}</a:tableStyleId>
-              </a:tblPr>
-              <a:tblGrid>
-                <a:gridCol w="2011680"/>
-                <a:gridCol w="3566160"/>
-                <a:gridCol w="3108960"/>
-                <a:gridCol w="2377440"/>
-              </a:tblGrid>
-              <a:tr h="335280">
-                <a:tc>
-                  <a:txBody>
-                    <a:bodyPr wrap="square"/>
-                    <a:lstStyle/>
-                    <a:p>
-                      <a:r>
-                        <a:rPr sz="1400" b="1">
-                          <a:solidFill>
-                            <a:srgbClr val="0C1116"/>
-                          </a:solidFill>
-                          <a:latin typeface="Arial"/>
-                        </a:rPr>
-                        <a:t>Policy</a:t>
-                      </a:r>
-                    </a:p>
-                  </a:txBody>
-                  <a:tcPr marL="73152" marR="73152" marT="45720" marB="45720">
-                    <a:solidFill>
-                      <a:srgbClr val="EEF1F4"/>
-                    </a:solidFill>
-                  </a:tcPr>
-                </a:tc>
-                <a:tc>
-                  <a:txBody>
-                    <a:bodyPr wrap="square"/>
-                    <a:lstStyle/>
-                    <a:p>
-                      <a:r>
-                        <a:rPr sz="1400" b="1">
-                          <a:solidFill>
-                            <a:srgbClr val="0C1116"/>
-                          </a:solidFill>
-                          <a:latin typeface="Arial"/>
-                        </a:rPr>
-                        <a:t>Its own paper claims</a:t>
-                      </a:r>
-                    </a:p>
-                  </a:txBody>
-                  <a:tcPr marL="73152" marR="73152" marT="45720" marB="45720">
-                    <a:solidFill>
-                      <a:srgbClr val="EEF1F4"/>
-                    </a:solidFill>
-                  </a:tcPr>
-                </a:tc>
-                <a:tc>
-                  <a:txBody>
-                    <a:bodyPr wrap="square"/>
-                    <a:lstStyle/>
-                    <a:p>
-                      <a:r>
-                        <a:rPr sz="1400" b="1">
-                          <a:solidFill>
-                            <a:srgbClr val="0C1116"/>
-                          </a:solidFill>
-                          <a:latin typeface="Arial"/>
-                        </a:rPr>
-                        <a:t>At its own budget on the phone</a:t>
-                      </a:r>
-                    </a:p>
-                  </a:txBody>
-                  <a:tcPr marL="73152" marR="73152" marT="45720" marB="45720">
-                    <a:solidFill>
-                      <a:srgbClr val="EEF1F4"/>
-                    </a:solidFill>
-                  </a:tcPr>
-                </a:tc>
-                <a:tc>
-                  <a:txBody>
-                    <a:bodyPr wrap="square"/>
-                    <a:lstStyle/>
-                    <a:p>
-                      <a:r>
-                        <a:rPr sz="1400" b="1">
-                          <a:solidFill>
-                            <a:srgbClr val="0C1116"/>
-                          </a:solidFill>
-                          <a:latin typeface="Arial"/>
-                        </a:rPr>
-                        <a:t>Cache actually kept</a:t>
-                      </a:r>
-                    </a:p>
-                  </a:txBody>
-                  <a:tcPr marL="73152" marR="73152" marT="45720" marB="45720">
-                    <a:solidFill>
-                      <a:srgbClr val="EEF1F4"/>
-                    </a:solidFill>
-                  </a:tcPr>
-                </a:tc>
-              </a:tr>
-              <a:tr h="335280">
-                <a:tc>
-                  <a:txBody>
-                    <a:bodyPr wrap="square"/>
-                    <a:lstStyle/>
-                    <a:p>
-                      <a:r>
-                        <a:rPr sz="1400" b="0">
-                          <a:solidFill>
-                            <a:srgbClr val="38424E"/>
-                          </a:solidFill>
-                          <a:latin typeface="Arial"/>
-                        </a:rPr>
-                        <a:t>SnapKV</a:t>
-                      </a:r>
-                    </a:p>
-                  </a:txBody>
-                  <a:tcPr marL="73152" marR="73152" marT="45720" marB="45720">
-                    <a:solidFill>
-                      <a:srgbClr val="FFFFFF"/>
-                    </a:solidFill>
-                  </a:tcPr>
-                </a:tc>
-                <a:tc>
-                  <a:txBody>
-                    <a:bodyPr wrap="square"/>
-                    <a:lstStyle/>
-                    <a:p>
-                      <a:r>
-                        <a:rPr sz="1400" b="0">
-                          <a:solidFill>
-                            <a:srgbClr val="38424E"/>
-                          </a:solidFill>
-                          <a:latin typeface="Arial"/>
-                        </a:rPr>
-                        <a:t>8.2x smaller cache at 16K</a:t>
-                      </a:r>
-                    </a:p>
-                  </a:txBody>
-                  <a:tcPr marL="73152" marR="73152" marT="45720" marB="45720">
-                    <a:solidFill>
-                      <a:srgbClr val="FFFFFF"/>
-                    </a:solidFill>
-                  </a:tcPr>
-                </a:tc>
-                <a:tc>
-                  <a:txBody>
-                    <a:bodyPr wrap="square"/>
-                    <a:lstStyle/>
-                    <a:p>
-                      <a:r>
-                        <a:rPr sz="1400" b="0">
-                          <a:solidFill>
-                            <a:srgbClr val="38424E"/>
-                          </a:solidFill>
-                          <a:latin typeface="Arial"/>
-                        </a:rPr>
-                        <a:t>2048 per head</a:t>
-                      </a:r>
-                    </a:p>
-                  </a:txBody>
-                  <a:tcPr marL="73152" marR="73152" marT="45720" marB="45720">
-                    <a:solidFill>
-                      <a:srgbClr val="FFFFFF"/>
-                    </a:solidFill>
-                  </a:tcPr>
-                </a:tc>
-                <a:tc>
-                  <a:txBody>
-                    <a:bodyPr wrap="square"/>
-                    <a:lstStyle/>
-                    <a:p>
-                      <a:r>
-                        <a:rPr sz="1400" b="0">
-                          <a:solidFill>
-                            <a:srgbClr val="38424E"/>
-                          </a:solidFill>
-                          <a:latin typeface="Arial"/>
-                        </a:rPr>
-                        <a:t>94%</a:t>
-                      </a:r>
-                    </a:p>
-                  </a:txBody>
-                  <a:tcPr marL="73152" marR="73152" marT="45720" marB="45720">
-                    <a:solidFill>
-                      <a:srgbClr val="FFFFFF"/>
-                    </a:solidFill>
-                  </a:tcPr>
-                </a:tc>
-              </a:tr>
-              <a:tr h="335280">
-                <a:tc>
-                  <a:txBody>
-                    <a:bodyPr wrap="square"/>
-                    <a:lstStyle/>
-                    <a:p>
-                      <a:r>
-                        <a:rPr sz="1400" b="0">
-                          <a:solidFill>
-                            <a:srgbClr val="38424E"/>
-                          </a:solidFill>
-                          <a:latin typeface="Arial"/>
-                        </a:rPr>
-                        <a:t>H2O</a:t>
-                      </a:r>
-                    </a:p>
-                  </a:txBody>
-                  <a:tcPr marL="73152" marR="73152" marT="45720" marB="45720">
-                    <a:solidFill>
-                      <a:srgbClr val="F7F9FB"/>
-                    </a:solidFill>
-                  </a:tcPr>
-                </a:tc>
-                <a:tc>
-                  <a:txBody>
-                    <a:bodyPr wrap="square"/>
-                    <a:lstStyle/>
-                    <a:p>
-                      <a:r>
-                        <a:rPr sz="1400" b="0">
-                          <a:solidFill>
-                            <a:srgbClr val="38424E"/>
-                          </a:solidFill>
-                          <a:latin typeface="Arial"/>
-                        </a:rPr>
-                        <a:t>5 to 10x at a 20% budget</a:t>
-                      </a:r>
-                    </a:p>
-                  </a:txBody>
-                  <a:tcPr marL="73152" marR="73152" marT="45720" marB="45720">
-                    <a:solidFill>
-                      <a:srgbClr val="F7F9FB"/>
-                    </a:solidFill>
-                  </a:tcPr>
-                </a:tc>
-                <a:tc>
-                  <a:txBody>
-                    <a:bodyPr wrap="square"/>
-                    <a:lstStyle/>
-                    <a:p>
-                      <a:r>
-                        <a:rPr sz="1400" b="0">
-                          <a:solidFill>
-                            <a:srgbClr val="38424E"/>
-                          </a:solidFill>
-                          <a:latin typeface="Arial"/>
-                        </a:rPr>
-                        <a:t>20% of the prompt</a:t>
-                      </a:r>
-                    </a:p>
-                  </a:txBody>
-                  <a:tcPr marL="73152" marR="73152" marT="45720" marB="45720">
-                    <a:solidFill>
-                      <a:srgbClr val="F7F9FB"/>
-                    </a:solidFill>
-                  </a:tcPr>
-                </a:tc>
-                <a:tc>
-                  <a:txBody>
-                    <a:bodyPr wrap="square"/>
-                    <a:lstStyle/>
-                    <a:p>
-                      <a:r>
-                        <a:rPr sz="1400" b="0">
-                          <a:solidFill>
-                            <a:srgbClr val="38424E"/>
-                          </a:solidFill>
-                          <a:latin typeface="Arial"/>
-                        </a:rPr>
-                        <a:t>92%</a:t>
-                      </a:r>
-                    </a:p>
-                  </a:txBody>
-                  <a:tcPr marL="73152" marR="73152" marT="45720" marB="45720">
-                    <a:solidFill>
-                      <a:srgbClr val="F7F9FB"/>
-                    </a:solidFill>
-                  </a:tcPr>
-                </a:tc>
-              </a:tr>
-              <a:tr h="335280">
-                <a:tc>
-                  <a:txBody>
-                    <a:bodyPr wrap="square"/>
-                    <a:lstStyle/>
-                    <a:p>
-                      <a:r>
-                        <a:rPr sz="1400" b="0">
-                          <a:solidFill>
-                            <a:srgbClr val="38424E"/>
-                          </a:solidFill>
-                          <a:latin typeface="Arial"/>
-                        </a:rPr>
-                        <a:t>TOVA</a:t>
-                      </a:r>
-                    </a:p>
-                  </a:txBody>
-                  <a:tcPr marL="73152" marR="73152" marT="45720" marB="45720">
-                    <a:solidFill>
-                      <a:srgbClr val="FFFFFF"/>
-                    </a:solidFill>
-                  </a:tcPr>
-                </a:tc>
-                <a:tc>
-                  <a:txBody>
-                    <a:bodyPr wrap="square"/>
-                    <a:lstStyle/>
-                    <a:p>
-                      <a:r>
-                        <a:rPr sz="1400" b="0">
-                          <a:solidFill>
-                            <a:srgbClr val="38424E"/>
-                          </a:solidFill>
-                          <a:latin typeface="Arial"/>
-                        </a:rPr>
-                        <a:t>per-layer budget</a:t>
-                      </a:r>
-                    </a:p>
-                  </a:txBody>
-                  <a:tcPr marL="73152" marR="73152" marT="45720" marB="45720">
-                    <a:solidFill>
-                      <a:srgbClr val="FFFFFF"/>
-                    </a:solidFill>
-                  </a:tcPr>
-                </a:tc>
-                <a:tc>
-                  <a:txBody>
-                    <a:bodyPr wrap="square"/>
-                    <a:lstStyle/>
-                    <a:p>
-                      <a:r>
-                        <a:rPr sz="1400" b="0">
-                          <a:solidFill>
-                            <a:srgbClr val="38424E"/>
-                          </a:solidFill>
-                          <a:latin typeface="Arial"/>
-                        </a:rPr>
-                        <a:t>2048 per layer</a:t>
-                      </a:r>
-                    </a:p>
-                  </a:txBody>
-                  <a:tcPr marL="73152" marR="73152" marT="45720" marB="45720">
-                    <a:solidFill>
-                      <a:srgbClr val="FFFFFF"/>
-                    </a:solidFill>
-                  </a:tcPr>
-                </a:tc>
-                <a:tc>
-                  <a:txBody>
-                    <a:bodyPr wrap="square"/>
-                    <a:lstStyle/>
-                    <a:p>
-                      <a:r>
-                        <a:rPr sz="1400" b="0">
-                          <a:solidFill>
-                            <a:srgbClr val="38424E"/>
-                          </a:solidFill>
-                          <a:latin typeface="Arial"/>
-                        </a:rPr>
-                        <a:t>77%</a:t>
-                      </a:r>
-                    </a:p>
-                  </a:txBody>
-                  <a:tcPr marL="73152" marR="73152" marT="45720" marB="45720">
-                    <a:solidFill>
-                      <a:srgbClr val="FFFFFF"/>
-                    </a:solidFill>
-                  </a:tcPr>
-                </a:tc>
-              </a:tr>
-              <a:tr h="335280">
-                <a:tc>
-                  <a:txBody>
-                    <a:bodyPr wrap="square"/>
-                    <a:lstStyle/>
-                    <a:p>
-                      <a:r>
-                        <a:rPr sz="1400" b="0">
-                          <a:solidFill>
-                            <a:srgbClr val="38424E"/>
-                          </a:solidFill>
-                          <a:latin typeface="Arial"/>
-                        </a:rPr>
-                        <a:t>Ada-KV</a:t>
-                      </a:r>
-                    </a:p>
-                  </a:txBody>
-                  <a:tcPr marL="73152" marR="73152" marT="45720" marB="45720">
-                    <a:solidFill>
-                      <a:srgbClr val="F7F9FB"/>
-                    </a:solidFill>
-                  </a:tcPr>
-                </a:tc>
-                <a:tc>
-                  <a:txBody>
-                    <a:bodyPr wrap="square"/>
-                    <a:lstStyle/>
-                    <a:p>
-                      <a:r>
-                        <a:rPr sz="1400" b="0">
-                          <a:solidFill>
-                            <a:srgbClr val="38424E"/>
-                          </a:solidFill>
-                          <a:latin typeface="Arial"/>
-                        </a:rPr>
-                        <a:t>adaptive per-head budget</a:t>
-                      </a:r>
-                    </a:p>
-                  </a:txBody>
-                  <a:tcPr marL="73152" marR="73152" marT="45720" marB="45720">
-                    <a:solidFill>
-                      <a:srgbClr val="F7F9FB"/>
-                    </a:solidFill>
-                  </a:tcPr>
-                </a:tc>
-                <a:tc>
-                  <a:txBody>
-                    <a:bodyPr wrap="square"/>
-                    <a:lstStyle/>
-                    <a:p>
-                      <a:r>
-                        <a:rPr sz="1400" b="0">
-                          <a:solidFill>
-                            <a:srgbClr val="38424E"/>
-                          </a:solidFill>
-                          <a:latin typeface="Arial"/>
-                        </a:rPr>
-                        <a:t>2048</a:t>
-                      </a:r>
-                    </a:p>
-                  </a:txBody>
-                  <a:tcPr marL="73152" marR="73152" marT="45720" marB="45720">
-                    <a:solidFill>
-                      <a:srgbClr val="F7F9FB"/>
-                    </a:solidFill>
-                  </a:tcPr>
-                </a:tc>
-                <a:tc>
-                  <a:txBody>
-                    <a:bodyPr wrap="square"/>
-                    <a:lstStyle/>
-                    <a:p>
-                      <a:r>
-                        <a:rPr sz="1400" b="0">
-                          <a:solidFill>
-                            <a:srgbClr val="38424E"/>
-                          </a:solidFill>
-                          <a:latin typeface="Arial"/>
-                        </a:rPr>
-                        <a:t>71%</a:t>
-                      </a:r>
-                    </a:p>
-                  </a:txBody>
-                  <a:tcPr marL="73152" marR="73152" marT="45720" marB="45720">
-                    <a:solidFill>
-                      <a:srgbClr val="F7F9FB"/>
-                    </a:solidFill>
-                  </a:tcPr>
-                </a:tc>
-              </a:tr>
-              <a:tr h="335280">
-                <a:tc>
-                  <a:txBody>
-                    <a:bodyPr wrap="square"/>
-                    <a:lstStyle/>
-                    <a:p>
-                      <a:r>
-                        <a:rPr sz="1400" b="1">
-                          <a:solidFill>
-                            <a:srgbClr val="0C1116"/>
-                          </a:solidFill>
-                          <a:latin typeface="Arial"/>
-                        </a:rPr>
-                        <a:t>μKV</a:t>
-                      </a:r>
-                    </a:p>
-                  </a:txBody>
-                  <a:tcPr marL="73152" marR="73152" marT="45720" marB="45720">
-                    <a:solidFill>
-                      <a:srgbClr val="FFFFFF"/>
-                    </a:solidFill>
-                  </a:tcPr>
-                </a:tc>
-                <a:tc>
-                  <a:txBody>
-                    <a:bodyPr wrap="square"/>
-                    <a:lstStyle/>
-                    <a:p>
-                      <a:r>
-                        <a:rPr sz="1400" b="1">
-                          <a:solidFill>
-                            <a:srgbClr val="0C1116"/>
-                          </a:solidFill>
-                          <a:latin typeface="Arial"/>
-                        </a:rPr>
-                        <a:t>this work</a:t>
-                      </a:r>
-                    </a:p>
-                  </a:txBody>
-                  <a:tcPr marL="73152" marR="73152" marT="45720" marB="45720">
-                    <a:solidFill>
-                      <a:srgbClr val="FFFFFF"/>
-                    </a:solidFill>
-                  </a:tcPr>
-                </a:tc>
-                <a:tc>
-                  <a:txBody>
-                    <a:bodyPr wrap="square"/>
-                    <a:lstStyle/>
-                    <a:p>
-                      <a:r>
-                        <a:rPr sz="1400" b="1">
-                          <a:solidFill>
-                            <a:srgbClr val="0C1116"/>
-                          </a:solidFill>
-                          <a:latin typeface="Arial"/>
-                        </a:rPr>
-                        <a:t>1024, sequence-level</a:t>
-                      </a:r>
-                    </a:p>
-                  </a:txBody>
-                  <a:tcPr marL="73152" marR="73152" marT="45720" marB="45720">
-                    <a:solidFill>
-                      <a:srgbClr val="FFFFFF"/>
-                    </a:solidFill>
-                  </a:tcPr>
-                </a:tc>
-                <a:tc>
-                  <a:txBody>
-                    <a:bodyPr wrap="square"/>
-                    <a:lstStyle/>
-                    <a:p>
-                      <a:r>
-                        <a:rPr sz="1400" b="1">
-                          <a:solidFill>
-                            <a:srgbClr val="0C1116"/>
-                          </a:solidFill>
-                          <a:latin typeface="Arial"/>
-                        </a:rPr>
-                        <a:t>14%</a:t>
-                      </a:r>
-                    </a:p>
-                  </a:txBody>
-                  <a:tcPr marL="73152" marR="73152" marT="45720" marB="45720">
-                    <a:solidFill>
-                      <a:srgbClr val="FFFFFF"/>
-                    </a:solidFill>
-                  </a:tcPr>
-                </a:tc>
-              </a:tr>
-            </a:tbl>
-          </a:graphicData>
-        </a:graphic>
-      </p:graphicFrame>
-      <p:sp>
-        <p:nvSpPr>
-          <p:cNvPr id="7" name="TextBox 6"/>
-          <p:cNvSpPr txBox="1"/>
-          <p:nvPr/>
-        </p:nvSpPr>
-        <p:spPr>
-          <a:xfrm>
-            <a:off x="548640" y="4023360"/>
-            <a:ext cx="11064240" cy="1828800"/>
-          </a:xfrm>
-          <a:prstGeom prst="rect">
-            <a:avLst/>
-          </a:prstGeom>
-          <a:noFill/>
-        </p:spPr>
-        <p:txBody>
-          <a:bodyPr wrap="square" anchor="t" lIns="36576" rIns="36576" tIns="18288" bIns="18288">
-            <a:spAutoFit/>
-          </a:bodyPr>
-          <a:lstStyle/>
-          <a:p>
-            <a:pPr algn="l">
-              <a:lnSpc>
-                <a:spcPct val="115000"/>
-              </a:lnSpc>
-            </a:pPr>
-            <a:r>
-              <a:rPr sz="1700" b="0">
-                <a:solidFill>
-                  <a:srgbClr val="38424E"/>
-                </a:solidFill>
-                <a:latin typeface="Arial"/>
-              </a:rPr>
-              <a:t>The claim is not wrong on a server. It is a claim about how many scores were dropped, not about how much memory came back.</a:t>
-            </a:r>
-          </a:p>
-          <a:p>
-            <a:pPr algn="l">
-              <a:lnSpc>
-                <a:spcPct val="115000"/>
-              </a:lnSpc>
-            </a:pPr>
-            <a:r>
-              <a:rPr sz="1700" b="0">
-                <a:solidFill>
-                  <a:srgbClr val="38424E"/>
-                </a:solidFill>
-                <a:latin typeface="Arial"/>
-              </a:rPr>
-              <a:t>On a shared cell array those are different numbers, and only the second one changes the phone's DRAM traffic.</a:t>
-            </a:r>
-          </a:p>
-        </p:txBody>
-      </p:sp>
-      <p:sp>
-        <p:nvSpPr>
-          <p:cNvPr id="8" name="TextBox 7"/>
-          <p:cNvSpPr txBox="1"/>
-          <p:nvPr/>
-        </p:nvSpPr>
-        <p:spPr>
-          <a:xfrm>
-            <a:off x="548640" y="5669280"/>
-            <a:ext cx="11064240" cy="640080"/>
-          </a:xfrm>
-          <a:prstGeom prst="rect">
-            <a:avLst/>
-          </a:prstGeom>
-          <a:noFill/>
-        </p:spPr>
-        <p:txBody>
-          <a:bodyPr wrap="square" anchor="t" lIns="36576" rIns="36576" tIns="18288" bIns="18288">
-            <a:spAutoFit/>
-          </a:bodyPr>
-          <a:lstStyle/>
-          <a:p>
-            <a:pPr algn="l">
-              <a:lnSpc>
-                <a:spcPct val="115000"/>
-              </a:lnSpc>
-            </a:pPr>
-            <a:r>
-              <a:rPr sz="2000" b="1">
-                <a:solidFill>
-                  <a:srgbClr val="C4581A"/>
-                </a:solidFill>
-                <a:latin typeface="Arial"/>
-              </a:rPr>
-              <a:t>Report realized cells, not selection ratios.</a:t>
             </a:r>
           </a:p>
         </p:txBody>

--- a/muKV_full_deck.pptx
+++ b/muKV_full_deck.pptx
@@ -29477,13 +29477,13 @@
               </a:lnSpc>
             </a:pPr>
             <a:r>
-              <a:rPr sz="2800" b="1">
+              <a:rPr sz="2400" b="1">
                 <a:solidFill>
                   <a:srgbClr val="0C1116"/>
                 </a:solidFill>
                 <a:latin typeface="Arial"/>
               </a:rPr>
-              <a:t>Every stage in order, and what each one produces</a:t>
+              <a:t>Every part of Figure 2, in order, and what each one produces</a:t>
             </a:r>
           </a:p>
         </p:txBody>
@@ -29580,8 +29580,8 @@
           <p:nvPr/>
         </p:nvGraphicFramePr>
         <p:xfrm>
-          <a:off x="411480" y="1481328"/>
-          <a:ext cx="10881360" cy="4114800"/>
+          <a:off x="411480" y="1371600"/>
+          <a:ext cx="11384280" cy="4434840"/>
         </p:xfrm>
         <a:graphic>
           <a:graphicData uri="http://schemas.openxmlformats.org/drawingml/2006/table">
@@ -29590,20 +29590,19 @@
                 <a:tableStyleId>{5C22544A-7EE6-4342-B048-85BDC9FD1C3A}</a:tableStyleId>
               </a:tblPr>
               <a:tblGrid>
-                <a:gridCol w="365760"/>
-                <a:gridCol w="2011680"/>
-                <a:gridCol w="5029200"/>
+                <a:gridCol w="320040"/>
+                <a:gridCol w="3291840"/>
+                <a:gridCol w="4937760"/>
                 <a:gridCol w="2834640"/>
-                <a:gridCol w="640080"/>
               </a:tblGrid>
-              <a:tr h="457200">
-                <a:tc>
-                  <a:txBody>
-                    <a:bodyPr wrap="square"/>
-                    <a:lstStyle/>
-                    <a:p>
-                      <a:r>
-                        <a:rPr sz="1200" b="1">
+              <a:tr h="341141">
+                <a:tc>
+                  <a:txBody>
+                    <a:bodyPr wrap="square"/>
+                    <a:lstStyle/>
+                    <a:p>
+                      <a:r>
+                        <a:rPr sz="1050" b="1">
                           <a:solidFill>
                             <a:srgbClr val="0C1116"/>
                           </a:solidFill>
@@ -29625,13 +29624,13 @@
                     <a:lstStyle/>
                     <a:p>
                       <a:r>
-                        <a:rPr sz="1200" b="1">
+                        <a:rPr sz="1050" b="1">
                           <a:solidFill>
                             <a:srgbClr val="0C1116"/>
                           </a:solidFill>
                           <a:latin typeface="Arial"/>
                         </a:rPr>
-                        <a:t>Stage</a:t>
+                        <a:t>Part, as labelled in the figure</a:t>
                       </a:r>
                     </a:p>
                   </a:txBody>
@@ -29647,7 +29646,7 @@
                     <a:lstStyle/>
                     <a:p>
                       <a:r>
-                        <a:rPr sz="1200" b="1">
+                        <a:rPr sz="1050" b="1">
                           <a:solidFill>
                             <a:srgbClr val="0C1116"/>
                           </a:solidFill>
@@ -29669,7 +29668,7 @@
                     <a:lstStyle/>
                     <a:p>
                       <a:r>
-                        <a:rPr sz="1200" b="1">
+                        <a:rPr sz="1050" b="1">
                           <a:solidFill>
                             <a:srgbClr val="0C1116"/>
                           </a:solidFill>
@@ -29685,131 +29684,987 @@
                     </a:solidFill>
                   </a:tcPr>
                 </a:tc>
-                <a:tc>
-                  <a:txBody>
-                    <a:bodyPr wrap="square"/>
-                    <a:lstStyle/>
-                    <a:p>
-                      <a:r>
-                        <a:rPr sz="1200" b="1">
+              </a:tr>
+              <a:tr h="341141">
+                <a:tc>
+                  <a:txBody>
+                    <a:bodyPr wrap="square"/>
+                    <a:lstStyle/>
+                    <a:p>
+                      <a:r>
+                        <a:rPr sz="1050" b="0">
+                          <a:solidFill>
+                            <a:srgbClr val="38424E"/>
+                          </a:solidFill>
+                          <a:latin typeface="Arial"/>
+                        </a:rPr>
+                        <a:t>a</a:t>
+                      </a:r>
+                    </a:p>
+                  </a:txBody>
+                  <a:tcPr marL="73152" marR="73152" marT="45720" marB="45720">
+                    <a:solidFill>
+                      <a:srgbClr val="FFFFFF"/>
+                    </a:solidFill>
+                  </a:tcPr>
+                </a:tc>
+                <a:tc>
+                  <a:txBody>
+                    <a:bodyPr wrap="square"/>
+                    <a:lstStyle/>
+                    <a:p>
+                      <a:r>
+                        <a:rPr sz="1050" b="0">
+                          <a:solidFill>
+                            <a:srgbClr val="38424E"/>
+                          </a:solidFill>
+                          <a:latin typeface="Arial"/>
+                        </a:rPr>
+                        <a:t>Q K V → flash attention → output</a:t>
+                      </a:r>
+                    </a:p>
+                  </a:txBody>
+                  <a:tcPr marL="73152" marR="73152" marT="45720" marB="45720">
+                    <a:solidFill>
+                      <a:srgbClr val="FFFFFF"/>
+                    </a:solidFill>
+                  </a:tcPr>
+                </a:tc>
+                <a:tc>
+                  <a:txBody>
+                    <a:bodyPr wrap="square"/>
+                    <a:lstStyle/>
+                    <a:p>
+                      <a:r>
+                        <a:rPr sz="1050" b="0">
+                          <a:solidFill>
+                            <a:srgbClr val="38424E"/>
+                          </a:solidFill>
+                          <a:latin typeface="Arial"/>
+                        </a:rPr>
+                        <a:t>the unmodified layer; the fused kernel never stores attention</a:t>
+                      </a:r>
+                    </a:p>
+                  </a:txBody>
+                  <a:tcPr marL="73152" marR="73152" marT="45720" marB="45720">
+                    <a:solidFill>
+                      <a:srgbClr val="FFFFFF"/>
+                    </a:solidFill>
+                  </a:tcPr>
+                </a:tc>
+                <a:tc>
+                  <a:txBody>
+                    <a:bodyPr wrap="square"/>
+                    <a:lstStyle/>
+                    <a:p>
+                      <a:r>
+                        <a:rPr sz="1050" b="0">
+                          <a:solidFill>
+                            <a:srgbClr val="38424E"/>
+                          </a:solidFill>
+                          <a:latin typeface="Arial"/>
+                        </a:rPr>
+                        <a:t>layer output only</a:t>
+                      </a:r>
+                    </a:p>
+                  </a:txBody>
+                  <a:tcPr marL="73152" marR="73152" marT="45720" marB="45720">
+                    <a:solidFill>
+                      <a:srgbClr val="FFFFFF"/>
+                    </a:solidFill>
+                  </a:tcPr>
+                </a:tc>
+              </a:tr>
+              <a:tr h="341141">
+                <a:tc>
+                  <a:txBody>
+                    <a:bodyPr wrap="square"/>
+                    <a:lstStyle/>
+                    <a:p>
+                      <a:r>
+                        <a:rPr sz="1050" b="0">
+                          <a:solidFill>
+                            <a:srgbClr val="38424E"/>
+                          </a:solidFill>
+                          <a:latin typeface="Arial"/>
+                        </a:rPr>
+                        <a:t>b</a:t>
+                      </a:r>
+                    </a:p>
+                  </a:txBody>
+                  <a:tcPr marL="73152" marR="73152" marT="45720" marB="45720">
+                    <a:solidFill>
+                      <a:srgbClr val="F7F9FB"/>
+                    </a:solidFill>
+                  </a:tcPr>
+                </a:tc>
+                <a:tc>
+                  <a:txBody>
+                    <a:bodyPr wrap="square"/>
+                    <a:lstStyle/>
+                    <a:p>
+                      <a:r>
+                        <a:rPr sz="1050" b="0">
+                          <a:solidFill>
+                            <a:srgbClr val="38424E"/>
+                          </a:solidFill>
+                          <a:latin typeface="Arial"/>
+                        </a:rPr>
+                        <a:t>kq_evict side node</a:t>
+                      </a:r>
+                    </a:p>
+                  </a:txBody>
+                  <a:tcPr marL="73152" marR="73152" marT="45720" marB="45720">
+                    <a:solidFill>
+                      <a:srgbClr val="F7F9FB"/>
+                    </a:solidFill>
+                  </a:tcPr>
+                </a:tc>
+                <a:tc>
+                  <a:txBody>
+                    <a:bodyPr wrap="square"/>
+                    <a:lstStyle/>
+                    <a:p>
+                      <a:r>
+                        <a:rPr sz="1050" b="0">
+                          <a:solidFill>
+                            <a:srgbClr val="38424E"/>
+                          </a:solidFill>
+                          <a:latin typeface="Arial"/>
+                        </a:rPr>
+                        <a:t>softmax(K Qᵀ) for the last 16 queries, last chunk, as a graph output</a:t>
+                      </a:r>
+                    </a:p>
+                  </a:txBody>
+                  <a:tcPr marL="73152" marR="73152" marT="45720" marB="45720">
+                    <a:solidFill>
+                      <a:srgbClr val="F7F9FB"/>
+                    </a:solidFill>
+                  </a:tcPr>
+                </a:tc>
+                <a:tc>
+                  <a:txBody>
+                    <a:bodyPr wrap="square"/>
+                    <a:lstStyle/>
+                    <a:p>
+                      <a:r>
+                        <a:rPr sz="1050" b="0">
+                          <a:solidFill>
+                            <a:srgbClr val="38424E"/>
+                          </a:solidFill>
+                          <a:latin typeface="Arial"/>
+                        </a:rPr>
+                        <a:t>raw attention, 16 queries</a:t>
+                      </a:r>
+                    </a:p>
+                  </a:txBody>
+                  <a:tcPr marL="73152" marR="73152" marT="45720" marB="45720">
+                    <a:solidFill>
+                      <a:srgbClr val="F7F9FB"/>
+                    </a:solidFill>
+                  </a:tcPr>
+                </a:tc>
+              </a:tr>
+              <a:tr h="341141">
+                <a:tc>
+                  <a:txBody>
+                    <a:bodyPr wrap="square"/>
+                    <a:lstStyle/>
+                    <a:p>
+                      <a:r>
+                        <a:rPr sz="1050" b="0">
+                          <a:solidFill>
+                            <a:srgbClr val="38424E"/>
+                          </a:solidFill>
+                          <a:latin typeface="Arial"/>
+                        </a:rPr>
+                        <a:t>c</a:t>
+                      </a:r>
+                    </a:p>
+                  </a:txBody>
+                  <a:tcPr marL="73152" marR="73152" marT="45720" marB="45720">
+                    <a:solidFill>
+                      <a:srgbClr val="FFFFFF"/>
+                    </a:solidFill>
+                  </a:tcPr>
+                </a:tc>
+                <a:tc>
+                  <a:txBody>
+                    <a:bodyPr wrap="square"/>
+                    <a:lstStyle/>
+                    <a:p>
+                      <a:r>
+                        <a:rPr sz="1050" b="0">
+                          <a:solidFill>
+                            <a:srgbClr val="38424E"/>
+                          </a:solidFill>
+                          <a:latin typeface="Arial"/>
+                        </a:rPr>
+                        <a:t>heat map,  A ∈ ℝ^(16×N)</a:t>
+                      </a:r>
+                    </a:p>
+                  </a:txBody>
+                  <a:tcPr marL="73152" marR="73152" marT="45720" marB="45720">
+                    <a:solidFill>
+                      <a:srgbClr val="FFFFFF"/>
+                    </a:solidFill>
+                  </a:tcPr>
+                </a:tc>
+                <a:tc>
+                  <a:txBody>
+                    <a:bodyPr wrap="square"/>
+                    <a:lstStyle/>
+                    <a:p>
+                      <a:r>
+                        <a:rPr sz="1050" b="0">
+                          <a:solidFill>
+                            <a:srgbClr val="38424E"/>
+                          </a:solidFill>
+                          <a:latin typeface="Arial"/>
+                        </a:rPr>
+                        <a:t>a real capture, Llama-3.2-1B layer 8, log scale</a:t>
+                      </a:r>
+                    </a:p>
+                  </a:txBody>
+                  <a:tcPr marL="73152" marR="73152" marT="45720" marB="45720">
+                    <a:solidFill>
+                      <a:srgbClr val="FFFFFF"/>
+                    </a:solidFill>
+                  </a:tcPr>
+                </a:tc>
+                <a:tc>
+                  <a:txBody>
+                    <a:bodyPr wrap="square"/>
+                    <a:lstStyle/>
+                    <a:p>
+                      <a:r>
+                        <a:rPr sz="1050" b="0">
+                          <a:solidFill>
+                            <a:srgbClr val="38424E"/>
+                          </a:solidFill>
+                          <a:latin typeface="Arial"/>
+                        </a:rPr>
+                        <a:t>the 16 × N attention block</a:t>
+                      </a:r>
+                    </a:p>
+                  </a:txBody>
+                  <a:tcPr marL="73152" marR="73152" marT="45720" marB="45720">
+                    <a:solidFill>
+                      <a:srgbClr val="FFFFFF"/>
+                    </a:solidFill>
+                  </a:tcPr>
+                </a:tc>
+              </a:tr>
+              <a:tr h="341141">
+                <a:tc>
+                  <a:txBody>
+                    <a:bodyPr wrap="square"/>
+                    <a:lstStyle/>
+                    <a:p>
+                      <a:r>
+                        <a:rPr sz="1050" b="0">
+                          <a:solidFill>
+                            <a:srgbClr val="38424E"/>
+                          </a:solidFill>
+                          <a:latin typeface="Arial"/>
+                        </a:rPr>
+                        <a:t>d</a:t>
+                      </a:r>
+                    </a:p>
+                  </a:txBody>
+                  <a:tcPr marL="73152" marR="73152" marT="45720" marB="45720">
+                    <a:solidFill>
+                      <a:srgbClr val="F7F9FB"/>
+                    </a:solidFill>
+                  </a:tcPr>
+                </a:tc>
+                <a:tc>
+                  <a:txBody>
+                    <a:bodyPr wrap="square"/>
+                    <a:lstStyle/>
+                    <a:p>
+                      <a:r>
+                        <a:rPr sz="1050" b="0">
+                          <a:solidFill>
+                            <a:srgbClr val="38424E"/>
+                          </a:solidFill>
+                          <a:latin typeface="Arial"/>
+                        </a:rPr>
+                        <a:t>per-layer scores,  s ∈ ℝ^(L×N)</a:t>
+                      </a:r>
+                    </a:p>
+                  </a:txBody>
+                  <a:tcPr marL="73152" marR="73152" marT="45720" marB="45720">
+                    <a:solidFill>
+                      <a:srgbClr val="F7F9FB"/>
+                    </a:solidFill>
+                  </a:tcPr>
+                </a:tc>
+                <a:tc>
+                  <a:txBody>
+                    <a:bodyPr wrap="square"/>
+                    <a:lstStyle/>
+                    <a:p>
+                      <a:r>
+                        <a:rPr sz="1050" b="0">
+                          <a:solidFill>
+                            <a:srgbClr val="38424E"/>
+                          </a:solidFill>
+                          <a:latin typeface="Arial"/>
+                        </a:rPr>
+                        <a:t>averages the 16 query rows away</a:t>
+                      </a:r>
+                    </a:p>
+                  </a:txBody>
+                  <a:tcPr marL="73152" marR="73152" marT="45720" marB="45720">
+                    <a:solidFill>
+                      <a:srgbClr val="F7F9FB"/>
+                    </a:solidFill>
+                  </a:tcPr>
+                </a:tc>
+                <a:tc>
+                  <a:txBody>
+                    <a:bodyPr wrap="square"/>
+                    <a:lstStyle/>
+                    <a:p>
+                      <a:r>
+                        <a:rPr sz="1050" b="0">
+                          <a:solidFill>
+                            <a:srgbClr val="38424E"/>
+                          </a:solidFill>
+                          <a:latin typeface="Arial"/>
+                        </a:rPr>
+                        <a:t>one score per layer, per position</a:t>
+                      </a:r>
+                    </a:p>
+                  </a:txBody>
+                  <a:tcPr marL="73152" marR="73152" marT="45720" marB="45720">
+                    <a:solidFill>
+                      <a:srgbClr val="F7F9FB"/>
+                    </a:solidFill>
+                  </a:tcPr>
+                </a:tc>
+              </a:tr>
+              <a:tr h="341141">
+                <a:tc>
+                  <a:txBody>
+                    <a:bodyPr wrap="square"/>
+                    <a:lstStyle/>
+                    <a:p>
+                      <a:r>
+                        <a:rPr sz="1050" b="0">
+                          <a:solidFill>
+                            <a:srgbClr val="38424E"/>
+                          </a:solidFill>
+                          <a:latin typeface="Arial"/>
+                        </a:rPr>
+                        <a:t>e</a:t>
+                      </a:r>
+                    </a:p>
+                  </a:txBody>
+                  <a:tcPr marL="73152" marR="73152" marT="45720" marB="45720">
+                    <a:solidFill>
+                      <a:srgbClr val="FFFFFF"/>
+                    </a:solidFill>
+                  </a:tcPr>
+                </a:tc>
+                <a:tc>
+                  <a:txBody>
+                    <a:bodyPr wrap="square"/>
+                    <a:lstStyle/>
+                    <a:p>
+                      <a:r>
+                        <a:rPr sz="1050" b="0">
+                          <a:solidFill>
+                            <a:srgbClr val="38424E"/>
+                          </a:solidFill>
+                          <a:latin typeface="Arial"/>
+                        </a:rPr>
+                        <a:t>aggregate layers and heads</a:t>
+                      </a:r>
+                    </a:p>
+                  </a:txBody>
+                  <a:tcPr marL="73152" marR="73152" marT="45720" marB="45720">
+                    <a:solidFill>
+                      <a:srgbClr val="FFFFFF"/>
+                    </a:solidFill>
+                  </a:tcPr>
+                </a:tc>
+                <a:tc>
+                  <a:txBody>
+                    <a:bodyPr wrap="square"/>
+                    <a:lstStyle/>
+                    <a:p>
+                      <a:r>
+                        <a:rPr sz="1050" b="0">
+                          <a:solidFill>
+                            <a:srgbClr val="38424E"/>
+                          </a:solidFill>
+                          <a:latin typeface="Arial"/>
+                        </a:rPr>
+                        <a:t>mean over l and h; this is what makes selection sequence-level</a:t>
+                      </a:r>
+                    </a:p>
+                  </a:txBody>
+                  <a:tcPr marL="73152" marR="73152" marT="45720" marB="45720">
+                    <a:solidFill>
+                      <a:srgbClr val="FFFFFF"/>
+                    </a:solidFill>
+                  </a:tcPr>
+                </a:tc>
+                <a:tc>
+                  <a:txBody>
+                    <a:bodyPr wrap="square"/>
+                    <a:lstStyle/>
+                    <a:p>
+                      <a:r>
+                        <a:rPr sz="1050" b="0">
+                          <a:solidFill>
+                            <a:srgbClr val="38424E"/>
+                          </a:solidFill>
+                          <a:latin typeface="Arial"/>
+                        </a:rPr>
+                        <a:t>one score per position</a:t>
+                      </a:r>
+                    </a:p>
+                  </a:txBody>
+                  <a:tcPr marL="73152" marR="73152" marT="45720" marB="45720">
+                    <a:solidFill>
+                      <a:srgbClr val="FFFFFF"/>
+                    </a:solidFill>
+                  </a:tcPr>
+                </a:tc>
+              </a:tr>
+              <a:tr h="341141">
+                <a:tc>
+                  <a:txBody>
+                    <a:bodyPr wrap="square"/>
+                    <a:lstStyle/>
+                    <a:p>
+                      <a:r>
+                        <a:rPr sz="1050" b="0">
+                          <a:solidFill>
+                            <a:srgbClr val="38424E"/>
+                          </a:solidFill>
+                          <a:latin typeface="Arial"/>
+                        </a:rPr>
+                        <a:t>f</a:t>
+                      </a:r>
+                    </a:p>
+                  </a:txBody>
+                  <a:tcPr marL="73152" marR="73152" marT="45720" marB="45720">
+                    <a:solidFill>
+                      <a:srgbClr val="F7F9FB"/>
+                    </a:solidFill>
+                  </a:tcPr>
+                </a:tc>
+                <a:tc>
+                  <a:txBody>
+                    <a:bodyPr wrap="square"/>
+                    <a:lstStyle/>
+                    <a:p>
+                      <a:r>
+                        <a:rPr sz="1050" b="0">
+                          <a:solidFill>
+                            <a:srgbClr val="38424E"/>
+                          </a:solidFill>
+                          <a:latin typeface="Arial"/>
+                        </a:rPr>
+                        <a:t>max-pool, kernel 7</a:t>
+                      </a:r>
+                    </a:p>
+                  </a:txBody>
+                  <a:tcPr marL="73152" marR="73152" marT="45720" marB="45720">
+                    <a:solidFill>
+                      <a:srgbClr val="F7F9FB"/>
+                    </a:solidFill>
+                  </a:tcPr>
+                </a:tc>
+                <a:tc>
+                  <a:txBody>
+                    <a:bodyPr wrap="square"/>
+                    <a:lstStyle/>
+                    <a:p>
+                      <a:r>
+                        <a:rPr sz="1050" b="0">
+                          <a:solidFill>
+                            <a:srgbClr val="38424E"/>
+                          </a:solidFill>
+                          <a:latin typeface="Arial"/>
+                        </a:rPr>
+                        <a:t>each position takes its 7-wide max: clusters survive, spikes do not</a:t>
+                      </a:r>
+                    </a:p>
+                  </a:txBody>
+                  <a:tcPr marL="73152" marR="73152" marT="45720" marB="45720">
+                    <a:solidFill>
+                      <a:srgbClr val="F7F9FB"/>
+                    </a:solidFill>
+                  </a:tcPr>
+                </a:tc>
+                <a:tc>
+                  <a:txBody>
+                    <a:bodyPr wrap="square"/>
+                    <a:lstStyle/>
+                    <a:p>
+                      <a:r>
+                        <a:rPr sz="1050" b="0">
+                          <a:solidFill>
+                            <a:srgbClr val="38424E"/>
+                          </a:solidFill>
+                          <a:latin typeface="Arial"/>
+                        </a:rPr>
+                        <a:t>smoothed score</a:t>
+                      </a:r>
+                    </a:p>
+                  </a:txBody>
+                  <a:tcPr marL="73152" marR="73152" marT="45720" marB="45720">
+                    <a:solidFill>
+                      <a:srgbClr val="F7F9FB"/>
+                    </a:solidFill>
+                  </a:tcPr>
+                </a:tc>
+              </a:tr>
+              <a:tr h="341141">
+                <a:tc>
+                  <a:txBody>
+                    <a:bodyPr wrap="square"/>
+                    <a:lstStyle/>
+                    <a:p>
+                      <a:r>
+                        <a:rPr sz="1050" b="0">
+                          <a:solidFill>
+                            <a:srgbClr val="38424E"/>
+                          </a:solidFill>
+                          <a:latin typeface="Arial"/>
+                        </a:rPr>
+                        <a:t>g</a:t>
+                      </a:r>
+                    </a:p>
+                  </a:txBody>
+                  <a:tcPr marL="73152" marR="73152" marT="45720" marB="45720">
+                    <a:solidFill>
+                      <a:srgbClr val="FFFFFF"/>
+                    </a:solidFill>
+                  </a:tcPr>
+                </a:tc>
+                <a:tc>
+                  <a:txBody>
+                    <a:bodyPr wrap="square"/>
+                    <a:lstStyle/>
+                    <a:p>
+                      <a:r>
+                        <a:rPr sz="1050" b="0">
+                          <a:solidFill>
+                            <a:srgbClr val="38424E"/>
+                          </a:solidFill>
+                          <a:latin typeface="Arial"/>
+                        </a:rPr>
+                        <a:t>α-gate</a:t>
+                      </a:r>
+                    </a:p>
+                  </a:txBody>
+                  <a:tcPr marL="73152" marR="73152" marT="45720" marB="45720">
+                    <a:solidFill>
+                      <a:srgbClr val="FFFFFF"/>
+                    </a:solidFill>
+                  </a:tcPr>
+                </a:tc>
+                <a:tc>
+                  <a:txBody>
+                    <a:bodyPr wrap="square"/>
+                    <a:lstStyle/>
+                    <a:p>
+                      <a:r>
+                        <a:rPr sz="1050" b="0">
+                          <a:solidFill>
+                            <a:srgbClr val="38424E"/>
+                          </a:solidFill>
+                          <a:latin typeface="Arial"/>
+                        </a:rPr>
+                        <a:t>αa is the mass outside the recent window, floor 0.70; it splits K</a:t>
+                      </a:r>
+                    </a:p>
+                  </a:txBody>
+                  <a:tcPr marL="73152" marR="73152" marT="45720" marB="45720">
+                    <a:solidFill>
+                      <a:srgbClr val="FFFFFF"/>
+                    </a:solidFill>
+                  </a:tcPr>
+                </a:tc>
+                <a:tc>
+                  <a:txBody>
+                    <a:bodyPr wrap="square"/>
+                    <a:lstStyle/>
+                    <a:p>
+                      <a:r>
+                        <a:rPr sz="1050" b="0">
+                          <a:solidFill>
+                            <a:srgbClr val="38424E"/>
+                          </a:solidFill>
+                          <a:latin typeface="Arial"/>
+                        </a:rPr>
+                        <a:t>n_anchor and n_recent</a:t>
+                      </a:r>
+                    </a:p>
+                  </a:txBody>
+                  <a:tcPr marL="73152" marR="73152" marT="45720" marB="45720">
+                    <a:solidFill>
+                      <a:srgbClr val="FFFFFF"/>
+                    </a:solidFill>
+                  </a:tcPr>
+                </a:tc>
+              </a:tr>
+              <a:tr h="341141">
+                <a:tc>
+                  <a:txBody>
+                    <a:bodyPr wrap="square"/>
+                    <a:lstStyle/>
+                    <a:p>
+                      <a:r>
+                        <a:rPr sz="1050" b="0">
+                          <a:solidFill>
+                            <a:srgbClr val="38424E"/>
+                          </a:solidFill>
+                          <a:latin typeface="Arial"/>
+                        </a:rPr>
+                        <a:t>h</a:t>
+                      </a:r>
+                    </a:p>
+                  </a:txBody>
+                  <a:tcPr marL="73152" marR="73152" marT="45720" marB="45720">
+                    <a:solidFill>
+                      <a:srgbClr val="F7F9FB"/>
+                    </a:solidFill>
+                  </a:tcPr>
+                </a:tc>
+                <a:tc>
+                  <a:txBody>
+                    <a:bodyPr wrap="square"/>
+                    <a:lstStyle/>
+                    <a:p>
+                      <a:r>
+                        <a:rPr sz="1050" b="0">
+                          <a:solidFill>
+                            <a:srgbClr val="38424E"/>
+                          </a:solidFill>
+                          <a:latin typeface="Arial"/>
+                        </a:rPr>
+                        <a:t>joint keep set,  K positions</a:t>
+                      </a:r>
+                    </a:p>
+                  </a:txBody>
+                  <a:tcPr marL="73152" marR="73152" marT="45720" marB="45720">
+                    <a:solidFill>
+                      <a:srgbClr val="F7F9FB"/>
+                    </a:solidFill>
+                  </a:tcPr>
+                </a:tc>
+                <a:tc>
+                  <a:txBody>
+                    <a:bodyPr wrap="square"/>
+                    <a:lstStyle/>
+                    <a:p>
+                      <a:r>
+                        <a:rPr sz="1050" b="0">
+                          <a:solidFill>
+                            <a:srgbClr val="38424E"/>
+                          </a:solidFill>
+                          <a:latin typeface="Arial"/>
+                        </a:rPr>
+                        <a:t>top n_anchor by score, plus 4 sinks, plus the recent window</a:t>
+                      </a:r>
+                    </a:p>
+                  </a:txBody>
+                  <a:tcPr marL="73152" marR="73152" marT="45720" marB="45720">
+                    <a:solidFill>
+                      <a:srgbClr val="F7F9FB"/>
+                    </a:solidFill>
+                  </a:tcPr>
+                </a:tc>
+                <a:tc>
+                  <a:txBody>
+                    <a:bodyPr wrap="square"/>
+                    <a:lstStyle/>
+                    <a:p>
+                      <a:r>
+                        <a:rPr sz="1050" b="0">
+                          <a:solidFill>
+                            <a:srgbClr val="38424E"/>
+                          </a:solidFill>
+                          <a:latin typeface="Arial"/>
+                        </a:rPr>
+                        <a:t>4 sinks + 721 anchors + 299 recent</a:t>
+                      </a:r>
+                    </a:p>
+                  </a:txBody>
+                  <a:tcPr marL="73152" marR="73152" marT="45720" marB="45720">
+                    <a:solidFill>
+                      <a:srgbClr val="F7F9FB"/>
+                    </a:solidFill>
+                  </a:tcPr>
+                </a:tc>
+              </a:tr>
+              <a:tr h="341141">
+                <a:tc>
+                  <a:txBody>
+                    <a:bodyPr wrap="square"/>
+                    <a:lstStyle/>
+                    <a:p>
+                      <a:r>
+                        <a:rPr sz="1050" b="0">
+                          <a:solidFill>
+                            <a:srgbClr val="38424E"/>
+                          </a:solidFill>
+                          <a:latin typeface="Arial"/>
+                        </a:rPr>
+                        <a:t>i</a:t>
+                      </a:r>
+                    </a:p>
+                  </a:txBody>
+                  <a:tcPr marL="73152" marR="73152" marT="45720" marB="45720">
+                    <a:solidFill>
+                      <a:srgbClr val="FFFFFF"/>
+                    </a:solidFill>
+                  </a:tcPr>
+                </a:tc>
+                <a:tc>
+                  <a:txBody>
+                    <a:bodyPr wrap="square"/>
+                    <a:lstStyle/>
+                    <a:p>
+                      <a:r>
+                        <a:rPr sz="1050" b="0">
+                          <a:solidFill>
+                            <a:srgbClr val="38424E"/>
+                          </a:solidFill>
+                          <a:latin typeface="Arial"/>
+                        </a:rPr>
+                        <a:t>seq-level evict and compact</a:t>
+                      </a:r>
+                    </a:p>
+                  </a:txBody>
+                  <a:tcPr marL="73152" marR="73152" marT="45720" marB="45720">
+                    <a:solidFill>
+                      <a:srgbClr val="FFFFFF"/>
+                    </a:solidFill>
+                  </a:tcPr>
+                </a:tc>
+                <a:tc>
+                  <a:txBody>
+                    <a:bodyPr wrap="square"/>
+                    <a:lstStyle/>
+                    <a:p>
+                      <a:r>
+                        <a:rPr sz="1050" b="0">
+                          <a:solidFill>
+                            <a:srgbClr val="38424E"/>
+                          </a:solidFill>
+                          <a:latin typeface="Arial"/>
+                        </a:rPr>
+                        <a:t>every layer keeps the same positions, so survivors slide together</a:t>
+                      </a:r>
+                    </a:p>
+                  </a:txBody>
+                  <a:tcPr marL="73152" marR="73152" marT="45720" marB="45720">
+                    <a:solidFill>
+                      <a:srgbClr val="FFFFFF"/>
+                    </a:solidFill>
+                  </a:tcPr>
+                </a:tc>
+                <a:tc>
+                  <a:txBody>
+                    <a:bodyPr wrap="square"/>
+                    <a:lstStyle/>
+                    <a:p>
+                      <a:r>
+                        <a:rPr sz="1050" b="0">
+                          <a:solidFill>
+                            <a:srgbClr val="38424E"/>
+                          </a:solidFill>
+                          <a:latin typeface="Arial"/>
+                        </a:rPr>
+                        <a:t>live = K, contiguous</a:t>
+                      </a:r>
+                    </a:p>
+                  </a:txBody>
+                  <a:tcPr marL="73152" marR="73152" marT="45720" marB="45720">
+                    <a:solidFill>
+                      <a:srgbClr val="FFFFFF"/>
+                    </a:solidFill>
+                  </a:tcPr>
+                </a:tc>
+              </a:tr>
+              <a:tr h="341141">
+                <a:tc>
+                  <a:txBody>
+                    <a:bodyPr wrap="square"/>
+                    <a:lstStyle/>
+                    <a:p>
+                      <a:r>
+                        <a:rPr sz="1050" b="1">
                           <a:solidFill>
                             <a:srgbClr val="0C1116"/>
                           </a:solidFill>
                           <a:latin typeface="Arial"/>
                         </a:rPr>
-                        <a:t>Fig 1</a:t>
-                      </a:r>
-                    </a:p>
-                  </a:txBody>
-                  <a:tcPr marL="73152" marR="73152" marT="45720" marB="45720">
-                    <a:solidFill>
-                      <a:srgbClr val="EEF1F4"/>
+                        <a:t/>
+                      </a:r>
+                    </a:p>
+                  </a:txBody>
+                  <a:tcPr marL="73152" marR="73152" marT="45720" marB="45720">
+                    <a:solidFill>
+                      <a:srgbClr val="F7F9FB"/>
+                    </a:solidFill>
+                  </a:tcPr>
+                </a:tc>
+                <a:tc>
+                  <a:txBody>
+                    <a:bodyPr wrap="square"/>
+                    <a:lstStyle/>
+                    <a:p>
+                      <a:r>
+                        <a:rPr sz="1050" b="1">
+                          <a:solidFill>
+                            <a:srgbClr val="0C1116"/>
+                          </a:solidFill>
+                          <a:latin typeface="Arial"/>
+                        </a:rPr>
+                        <a:t>BRANCH (b): what a per-head evictor does instead</a:t>
+                      </a:r>
+                    </a:p>
+                  </a:txBody>
+                  <a:tcPr marL="73152" marR="73152" marT="45720" marB="45720">
+                    <a:solidFill>
+                      <a:srgbClr val="F7F9FB"/>
+                    </a:solidFill>
+                  </a:tcPr>
+                </a:tc>
+                <a:tc>
+                  <a:txBody>
+                    <a:bodyPr wrap="square"/>
+                    <a:lstStyle/>
+                    <a:p>
+                      <a:r>
+                        <a:rPr sz="1050" b="1">
+                          <a:solidFill>
+                            <a:srgbClr val="0C1116"/>
+                          </a:solidFill>
+                          <a:latin typeface="Arial"/>
+                        </a:rPr>
+                        <a:t/>
+                      </a:r>
+                    </a:p>
+                  </a:txBody>
+                  <a:tcPr marL="73152" marR="73152" marT="45720" marB="45720">
+                    <a:solidFill>
+                      <a:srgbClr val="F7F9FB"/>
+                    </a:solidFill>
+                  </a:tcPr>
+                </a:tc>
+                <a:tc>
+                  <a:txBody>
+                    <a:bodyPr wrap="square"/>
+                    <a:lstStyle/>
+                    <a:p>
+                      <a:r>
+                        <a:rPr sz="1050" b="1">
+                          <a:solidFill>
+                            <a:srgbClr val="0C1116"/>
+                          </a:solidFill>
+                          <a:latin typeface="Arial"/>
+                        </a:rPr>
+                        <a:t/>
+                      </a:r>
+                    </a:p>
+                  </a:txBody>
+                  <a:tcPr marL="73152" marR="73152" marT="45720" marB="45720">
+                    <a:solidFill>
+                      <a:srgbClr val="F7F9FB"/>
                     </a:solidFill>
                   </a:tcPr>
                 </a:tc>
               </a:tr>
-              <a:tr h="457200">
-                <a:tc>
-                  <a:txBody>
-                    <a:bodyPr wrap="square"/>
-                    <a:lstStyle/>
-                    <a:p>
-                      <a:r>
-                        <a:rPr sz="1200">
-                          <a:solidFill>
-                            <a:srgbClr val="38424E"/>
-                          </a:solidFill>
-                          <a:latin typeface="Arial"/>
-                        </a:rPr>
-                        <a:t>a</a:t>
-                      </a:r>
-                    </a:p>
-                  </a:txBody>
-                  <a:tcPr marL="73152" marR="73152" marT="45720" marB="45720">
-                    <a:solidFill>
-                      <a:srgbClr val="FFFFFF"/>
-                    </a:solidFill>
-                  </a:tcPr>
-                </a:tc>
-                <a:tc>
-                  <a:txBody>
-                    <a:bodyPr wrap="square"/>
-                    <a:lstStyle/>
-                    <a:p>
-                      <a:r>
-                        <a:rPr sz="1200">
-                          <a:solidFill>
-                            <a:srgbClr val="38424E"/>
-                          </a:solidFill>
-                          <a:latin typeface="Arial"/>
-                        </a:rPr>
-                        <a:t>flash attention</a:t>
-                      </a:r>
-                    </a:p>
-                  </a:txBody>
-                  <a:tcPr marL="73152" marR="73152" marT="45720" marB="45720">
-                    <a:solidFill>
-                      <a:srgbClr val="FFFFFF"/>
-                    </a:solidFill>
-                  </a:tcPr>
-                </a:tc>
-                <a:tc>
-                  <a:txBody>
-                    <a:bodyPr wrap="square"/>
-                    <a:lstStyle/>
-                    <a:p>
-                      <a:r>
-                        <a:rPr sz="1200">
-                          <a:solidFill>
-                            <a:srgbClr val="38424E"/>
-                          </a:solidFill>
-                          <a:latin typeface="Arial"/>
-                        </a:rPr>
-                        <a:t>fuses softmax into the kernel, so the attention matrix is never written to memory</a:t>
-                      </a:r>
-                    </a:p>
-                  </a:txBody>
-                  <a:tcPr marL="73152" marR="73152" marT="45720" marB="45720">
-                    <a:solidFill>
-                      <a:srgbClr val="FFFFFF"/>
-                    </a:solidFill>
-                  </a:tcPr>
-                </a:tc>
-                <a:tc>
-                  <a:txBody>
-                    <a:bodyPr wrap="square"/>
-                    <a:lstStyle/>
-                    <a:p>
-                      <a:r>
-                        <a:rPr sz="1200">
-                          <a:solidFill>
-                            <a:srgbClr val="38424E"/>
-                          </a:solidFill>
-                          <a:latin typeface="Arial"/>
-                        </a:rPr>
-                        <a:t>layer output only</a:t>
-                      </a:r>
-                    </a:p>
-                  </a:txBody>
-                  <a:tcPr marL="73152" marR="73152" marT="45720" marB="45720">
-                    <a:solidFill>
-                      <a:srgbClr val="FFFFFF"/>
-                    </a:solidFill>
-                  </a:tcPr>
-                </a:tc>
-                <a:tc>
-                  <a:txBody>
-                    <a:bodyPr wrap="square"/>
-                    <a:lstStyle/>
-                    <a:p>
-                      <a:r>
-                        <a:rPr sz="1200">
-                          <a:solidFill>
-                            <a:srgbClr val="38424E"/>
-                          </a:solidFill>
-                          <a:latin typeface="Arial"/>
-                        </a:rPr>
-                        <a:t>—</a:t>
+              <a:tr h="341141">
+                <a:tc>
+                  <a:txBody>
+                    <a:bodyPr wrap="square"/>
+                    <a:lstStyle/>
+                    <a:p>
+                      <a:r>
+                        <a:rPr sz="1050" b="0">
+                          <a:solidFill>
+                            <a:srgbClr val="38424E"/>
+                          </a:solidFill>
+                          <a:latin typeface="Arial"/>
+                        </a:rPr>
+                        <a:t>j</a:t>
+                      </a:r>
+                    </a:p>
+                  </a:txBody>
+                  <a:tcPr marL="73152" marR="73152" marT="45720" marB="45720">
+                    <a:solidFill>
+                      <a:srgbClr val="FFFFFF"/>
+                    </a:solidFill>
+                  </a:tcPr>
+                </a:tc>
+                <a:tc>
+                  <a:txBody>
+                    <a:bodyPr wrap="square"/>
+                    <a:lstStyle/>
+                    <a:p>
+                      <a:r>
+                        <a:rPr sz="1050" b="0">
+                          <a:solidFill>
+                            <a:srgbClr val="38424E"/>
+                          </a:solidFill>
+                          <a:latin typeface="Arial"/>
+                        </a:rPr>
+                        <a:t>per-head top-K</a:t>
+                      </a:r>
+                    </a:p>
+                  </a:txBody>
+                  <a:tcPr marL="73152" marR="73152" marT="45720" marB="45720">
+                    <a:solidFill>
+                      <a:srgbClr val="FFFFFF"/>
+                    </a:solidFill>
+                  </a:tcPr>
+                </a:tc>
+                <a:tc>
+                  <a:txBody>
+                    <a:bodyPr wrap="square"/>
+                    <a:lstStyle/>
+                    <a:p>
+                      <a:r>
+                        <a:rPr sz="1050" b="0">
+                          <a:solidFill>
+                            <a:srgbClr val="38424E"/>
+                          </a:solidFill>
+                          <a:latin typeface="Arial"/>
+                        </a:rPr>
+                        <a:t>skips part e; each head keeps its own K positions</a:t>
+                      </a:r>
+                    </a:p>
+                  </a:txBody>
+                  <a:tcPr marL="73152" marR="73152" marT="45720" marB="45720">
+                    <a:solidFill>
+                      <a:srgbClr val="FFFFFF"/>
+                    </a:solidFill>
+                  </a:tcPr>
+                </a:tc>
+                <a:tc>
+                  <a:txBody>
+                    <a:bodyPr wrap="square"/>
+                    <a:lstStyle/>
+                    <a:p>
+                      <a:r>
+                        <a:rPr sz="1050" b="0">
+                          <a:solidFill>
+                            <a:srgbClr val="38424E"/>
+                          </a:solidFill>
+                          <a:latin typeface="Arial"/>
+                        </a:rPr>
+                        <a:t>K per head, different sets</a:t>
                       </a:r>
                     </a:p>
                   </a:txBody>
@@ -29820,780 +30675,86 @@
                   </a:tcPr>
                 </a:tc>
               </a:tr>
-              <a:tr h="457200">
-                <a:tc>
-                  <a:txBody>
-                    <a:bodyPr wrap="square"/>
-                    <a:lstStyle/>
-                    <a:p>
-                      <a:r>
-                        <a:rPr sz="1200">
-                          <a:solidFill>
-                            <a:srgbClr val="38424E"/>
-                          </a:solidFill>
-                          <a:latin typeface="Arial"/>
-                        </a:rPr>
-                        <a:t>b</a:t>
-                      </a:r>
-                    </a:p>
-                  </a:txBody>
-                  <a:tcPr marL="73152" marR="73152" marT="45720" marB="45720">
-                    <a:solidFill>
-                      <a:srgbClr val="F7F9FB"/>
-                    </a:solidFill>
-                  </a:tcPr>
-                </a:tc>
-                <a:tc>
-                  <a:txBody>
-                    <a:bodyPr wrap="square"/>
-                    <a:lstStyle/>
-                    <a:p>
-                      <a:r>
-                        <a:rPr sz="1200">
-                          <a:solidFill>
-                            <a:srgbClr val="38424E"/>
-                          </a:solidFill>
-                          <a:latin typeface="Arial"/>
-                        </a:rPr>
-                        <a:t>kq_evict side node</a:t>
-                      </a:r>
-                    </a:p>
-                  </a:txBody>
-                  <a:tcPr marL="73152" marR="73152" marT="45720" marB="45720">
-                    <a:solidFill>
-                      <a:srgbClr val="F7F9FB"/>
-                    </a:solidFill>
-                  </a:tcPr>
-                </a:tc>
-                <a:tc>
-                  <a:txBody>
-                    <a:bodyPr wrap="square"/>
-                    <a:lstStyle/>
-                    <a:p>
-                      <a:r>
-                        <a:rPr sz="1200">
-                          <a:solidFill>
-                            <a:srgbClr val="38424E"/>
-                          </a:solidFill>
-                          <a:latin typeface="Arial"/>
-                        </a:rPr>
-                        <a:t>recomputes softmax(K Qᵀ) for the last 16 queries, on the last prefill chunk only, as a graph output rather than a mid-graph read</a:t>
-                      </a:r>
-                    </a:p>
-                  </a:txBody>
-                  <a:tcPr marL="73152" marR="73152" marT="45720" marB="45720">
-                    <a:solidFill>
-                      <a:srgbClr val="F7F9FB"/>
-                    </a:solidFill>
-                  </a:tcPr>
-                </a:tc>
-                <a:tc>
-                  <a:txBody>
-                    <a:bodyPr wrap="square"/>
-                    <a:lstStyle/>
-                    <a:p>
-                      <a:r>
-                        <a:rPr sz="1200">
-                          <a:solidFill>
-                            <a:srgbClr val="38424E"/>
-                          </a:solidFill>
-                          <a:latin typeface="Arial"/>
-                        </a:rPr>
-                        <a:t>A, 16 x N scores</a:t>
-                      </a:r>
-                    </a:p>
-                  </a:txBody>
-                  <a:tcPr marL="73152" marR="73152" marT="45720" marB="45720">
-                    <a:solidFill>
-                      <a:srgbClr val="F7F9FB"/>
-                    </a:solidFill>
-                  </a:tcPr>
-                </a:tc>
-                <a:tc>
-                  <a:txBody>
-                    <a:bodyPr wrap="square"/>
-                    <a:lstStyle/>
-                    <a:p>
-                      <a:r>
-                        <a:rPr sz="1200">
-                          <a:solidFill>
-                            <a:srgbClr val="38424E"/>
-                          </a:solidFill>
-                          <a:latin typeface="Arial"/>
-                        </a:rPr>
-                        <a:t>1</a:t>
-                      </a:r>
-                    </a:p>
-                  </a:txBody>
-                  <a:tcPr marL="73152" marR="73152" marT="45720" marB="45720">
-                    <a:solidFill>
-                      <a:srgbClr val="F7F9FB"/>
-                    </a:solidFill>
-                  </a:tcPr>
-                </a:tc>
-              </a:tr>
-              <a:tr h="457200">
-                <a:tc>
-                  <a:txBody>
-                    <a:bodyPr wrap="square"/>
-                    <a:lstStyle/>
-                    <a:p>
-                      <a:r>
-                        <a:rPr sz="1200">
-                          <a:solidFill>
-                            <a:srgbClr val="38424E"/>
-                          </a:solidFill>
-                          <a:latin typeface="Arial"/>
-                        </a:rPr>
-                        <a:t>c</a:t>
-                      </a:r>
-                    </a:p>
-                  </a:txBody>
-                  <a:tcPr marL="73152" marR="73152" marT="45720" marB="45720">
-                    <a:solidFill>
-                      <a:srgbClr val="FFFFFF"/>
-                    </a:solidFill>
-                  </a:tcPr>
-                </a:tc>
-                <a:tc>
-                  <a:txBody>
-                    <a:bodyPr wrap="square"/>
-                    <a:lstStyle/>
-                    <a:p>
-                      <a:r>
-                        <a:rPr sz="1200">
-                          <a:solidFill>
-                            <a:srgbClr val="38424E"/>
-                          </a:solidFill>
-                          <a:latin typeface="Arial"/>
-                        </a:rPr>
-                        <a:t>reduce over queries</a:t>
-                      </a:r>
-                    </a:p>
-                  </a:txBody>
-                  <a:tcPr marL="73152" marR="73152" marT="45720" marB="45720">
-                    <a:solidFill>
-                      <a:srgbClr val="FFFFFF"/>
-                    </a:solidFill>
-                  </a:tcPr>
-                </a:tc>
-                <a:tc>
-                  <a:txBody>
-                    <a:bodyPr wrap="square"/>
-                    <a:lstStyle/>
-                    <a:p>
-                      <a:r>
-                        <a:rPr sz="1200">
-                          <a:solidFill>
-                            <a:srgbClr val="38424E"/>
-                          </a:solidFill>
-                          <a:latin typeface="Arial"/>
-                        </a:rPr>
-                        <a:t>averages the 16 query rows away</a:t>
-                      </a:r>
-                    </a:p>
-                  </a:txBody>
-                  <a:tcPr marL="73152" marR="73152" marT="45720" marB="45720">
-                    <a:solidFill>
-                      <a:srgbClr val="FFFFFF"/>
-                    </a:solidFill>
-                  </a:tcPr>
-                </a:tc>
-                <a:tc>
-                  <a:txBody>
-                    <a:bodyPr wrap="square"/>
-                    <a:lstStyle/>
-                    <a:p>
-                      <a:r>
-                        <a:rPr sz="1200">
-                          <a:solidFill>
-                            <a:srgbClr val="38424E"/>
-                          </a:solidFill>
-                          <a:latin typeface="Arial"/>
-                        </a:rPr>
-                        <a:t>s, L x N: one score per layer per position</a:t>
-                      </a:r>
-                    </a:p>
-                  </a:txBody>
-                  <a:tcPr marL="73152" marR="73152" marT="45720" marB="45720">
-                    <a:solidFill>
-                      <a:srgbClr val="FFFFFF"/>
-                    </a:solidFill>
-                  </a:tcPr>
-                </a:tc>
-                <a:tc>
-                  <a:txBody>
-                    <a:bodyPr wrap="square"/>
-                    <a:lstStyle/>
-                    <a:p>
-                      <a:r>
-                        <a:rPr sz="1200">
-                          <a:solidFill>
-                            <a:srgbClr val="38424E"/>
-                          </a:solidFill>
-                          <a:latin typeface="Arial"/>
-                        </a:rPr>
-                        <a:t>1</a:t>
-                      </a:r>
-                    </a:p>
-                  </a:txBody>
-                  <a:tcPr marL="73152" marR="73152" marT="45720" marB="45720">
-                    <a:solidFill>
-                      <a:srgbClr val="FFFFFF"/>
-                    </a:solidFill>
-                  </a:tcPr>
-                </a:tc>
-              </a:tr>
-              <a:tr h="457200">
-                <a:tc>
-                  <a:txBody>
-                    <a:bodyPr wrap="square"/>
-                    <a:lstStyle/>
-                    <a:p>
-                      <a:r>
-                        <a:rPr sz="1200">
-                          <a:solidFill>
-                            <a:srgbClr val="38424E"/>
-                          </a:solidFill>
-                          <a:latin typeface="Arial"/>
-                        </a:rPr>
-                        <a:t>d</a:t>
-                      </a:r>
-                    </a:p>
-                  </a:txBody>
-                  <a:tcPr marL="73152" marR="73152" marT="45720" marB="45720">
-                    <a:solidFill>
-                      <a:srgbClr val="F7F9FB"/>
-                    </a:solidFill>
-                  </a:tcPr>
-                </a:tc>
-                <a:tc>
-                  <a:txBody>
-                    <a:bodyPr wrap="square"/>
-                    <a:lstStyle/>
-                    <a:p>
-                      <a:r>
-                        <a:rPr sz="1200">
-                          <a:solidFill>
-                            <a:srgbClr val="38424E"/>
-                          </a:solidFill>
-                          <a:latin typeface="Arial"/>
-                        </a:rPr>
-                        <a:t>aggregate layers and heads</a:t>
-                      </a:r>
-                    </a:p>
-                  </a:txBody>
-                  <a:tcPr marL="73152" marR="73152" marT="45720" marB="45720">
-                    <a:solidFill>
-                      <a:srgbClr val="F7F9FB"/>
-                    </a:solidFill>
-                  </a:tcPr>
-                </a:tc>
-                <a:tc>
-                  <a:txBody>
-                    <a:bodyPr wrap="square"/>
-                    <a:lstStyle/>
-                    <a:p>
-                      <a:r>
-                        <a:rPr sz="1200">
-                          <a:solidFill>
-                            <a:srgbClr val="38424E"/>
-                          </a:solidFill>
-                          <a:latin typeface="Arial"/>
-                        </a:rPr>
-                        <a:t>mean over l and h. This is the step that makes selection sequence-level</a:t>
-                      </a:r>
-                    </a:p>
-                  </a:txBody>
-                  <a:tcPr marL="73152" marR="73152" marT="45720" marB="45720">
-                    <a:solidFill>
-                      <a:srgbClr val="F7F9FB"/>
-                    </a:solidFill>
-                  </a:tcPr>
-                </a:tc>
-                <a:tc>
-                  <a:txBody>
-                    <a:bodyPr wrap="square"/>
-                    <a:lstStyle/>
-                    <a:p>
-                      <a:r>
-                        <a:rPr sz="1200">
-                          <a:solidFill>
-                            <a:srgbClr val="38424E"/>
-                          </a:solidFill>
-                          <a:latin typeface="Arial"/>
-                        </a:rPr>
-                        <a:t>one score per position, length N</a:t>
-                      </a:r>
-                    </a:p>
-                  </a:txBody>
-                  <a:tcPr marL="73152" marR="73152" marT="45720" marB="45720">
-                    <a:solidFill>
-                      <a:srgbClr val="F7F9FB"/>
-                    </a:solidFill>
-                  </a:tcPr>
-                </a:tc>
-                <a:tc>
-                  <a:txBody>
-                    <a:bodyPr wrap="square"/>
-                    <a:lstStyle/>
-                    <a:p>
-                      <a:r>
-                        <a:rPr sz="1200">
-                          <a:solidFill>
-                            <a:srgbClr val="38424E"/>
-                          </a:solidFill>
-                          <a:latin typeface="Arial"/>
-                        </a:rPr>
-                        <a:t>2</a:t>
-                      </a:r>
-                    </a:p>
-                  </a:txBody>
-                  <a:tcPr marL="73152" marR="73152" marT="45720" marB="45720">
-                    <a:solidFill>
-                      <a:srgbClr val="F7F9FB"/>
-                    </a:solidFill>
-                  </a:tcPr>
-                </a:tc>
-              </a:tr>
-              <a:tr h="457200">
-                <a:tc>
-                  <a:txBody>
-                    <a:bodyPr wrap="square"/>
-                    <a:lstStyle/>
-                    <a:p>
-                      <a:r>
-                        <a:rPr sz="1200">
-                          <a:solidFill>
-                            <a:srgbClr val="38424E"/>
-                          </a:solidFill>
-                          <a:latin typeface="Arial"/>
-                        </a:rPr>
-                        <a:t>e</a:t>
-                      </a:r>
-                    </a:p>
-                  </a:txBody>
-                  <a:tcPr marL="73152" marR="73152" marT="45720" marB="45720">
-                    <a:solidFill>
-                      <a:srgbClr val="FFFFFF"/>
-                    </a:solidFill>
-                  </a:tcPr>
-                </a:tc>
-                <a:tc>
-                  <a:txBody>
-                    <a:bodyPr wrap="square"/>
-                    <a:lstStyle/>
-                    <a:p>
-                      <a:r>
-                        <a:rPr sz="1200">
-                          <a:solidFill>
-                            <a:srgbClr val="38424E"/>
-                          </a:solidFill>
-                          <a:latin typeface="Arial"/>
-                        </a:rPr>
-                        <a:t>max-pool, kernel 7</a:t>
-                      </a:r>
-                    </a:p>
-                  </a:txBody>
-                  <a:tcPr marL="73152" marR="73152" marT="45720" marB="45720">
-                    <a:solidFill>
-                      <a:srgbClr val="FFFFFF"/>
-                    </a:solidFill>
-                  </a:tcPr>
-                </a:tc>
-                <a:tc>
-                  <a:txBody>
-                    <a:bodyPr wrap="square"/>
-                    <a:lstStyle/>
-                    <a:p>
-                      <a:r>
-                        <a:rPr sz="1200">
-                          <a:solidFill>
-                            <a:srgbClr val="38424E"/>
-                          </a:solidFill>
-                          <a:latin typeface="Arial"/>
-                        </a:rPr>
-                        <a:t>each position takes the max of its 7-wide neighbourhood, so clusters survive and isolated spikes do not</a:t>
-                      </a:r>
-                    </a:p>
-                  </a:txBody>
-                  <a:tcPr marL="73152" marR="73152" marT="45720" marB="45720">
-                    <a:solidFill>
-                      <a:srgbClr val="FFFFFF"/>
-                    </a:solidFill>
-                  </a:tcPr>
-                </a:tc>
-                <a:tc>
-                  <a:txBody>
-                    <a:bodyPr wrap="square"/>
-                    <a:lstStyle/>
-                    <a:p>
-                      <a:r>
-                        <a:rPr sz="1200">
-                          <a:solidFill>
-                            <a:srgbClr val="38424E"/>
-                          </a:solidFill>
-                          <a:latin typeface="Arial"/>
-                        </a:rPr>
-                        <a:t>smoothed score, length N</a:t>
-                      </a:r>
-                    </a:p>
-                  </a:txBody>
-                  <a:tcPr marL="73152" marR="73152" marT="45720" marB="45720">
-                    <a:solidFill>
-                      <a:srgbClr val="FFFFFF"/>
-                    </a:solidFill>
-                  </a:tcPr>
-                </a:tc>
-                <a:tc>
-                  <a:txBody>
-                    <a:bodyPr wrap="square"/>
-                    <a:lstStyle/>
-                    <a:p>
-                      <a:r>
-                        <a:rPr sz="1200">
-                          <a:solidFill>
-                            <a:srgbClr val="38424E"/>
-                          </a:solidFill>
-                          <a:latin typeface="Arial"/>
-                        </a:rPr>
-                        <a:t>2</a:t>
-                      </a:r>
-                    </a:p>
-                  </a:txBody>
-                  <a:tcPr marL="73152" marR="73152" marT="45720" marB="45720">
-                    <a:solidFill>
-                      <a:srgbClr val="FFFFFF"/>
-                    </a:solidFill>
-                  </a:tcPr>
-                </a:tc>
-              </a:tr>
-              <a:tr h="457200">
-                <a:tc>
-                  <a:txBody>
-                    <a:bodyPr wrap="square"/>
-                    <a:lstStyle/>
-                    <a:p>
-                      <a:r>
-                        <a:rPr sz="1200">
-                          <a:solidFill>
-                            <a:srgbClr val="38424E"/>
-                          </a:solidFill>
-                          <a:latin typeface="Arial"/>
-                        </a:rPr>
-                        <a:t>f</a:t>
-                      </a:r>
-                    </a:p>
-                  </a:txBody>
-                  <a:tcPr marL="73152" marR="73152" marT="45720" marB="45720">
-                    <a:solidFill>
-                      <a:srgbClr val="F7F9FB"/>
-                    </a:solidFill>
-                  </a:tcPr>
-                </a:tc>
-                <a:tc>
-                  <a:txBody>
-                    <a:bodyPr wrap="square"/>
-                    <a:lstStyle/>
-                    <a:p>
-                      <a:r>
-                        <a:rPr sz="1200">
-                          <a:solidFill>
-                            <a:srgbClr val="38424E"/>
-                          </a:solidFill>
-                          <a:latin typeface="Arial"/>
-                        </a:rPr>
-                        <a:t>α-gate</a:t>
-                      </a:r>
-                    </a:p>
-                  </a:txBody>
-                  <a:tcPr marL="73152" marR="73152" marT="45720" marB="45720">
-                    <a:solidFill>
-                      <a:srgbClr val="F7F9FB"/>
-                    </a:solidFill>
-                  </a:tcPr>
-                </a:tc>
-                <a:tc>
-                  <a:txBody>
-                    <a:bodyPr wrap="square"/>
-                    <a:lstStyle/>
-                    <a:p>
-                      <a:r>
-                        <a:rPr sz="1200">
-                          <a:solidFill>
-                            <a:srgbClr val="38424E"/>
-                          </a:solidFill>
-                          <a:latin typeface="Arial"/>
-                        </a:rPr>
-                        <a:t>measures αa, the attention mass outside the recent window, floored at 0.70 and capped at 0.95, then splits the K budget</a:t>
-                      </a:r>
-                    </a:p>
-                  </a:txBody>
-                  <a:tcPr marL="73152" marR="73152" marT="45720" marB="45720">
-                    <a:solidFill>
-                      <a:srgbClr val="F7F9FB"/>
-                    </a:solidFill>
-                  </a:tcPr>
-                </a:tc>
-                <a:tc>
-                  <a:txBody>
-                    <a:bodyPr wrap="square"/>
-                    <a:lstStyle/>
-                    <a:p>
-                      <a:r>
-                        <a:rPr sz="1200">
-                          <a:solidFill>
-                            <a:srgbClr val="38424E"/>
-                          </a:solidFill>
-                          <a:latin typeface="Arial"/>
-                        </a:rPr>
-                        <a:t>n_anchor and n_recent</a:t>
-                      </a:r>
-                    </a:p>
-                  </a:txBody>
-                  <a:tcPr marL="73152" marR="73152" marT="45720" marB="45720">
-                    <a:solidFill>
-                      <a:srgbClr val="F7F9FB"/>
-                    </a:solidFill>
-                  </a:tcPr>
-                </a:tc>
-                <a:tc>
-                  <a:txBody>
-                    <a:bodyPr wrap="square"/>
-                    <a:lstStyle/>
-                    <a:p>
-                      <a:r>
-                        <a:rPr sz="1200">
-                          <a:solidFill>
-                            <a:srgbClr val="38424E"/>
-                          </a:solidFill>
-                          <a:latin typeface="Arial"/>
-                        </a:rPr>
-                        <a:t>2</a:t>
-                      </a:r>
-                    </a:p>
-                  </a:txBody>
-                  <a:tcPr marL="73152" marR="73152" marT="45720" marB="45720">
-                    <a:solidFill>
-                      <a:srgbClr val="F7F9FB"/>
-                    </a:solidFill>
-                  </a:tcPr>
-                </a:tc>
-              </a:tr>
-              <a:tr h="457200">
-                <a:tc>
-                  <a:txBody>
-                    <a:bodyPr wrap="square"/>
-                    <a:lstStyle/>
-                    <a:p>
-                      <a:r>
-                        <a:rPr sz="1200">
-                          <a:solidFill>
-                            <a:srgbClr val="38424E"/>
-                          </a:solidFill>
-                          <a:latin typeface="Arial"/>
-                        </a:rPr>
-                        <a:t>g</a:t>
-                      </a:r>
-                    </a:p>
-                  </a:txBody>
-                  <a:tcPr marL="73152" marR="73152" marT="45720" marB="45720">
-                    <a:solidFill>
-                      <a:srgbClr val="FFFFFF"/>
-                    </a:solidFill>
-                  </a:tcPr>
-                </a:tc>
-                <a:tc>
-                  <a:txBody>
-                    <a:bodyPr wrap="square"/>
-                    <a:lstStyle/>
-                    <a:p>
-                      <a:r>
-                        <a:rPr sz="1200">
-                          <a:solidFill>
-                            <a:srgbClr val="38424E"/>
-                          </a:solidFill>
-                          <a:latin typeface="Arial"/>
-                        </a:rPr>
-                        <a:t>select</a:t>
-                      </a:r>
-                    </a:p>
-                  </a:txBody>
-                  <a:tcPr marL="73152" marR="73152" marT="45720" marB="45720">
-                    <a:solidFill>
-                      <a:srgbClr val="FFFFFF"/>
-                    </a:solidFill>
-                  </a:tcPr>
-                </a:tc>
-                <a:tc>
-                  <a:txBody>
-                    <a:bodyPr wrap="square"/>
-                    <a:lstStyle/>
-                    <a:p>
-                      <a:r>
-                        <a:rPr sz="1200">
-                          <a:solidFill>
-                            <a:srgbClr val="38424E"/>
-                          </a:solidFill>
-                          <a:latin typeface="Arial"/>
-                        </a:rPr>
-                        <a:t>takes the top n_anchor positions by score, plus 4 sink tokens, plus the recent window</a:t>
-                      </a:r>
-                    </a:p>
-                  </a:txBody>
-                  <a:tcPr marL="73152" marR="73152" marT="45720" marB="45720">
-                    <a:solidFill>
-                      <a:srgbClr val="FFFFFF"/>
-                    </a:solidFill>
-                  </a:tcPr>
-                </a:tc>
-                <a:tc>
-                  <a:txBody>
-                    <a:bodyPr wrap="square"/>
-                    <a:lstStyle/>
-                    <a:p>
-                      <a:r>
-                        <a:rPr sz="1200">
-                          <a:solidFill>
-                            <a:srgbClr val="38424E"/>
-                          </a:solidFill>
-                          <a:latin typeface="Arial"/>
-                        </a:rPr>
-                        <a:t>joint keep set, K positions</a:t>
-                      </a:r>
-                    </a:p>
-                  </a:txBody>
-                  <a:tcPr marL="73152" marR="73152" marT="45720" marB="45720">
-                    <a:solidFill>
-                      <a:srgbClr val="FFFFFF"/>
-                    </a:solidFill>
-                  </a:tcPr>
-                </a:tc>
-                <a:tc>
-                  <a:txBody>
-                    <a:bodyPr wrap="square"/>
-                    <a:lstStyle/>
-                    <a:p>
-                      <a:r>
-                        <a:rPr sz="1200">
-                          <a:solidFill>
-                            <a:srgbClr val="38424E"/>
-                          </a:solidFill>
-                          <a:latin typeface="Arial"/>
-                        </a:rPr>
-                        <a:t>2</a:t>
-                      </a:r>
-                    </a:p>
-                  </a:txBody>
-                  <a:tcPr marL="73152" marR="73152" marT="45720" marB="45720">
-                    <a:solidFill>
-                      <a:srgbClr val="FFFFFF"/>
-                    </a:solidFill>
-                  </a:tcPr>
-                </a:tc>
-              </a:tr>
-              <a:tr h="457200">
-                <a:tc>
-                  <a:txBody>
-                    <a:bodyPr wrap="square"/>
-                    <a:lstStyle/>
-                    <a:p>
-                      <a:r>
-                        <a:rPr sz="1200">
-                          <a:solidFill>
-                            <a:srgbClr val="38424E"/>
-                          </a:solidFill>
-                          <a:latin typeface="Arial"/>
-                        </a:rPr>
-                        <a:t>h</a:t>
-                      </a:r>
-                    </a:p>
-                  </a:txBody>
-                  <a:tcPr marL="73152" marR="73152" marT="45720" marB="45720">
-                    <a:solidFill>
-                      <a:srgbClr val="F7F9FB"/>
-                    </a:solidFill>
-                  </a:tcPr>
-                </a:tc>
-                <a:tc>
-                  <a:txBody>
-                    <a:bodyPr wrap="square"/>
-                    <a:lstStyle/>
-                    <a:p>
-                      <a:r>
-                        <a:rPr sz="1200">
-                          <a:solidFill>
-                            <a:srgbClr val="38424E"/>
-                          </a:solidFill>
-                          <a:latin typeface="Arial"/>
-                        </a:rPr>
-                        <a:t>compact in place</a:t>
-                      </a:r>
-                    </a:p>
-                  </a:txBody>
-                  <a:tcPr marL="73152" marR="73152" marT="45720" marB="45720">
-                    <a:solidFill>
-                      <a:srgbClr val="F7F9FB"/>
-                    </a:solidFill>
-                  </a:tcPr>
-                </a:tc>
-                <a:tc>
-                  <a:txBody>
-                    <a:bodyPr wrap="square"/>
-                    <a:lstStyle/>
-                    <a:p>
-                      <a:r>
-                        <a:rPr sz="1200">
-                          <a:solidFill>
-                            <a:srgbClr val="38424E"/>
-                          </a:solidFill>
-                          <a:latin typeface="Arial"/>
-                        </a:rPr>
-                        <a:t>survivors slide into a dense prefix inside the tensors prefill already allocated</a:t>
-                      </a:r>
-                    </a:p>
-                  </a:txBody>
-                  <a:tcPr marL="73152" marR="73152" marT="45720" marB="45720">
-                    <a:solidFill>
-                      <a:srgbClr val="F7F9FB"/>
-                    </a:solidFill>
-                  </a:tcPr>
-                </a:tc>
-                <a:tc>
-                  <a:txBody>
-                    <a:bodyPr wrap="square"/>
-                    <a:lstStyle/>
-                    <a:p>
-                      <a:r>
-                        <a:rPr sz="1200">
-                          <a:solidFill>
-                            <a:srgbClr val="38424E"/>
-                          </a:solidFill>
-                          <a:latin typeface="Arial"/>
-                        </a:rPr>
-                        <a:t>live = K, contiguous</a:t>
-                      </a:r>
-                    </a:p>
-                  </a:txBody>
-                  <a:tcPr marL="73152" marR="73152" marT="45720" marB="45720">
-                    <a:solidFill>
-                      <a:srgbClr val="F7F9FB"/>
-                    </a:solidFill>
-                  </a:tcPr>
-                </a:tc>
-                <a:tc>
-                  <a:txBody>
-                    <a:bodyPr wrap="square"/>
-                    <a:lstStyle/>
-                    <a:p>
-                      <a:r>
-                        <a:rPr sz="1200">
-                          <a:solidFill>
-                            <a:srgbClr val="38424E"/>
-                          </a:solidFill>
-                          <a:latin typeface="Arial"/>
-                        </a:rPr>
-                        <a:t>3</a:t>
+              <a:tr h="341148">
+                <a:tc>
+                  <a:txBody>
+                    <a:bodyPr wrap="square"/>
+                    <a:lstStyle/>
+                    <a:p>
+                      <a:r>
+                        <a:rPr sz="1050" b="0">
+                          <a:solidFill>
+                            <a:srgbClr val="38424E"/>
+                          </a:solidFill>
+                          <a:latin typeface="Arial"/>
+                        </a:rPr>
+                        <a:t>k</a:t>
+                      </a:r>
+                    </a:p>
+                  </a:txBody>
+                  <a:tcPr marL="73152" marR="73152" marT="45720" marB="45720">
+                    <a:solidFill>
+                      <a:srgbClr val="F7F9FB"/>
+                    </a:solidFill>
+                  </a:tcPr>
+                </a:tc>
+                <a:tc>
+                  <a:txBody>
+                    <a:bodyPr wrap="square"/>
+                    <a:lstStyle/>
+                    <a:p>
+                      <a:r>
+                        <a:rPr sz="1050" b="0">
+                          <a:solidFill>
+                            <a:srgbClr val="38424E"/>
+                          </a:solidFill>
+                          <a:latin typeface="Arial"/>
+                        </a:rPr>
+                        <a:t>union across heads</a:t>
+                      </a:r>
+                    </a:p>
+                  </a:txBody>
+                  <a:tcPr marL="73152" marR="73152" marT="45720" marB="45720">
+                    <a:solidFill>
+                      <a:srgbClr val="F7F9FB"/>
+                    </a:solidFill>
+                  </a:tcPr>
+                </a:tc>
+                <a:tc>
+                  <a:txBody>
+                    <a:bodyPr wrap="square"/>
+                    <a:lstStyle/>
+                    <a:p>
+                      <a:r>
+                        <a:rPr sz="1050" b="0">
+                          <a:solidFill>
+                            <a:srgbClr val="38424E"/>
+                          </a:solidFill>
+                          <a:latin typeface="Arial"/>
+                        </a:rPr>
+                        <a:t>a position survives if any head keeps it</a:t>
+                      </a:r>
+                    </a:p>
+                  </a:txBody>
+                  <a:tcPr marL="73152" marR="73152" marT="45720" marB="45720">
+                    <a:solidFill>
+                      <a:srgbClr val="F7F9FB"/>
+                    </a:solidFill>
+                  </a:tcPr>
+                </a:tc>
+                <a:tc>
+                  <a:txBody>
+                    <a:bodyPr wrap="square"/>
+                    <a:lstStyle/>
+                    <a:p>
+                      <a:r>
+                        <a:rPr sz="1050" b="0">
+                          <a:solidFill>
+                            <a:srgbClr val="38424E"/>
+                          </a:solidFill>
+                          <a:latin typeface="Arial"/>
+                        </a:rPr>
+                        <a:t>13 of 16 bins live, cannot compact</a:t>
                       </a:r>
                     </a:p>
                   </a:txBody>
@@ -30616,8 +30777,8 @@
         </p:nvSpPr>
         <p:spPr>
           <a:xfrm>
-            <a:off x="411480" y="5715000"/>
-            <a:ext cx="11384280" cy="822960"/>
+            <a:off x="548640" y="6382512"/>
+            <a:ext cx="10424160" cy="365760"/>
           </a:xfrm>
           <a:prstGeom prst="rect">
             <a:avLst/>
@@ -30636,29 +30797,13 @@
               </a:lnSpc>
             </a:pPr>
             <a:r>
-              <a:rPr sz="1400" b="0">
+              <a:rPr sz="950" b="0">
                 <a:solidFill>
-                  <a:srgbClr val="38424E"/>
+                  <a:srgbClr val="6B7785"/>
                 </a:solidFill>
                 <a:latin typeface="Arial"/>
               </a:rPr>
-              <a:t>Measured instance: on the 9737-token prompt αa came out at 0.71, so K = 1024 is 4 sinks, 721 anchors and 299 recent cells.</a:t>
-            </a:r>
-          </a:p>
-          <a:p>
-            <a:pPr algn="l">
-              <a:lnSpc>
-                <a:spcPct val="115000"/>
-              </a:lnSpc>
-            </a:pPr>
-            <a:r>
-              <a:rPr sz="1400" b="0">
-                <a:solidFill>
-                  <a:srgbClr val="38424E"/>
-                </a:solidFill>
-                <a:latin typeface="Arial"/>
-              </a:rPr>
-              <a:t>A per-head evictor skips stage d. Each head then keeps its own K, the union across heads leaves live ≫ K, and the array cannot compact.</a:t>
+              <a:t>Measured instance: on the 9737-token prompt αa came out at 0.71, so K = 1024 is 4 sinks, 721 anchors and 299 recent cells.  Parts b to d are step 1 of Figure 1, e to h are step 2, i is step 3.</a:t>
             </a:r>
           </a:p>
         </p:txBody>

--- a/muKV_full_deck.pptx
+++ b/muKV_full_deck.pptx
@@ -3450,13 +3450,13 @@
               </a:lnSpc>
             </a:pPr>
             <a:r>
-              <a:rPr sz="2800" b="1">
+              <a:rPr sz="2400" b="1">
                 <a:solidFill>
                   <a:srgbClr val="0C1116"/>
                 </a:solidFill>
                 <a:latin typeface="Arial"/>
               </a:rPr>
-              <a:t>What the papers claim, and what the phone gives back</a:t>
+              <a:t>What each paper claims, and what the phone gives back</a:t>
             </a:r>
           </a:p>
         </p:txBody>
@@ -3544,584 +3544,16 @@
           </a:p>
         </p:txBody>
       </p:sp>
-      <p:graphicFrame>
-        <p:nvGraphicFramePr>
-          <p:cNvPr id="6" name="Table 5"/>
-          <p:cNvGraphicFramePr>
-            <a:graphicFrameLocks noGrp="1"/>
-          </p:cNvGraphicFramePr>
-          <p:nvPr/>
-        </p:nvGraphicFramePr>
-        <p:xfrm>
-          <a:off x="548640" y="1737360"/>
-          <a:ext cx="11064240" cy="2011680"/>
-        </p:xfrm>
-        <a:graphic>
-          <a:graphicData uri="http://schemas.openxmlformats.org/drawingml/2006/table">
-            <a:tbl>
-              <a:tblPr firstRow="1" bandRow="1">
-                <a:tableStyleId>{5C22544A-7EE6-4342-B048-85BDC9FD1C3A}</a:tableStyleId>
-              </a:tblPr>
-              <a:tblGrid>
-                <a:gridCol w="2011680"/>
-                <a:gridCol w="3566160"/>
-                <a:gridCol w="3108960"/>
-                <a:gridCol w="2377440"/>
-              </a:tblGrid>
-              <a:tr h="335280">
-                <a:tc>
-                  <a:txBody>
-                    <a:bodyPr wrap="square"/>
-                    <a:lstStyle/>
-                    <a:p>
-                      <a:r>
-                        <a:rPr sz="1400" b="1">
-                          <a:solidFill>
-                            <a:srgbClr val="0C1116"/>
-                          </a:solidFill>
-                          <a:latin typeface="Arial"/>
-                        </a:rPr>
-                        <a:t>Policy</a:t>
-                      </a:r>
-                    </a:p>
-                  </a:txBody>
-                  <a:tcPr marL="73152" marR="73152" marT="45720" marB="45720">
-                    <a:solidFill>
-                      <a:srgbClr val="EEF1F4"/>
-                    </a:solidFill>
-                  </a:tcPr>
-                </a:tc>
-                <a:tc>
-                  <a:txBody>
-                    <a:bodyPr wrap="square"/>
-                    <a:lstStyle/>
-                    <a:p>
-                      <a:r>
-                        <a:rPr sz="1400" b="1">
-                          <a:solidFill>
-                            <a:srgbClr val="0C1116"/>
-                          </a:solidFill>
-                          <a:latin typeface="Arial"/>
-                        </a:rPr>
-                        <a:t>Its own paper claims</a:t>
-                      </a:r>
-                    </a:p>
-                  </a:txBody>
-                  <a:tcPr marL="73152" marR="73152" marT="45720" marB="45720">
-                    <a:solidFill>
-                      <a:srgbClr val="EEF1F4"/>
-                    </a:solidFill>
-                  </a:tcPr>
-                </a:tc>
-                <a:tc>
-                  <a:txBody>
-                    <a:bodyPr wrap="square"/>
-                    <a:lstStyle/>
-                    <a:p>
-                      <a:r>
-                        <a:rPr sz="1400" b="1">
-                          <a:solidFill>
-                            <a:srgbClr val="0C1116"/>
-                          </a:solidFill>
-                          <a:latin typeface="Arial"/>
-                        </a:rPr>
-                        <a:t>At its own budget on the phone</a:t>
-                      </a:r>
-                    </a:p>
-                  </a:txBody>
-                  <a:tcPr marL="73152" marR="73152" marT="45720" marB="45720">
-                    <a:solidFill>
-                      <a:srgbClr val="EEF1F4"/>
-                    </a:solidFill>
-                  </a:tcPr>
-                </a:tc>
-                <a:tc>
-                  <a:txBody>
-                    <a:bodyPr wrap="square"/>
-                    <a:lstStyle/>
-                    <a:p>
-                      <a:r>
-                        <a:rPr sz="1400" b="1">
-                          <a:solidFill>
-                            <a:srgbClr val="0C1116"/>
-                          </a:solidFill>
-                          <a:latin typeface="Arial"/>
-                        </a:rPr>
-                        <a:t>Cache actually kept</a:t>
-                      </a:r>
-                    </a:p>
-                  </a:txBody>
-                  <a:tcPr marL="73152" marR="73152" marT="45720" marB="45720">
-                    <a:solidFill>
-                      <a:srgbClr val="EEF1F4"/>
-                    </a:solidFill>
-                  </a:tcPr>
-                </a:tc>
-              </a:tr>
-              <a:tr h="335280">
-                <a:tc>
-                  <a:txBody>
-                    <a:bodyPr wrap="square"/>
-                    <a:lstStyle/>
-                    <a:p>
-                      <a:r>
-                        <a:rPr sz="1400" b="0">
-                          <a:solidFill>
-                            <a:srgbClr val="38424E"/>
-                          </a:solidFill>
-                          <a:latin typeface="Arial"/>
-                        </a:rPr>
-                        <a:t>SnapKV</a:t>
-                      </a:r>
-                    </a:p>
-                  </a:txBody>
-                  <a:tcPr marL="73152" marR="73152" marT="45720" marB="45720">
-                    <a:solidFill>
-                      <a:srgbClr val="FFFFFF"/>
-                    </a:solidFill>
-                  </a:tcPr>
-                </a:tc>
-                <a:tc>
-                  <a:txBody>
-                    <a:bodyPr wrap="square"/>
-                    <a:lstStyle/>
-                    <a:p>
-                      <a:r>
-                        <a:rPr sz="1400" b="0">
-                          <a:solidFill>
-                            <a:srgbClr val="38424E"/>
-                          </a:solidFill>
-                          <a:latin typeface="Arial"/>
-                        </a:rPr>
-                        <a:t>8.2x smaller cache at 16K</a:t>
-                      </a:r>
-                    </a:p>
-                  </a:txBody>
-                  <a:tcPr marL="73152" marR="73152" marT="45720" marB="45720">
-                    <a:solidFill>
-                      <a:srgbClr val="FFFFFF"/>
-                    </a:solidFill>
-                  </a:tcPr>
-                </a:tc>
-                <a:tc>
-                  <a:txBody>
-                    <a:bodyPr wrap="square"/>
-                    <a:lstStyle/>
-                    <a:p>
-                      <a:r>
-                        <a:rPr sz="1400" b="0">
-                          <a:solidFill>
-                            <a:srgbClr val="38424E"/>
-                          </a:solidFill>
-                          <a:latin typeface="Arial"/>
-                        </a:rPr>
-                        <a:t>2048 per head</a:t>
-                      </a:r>
-                    </a:p>
-                  </a:txBody>
-                  <a:tcPr marL="73152" marR="73152" marT="45720" marB="45720">
-                    <a:solidFill>
-                      <a:srgbClr val="FFFFFF"/>
-                    </a:solidFill>
-                  </a:tcPr>
-                </a:tc>
-                <a:tc>
-                  <a:txBody>
-                    <a:bodyPr wrap="square"/>
-                    <a:lstStyle/>
-                    <a:p>
-                      <a:r>
-                        <a:rPr sz="1400" b="0">
-                          <a:solidFill>
-                            <a:srgbClr val="38424E"/>
-                          </a:solidFill>
-                          <a:latin typeface="Arial"/>
-                        </a:rPr>
-                        <a:t>94%</a:t>
-                      </a:r>
-                    </a:p>
-                  </a:txBody>
-                  <a:tcPr marL="73152" marR="73152" marT="45720" marB="45720">
-                    <a:solidFill>
-                      <a:srgbClr val="FFFFFF"/>
-                    </a:solidFill>
-                  </a:tcPr>
-                </a:tc>
-              </a:tr>
-              <a:tr h="335280">
-                <a:tc>
-                  <a:txBody>
-                    <a:bodyPr wrap="square"/>
-                    <a:lstStyle/>
-                    <a:p>
-                      <a:r>
-                        <a:rPr sz="1400" b="0">
-                          <a:solidFill>
-                            <a:srgbClr val="38424E"/>
-                          </a:solidFill>
-                          <a:latin typeface="Arial"/>
-                        </a:rPr>
-                        <a:t>H2O</a:t>
-                      </a:r>
-                    </a:p>
-                  </a:txBody>
-                  <a:tcPr marL="73152" marR="73152" marT="45720" marB="45720">
-                    <a:solidFill>
-                      <a:srgbClr val="F7F9FB"/>
-                    </a:solidFill>
-                  </a:tcPr>
-                </a:tc>
-                <a:tc>
-                  <a:txBody>
-                    <a:bodyPr wrap="square"/>
-                    <a:lstStyle/>
-                    <a:p>
-                      <a:r>
-                        <a:rPr sz="1400" b="0">
-                          <a:solidFill>
-                            <a:srgbClr val="38424E"/>
-                          </a:solidFill>
-                          <a:latin typeface="Arial"/>
-                        </a:rPr>
-                        <a:t>5 to 10x at a 20% budget</a:t>
-                      </a:r>
-                    </a:p>
-                  </a:txBody>
-                  <a:tcPr marL="73152" marR="73152" marT="45720" marB="45720">
-                    <a:solidFill>
-                      <a:srgbClr val="F7F9FB"/>
-                    </a:solidFill>
-                  </a:tcPr>
-                </a:tc>
-                <a:tc>
-                  <a:txBody>
-                    <a:bodyPr wrap="square"/>
-                    <a:lstStyle/>
-                    <a:p>
-                      <a:r>
-                        <a:rPr sz="1400" b="0">
-                          <a:solidFill>
-                            <a:srgbClr val="38424E"/>
-                          </a:solidFill>
-                          <a:latin typeface="Arial"/>
-                        </a:rPr>
-                        <a:t>20% of the prompt</a:t>
-                      </a:r>
-                    </a:p>
-                  </a:txBody>
-                  <a:tcPr marL="73152" marR="73152" marT="45720" marB="45720">
-                    <a:solidFill>
-                      <a:srgbClr val="F7F9FB"/>
-                    </a:solidFill>
-                  </a:tcPr>
-                </a:tc>
-                <a:tc>
-                  <a:txBody>
-                    <a:bodyPr wrap="square"/>
-                    <a:lstStyle/>
-                    <a:p>
-                      <a:r>
-                        <a:rPr sz="1400" b="0">
-                          <a:solidFill>
-                            <a:srgbClr val="38424E"/>
-                          </a:solidFill>
-                          <a:latin typeface="Arial"/>
-                        </a:rPr>
-                        <a:t>92%</a:t>
-                      </a:r>
-                    </a:p>
-                  </a:txBody>
-                  <a:tcPr marL="73152" marR="73152" marT="45720" marB="45720">
-                    <a:solidFill>
-                      <a:srgbClr val="F7F9FB"/>
-                    </a:solidFill>
-                  </a:tcPr>
-                </a:tc>
-              </a:tr>
-              <a:tr h="335280">
-                <a:tc>
-                  <a:txBody>
-                    <a:bodyPr wrap="square"/>
-                    <a:lstStyle/>
-                    <a:p>
-                      <a:r>
-                        <a:rPr sz="1400" b="0">
-                          <a:solidFill>
-                            <a:srgbClr val="38424E"/>
-                          </a:solidFill>
-                          <a:latin typeface="Arial"/>
-                        </a:rPr>
-                        <a:t>TOVA</a:t>
-                      </a:r>
-                    </a:p>
-                  </a:txBody>
-                  <a:tcPr marL="73152" marR="73152" marT="45720" marB="45720">
-                    <a:solidFill>
-                      <a:srgbClr val="FFFFFF"/>
-                    </a:solidFill>
-                  </a:tcPr>
-                </a:tc>
-                <a:tc>
-                  <a:txBody>
-                    <a:bodyPr wrap="square"/>
-                    <a:lstStyle/>
-                    <a:p>
-                      <a:r>
-                        <a:rPr sz="1400" b="0">
-                          <a:solidFill>
-                            <a:srgbClr val="38424E"/>
-                          </a:solidFill>
-                          <a:latin typeface="Arial"/>
-                        </a:rPr>
-                        <a:t>per-layer budget</a:t>
-                      </a:r>
-                    </a:p>
-                  </a:txBody>
-                  <a:tcPr marL="73152" marR="73152" marT="45720" marB="45720">
-                    <a:solidFill>
-                      <a:srgbClr val="FFFFFF"/>
-                    </a:solidFill>
-                  </a:tcPr>
-                </a:tc>
-                <a:tc>
-                  <a:txBody>
-                    <a:bodyPr wrap="square"/>
-                    <a:lstStyle/>
-                    <a:p>
-                      <a:r>
-                        <a:rPr sz="1400" b="0">
-                          <a:solidFill>
-                            <a:srgbClr val="38424E"/>
-                          </a:solidFill>
-                          <a:latin typeface="Arial"/>
-                        </a:rPr>
-                        <a:t>2048 per layer</a:t>
-                      </a:r>
-                    </a:p>
-                  </a:txBody>
-                  <a:tcPr marL="73152" marR="73152" marT="45720" marB="45720">
-                    <a:solidFill>
-                      <a:srgbClr val="FFFFFF"/>
-                    </a:solidFill>
-                  </a:tcPr>
-                </a:tc>
-                <a:tc>
-                  <a:txBody>
-                    <a:bodyPr wrap="square"/>
-                    <a:lstStyle/>
-                    <a:p>
-                      <a:r>
-                        <a:rPr sz="1400" b="0">
-                          <a:solidFill>
-                            <a:srgbClr val="38424E"/>
-                          </a:solidFill>
-                          <a:latin typeface="Arial"/>
-                        </a:rPr>
-                        <a:t>77%</a:t>
-                      </a:r>
-                    </a:p>
-                  </a:txBody>
-                  <a:tcPr marL="73152" marR="73152" marT="45720" marB="45720">
-                    <a:solidFill>
-                      <a:srgbClr val="FFFFFF"/>
-                    </a:solidFill>
-                  </a:tcPr>
-                </a:tc>
-              </a:tr>
-              <a:tr h="335280">
-                <a:tc>
-                  <a:txBody>
-                    <a:bodyPr wrap="square"/>
-                    <a:lstStyle/>
-                    <a:p>
-                      <a:r>
-                        <a:rPr sz="1400" b="0">
-                          <a:solidFill>
-                            <a:srgbClr val="38424E"/>
-                          </a:solidFill>
-                          <a:latin typeface="Arial"/>
-                        </a:rPr>
-                        <a:t>Ada-KV</a:t>
-                      </a:r>
-                    </a:p>
-                  </a:txBody>
-                  <a:tcPr marL="73152" marR="73152" marT="45720" marB="45720">
-                    <a:solidFill>
-                      <a:srgbClr val="F7F9FB"/>
-                    </a:solidFill>
-                  </a:tcPr>
-                </a:tc>
-                <a:tc>
-                  <a:txBody>
-                    <a:bodyPr wrap="square"/>
-                    <a:lstStyle/>
-                    <a:p>
-                      <a:r>
-                        <a:rPr sz="1400" b="0">
-                          <a:solidFill>
-                            <a:srgbClr val="38424E"/>
-                          </a:solidFill>
-                          <a:latin typeface="Arial"/>
-                        </a:rPr>
-                        <a:t>adaptive per-head budget</a:t>
-                      </a:r>
-                    </a:p>
-                  </a:txBody>
-                  <a:tcPr marL="73152" marR="73152" marT="45720" marB="45720">
-                    <a:solidFill>
-                      <a:srgbClr val="F7F9FB"/>
-                    </a:solidFill>
-                  </a:tcPr>
-                </a:tc>
-                <a:tc>
-                  <a:txBody>
-                    <a:bodyPr wrap="square"/>
-                    <a:lstStyle/>
-                    <a:p>
-                      <a:r>
-                        <a:rPr sz="1400" b="0">
-                          <a:solidFill>
-                            <a:srgbClr val="38424E"/>
-                          </a:solidFill>
-                          <a:latin typeface="Arial"/>
-                        </a:rPr>
-                        <a:t>2048</a:t>
-                      </a:r>
-                    </a:p>
-                  </a:txBody>
-                  <a:tcPr marL="73152" marR="73152" marT="45720" marB="45720">
-                    <a:solidFill>
-                      <a:srgbClr val="F7F9FB"/>
-                    </a:solidFill>
-                  </a:tcPr>
-                </a:tc>
-                <a:tc>
-                  <a:txBody>
-                    <a:bodyPr wrap="square"/>
-                    <a:lstStyle/>
-                    <a:p>
-                      <a:r>
-                        <a:rPr sz="1400" b="0">
-                          <a:solidFill>
-                            <a:srgbClr val="38424E"/>
-                          </a:solidFill>
-                          <a:latin typeface="Arial"/>
-                        </a:rPr>
-                        <a:t>71%</a:t>
-                      </a:r>
-                    </a:p>
-                  </a:txBody>
-                  <a:tcPr marL="73152" marR="73152" marT="45720" marB="45720">
-                    <a:solidFill>
-                      <a:srgbClr val="F7F9FB"/>
-                    </a:solidFill>
-                  </a:tcPr>
-                </a:tc>
-              </a:tr>
-              <a:tr h="335280">
-                <a:tc>
-                  <a:txBody>
-                    <a:bodyPr wrap="square"/>
-                    <a:lstStyle/>
-                    <a:p>
-                      <a:r>
-                        <a:rPr sz="1400" b="1">
-                          <a:solidFill>
-                            <a:srgbClr val="0C1116"/>
-                          </a:solidFill>
-                          <a:latin typeface="Arial"/>
-                        </a:rPr>
-                        <a:t>μKV</a:t>
-                      </a:r>
-                    </a:p>
-                  </a:txBody>
-                  <a:tcPr marL="73152" marR="73152" marT="45720" marB="45720">
-                    <a:solidFill>
-                      <a:srgbClr val="FFFFFF"/>
-                    </a:solidFill>
-                  </a:tcPr>
-                </a:tc>
-                <a:tc>
-                  <a:txBody>
-                    <a:bodyPr wrap="square"/>
-                    <a:lstStyle/>
-                    <a:p>
-                      <a:r>
-                        <a:rPr sz="1400" b="1">
-                          <a:solidFill>
-                            <a:srgbClr val="0C1116"/>
-                          </a:solidFill>
-                          <a:latin typeface="Arial"/>
-                        </a:rPr>
-                        <a:t>this work</a:t>
-                      </a:r>
-                    </a:p>
-                  </a:txBody>
-                  <a:tcPr marL="73152" marR="73152" marT="45720" marB="45720">
-                    <a:solidFill>
-                      <a:srgbClr val="FFFFFF"/>
-                    </a:solidFill>
-                  </a:tcPr>
-                </a:tc>
-                <a:tc>
-                  <a:txBody>
-                    <a:bodyPr wrap="square"/>
-                    <a:lstStyle/>
-                    <a:p>
-                      <a:r>
-                        <a:rPr sz="1400" b="1">
-                          <a:solidFill>
-                            <a:srgbClr val="0C1116"/>
-                          </a:solidFill>
-                          <a:latin typeface="Arial"/>
-                        </a:rPr>
-                        <a:t>1024, sequence-level</a:t>
-                      </a:r>
-                    </a:p>
-                  </a:txBody>
-                  <a:tcPr marL="73152" marR="73152" marT="45720" marB="45720">
-                    <a:solidFill>
-                      <a:srgbClr val="FFFFFF"/>
-                    </a:solidFill>
-                  </a:tcPr>
-                </a:tc>
-                <a:tc>
-                  <a:txBody>
-                    <a:bodyPr wrap="square"/>
-                    <a:lstStyle/>
-                    <a:p>
-                      <a:r>
-                        <a:rPr sz="1400" b="1">
-                          <a:solidFill>
-                            <a:srgbClr val="0C1116"/>
-                          </a:solidFill>
-                          <a:latin typeface="Arial"/>
-                        </a:rPr>
-                        <a:t>14%</a:t>
-                      </a:r>
-                    </a:p>
-                  </a:txBody>
-                  <a:tcPr marL="73152" marR="73152" marT="45720" marB="45720">
-                    <a:solidFill>
-                      <a:srgbClr val="FFFFFF"/>
-                    </a:solidFill>
-                  </a:tcPr>
-                </a:tc>
-              </a:tr>
-            </a:tbl>
-          </a:graphicData>
-        </a:graphic>
-      </p:graphicFrame>
       <p:sp>
         <p:nvSpPr>
-          <p:cNvPr id="7" name="TextBox 6"/>
+          <p:cNvPr id="6" name="TextBox 5"/>
           <p:cNvSpPr txBox="1"/>
           <p:nvPr/>
         </p:nvSpPr>
         <p:spPr>
           <a:xfrm>
-            <a:off x="548640" y="4023360"/>
-            <a:ext cx="11064240" cy="1828800"/>
+            <a:off x="548640" y="1417320"/>
+            <a:ext cx="11064240" cy="365760"/>
           </a:xfrm>
           <a:prstGeom prst="rect">
             <a:avLst/>
@@ -4140,13 +3572,710 @@
               </a:lnSpc>
             </a:pPr>
             <a:r>
-              <a:rPr sz="1700" b="0">
+              <a:rPr sz="1400" b="0">
+                <a:solidFill>
+                  <a:srgbClr val="6B7785"/>
+                </a:solidFill>
+                <a:latin typeface="Arial"/>
+              </a:rPr>
+              <a:t>Phone CPU, Llama-3.2-1B, 110 LongBench prompts, mean 8043 tokens. Every baseline at its own published budget, not ours.</a:t>
+            </a:r>
+          </a:p>
+        </p:txBody>
+      </p:sp>
+      <p:graphicFrame>
+        <p:nvGraphicFramePr>
+          <p:cNvPr id="7" name="Table 6"/>
+          <p:cNvGraphicFramePr>
+            <a:graphicFrameLocks noGrp="1"/>
+          </p:cNvGraphicFramePr>
+          <p:nvPr/>
+        </p:nvGraphicFramePr>
+        <p:xfrm>
+          <a:off x="548640" y="1828800"/>
+          <a:ext cx="11064240" cy="2468880"/>
+        </p:xfrm>
+        <a:graphic>
+          <a:graphicData uri="http://schemas.openxmlformats.org/drawingml/2006/table">
+            <a:tbl>
+              <a:tblPr firstRow="1" bandRow="1">
+                <a:tableStyleId>{5C22544A-7EE6-4342-B048-85BDC9FD1C3A}</a:tableStyleId>
+              </a:tblPr>
+              <a:tblGrid>
+                <a:gridCol w="1737360"/>
+                <a:gridCol w="4206240"/>
+                <a:gridCol w="3566160"/>
+                <a:gridCol w="1554480"/>
+              </a:tblGrid>
+              <a:tr h="352697">
+                <a:tc>
+                  <a:txBody>
+                    <a:bodyPr wrap="square"/>
+                    <a:lstStyle/>
+                    <a:p>
+                      <a:r>
+                        <a:rPr sz="1300" b="1">
+                          <a:solidFill>
+                            <a:srgbClr val="0C1116"/>
+                          </a:solidFill>
+                          <a:latin typeface="Arial"/>
+                        </a:rPr>
+                        <a:t>Policy</a:t>
+                      </a:r>
+                    </a:p>
+                  </a:txBody>
+                  <a:tcPr marL="73152" marR="73152" marT="45720" marB="45720">
+                    <a:solidFill>
+                      <a:srgbClr val="EEF1F4"/>
+                    </a:solidFill>
+                  </a:tcPr>
+                </a:tc>
+                <a:tc>
+                  <a:txBody>
+                    <a:bodyPr wrap="square"/>
+                    <a:lstStyle/>
+                    <a:p>
+                      <a:r>
+                        <a:rPr sz="1300" b="1">
+                          <a:solidFill>
+                            <a:srgbClr val="0C1116"/>
+                          </a:solidFill>
+                          <a:latin typeface="Arial"/>
+                        </a:rPr>
+                        <a:t>What its own paper claims</a:t>
+                      </a:r>
+                    </a:p>
+                  </a:txBody>
+                  <a:tcPr marL="73152" marR="73152" marT="45720" marB="45720">
+                    <a:solidFill>
+                      <a:srgbClr val="EEF1F4"/>
+                    </a:solidFill>
+                  </a:tcPr>
+                </a:tc>
+                <a:tc>
+                  <a:txBody>
+                    <a:bodyPr wrap="square"/>
+                    <a:lstStyle/>
+                    <a:p>
+                      <a:r>
+                        <a:rPr sz="1300" b="1">
+                          <a:solidFill>
+                            <a:srgbClr val="0C1116"/>
+                          </a:solidFill>
+                          <a:latin typeface="Arial"/>
+                        </a:rPr>
+                        <a:t>Its own budget, as we ran it</a:t>
+                      </a:r>
+                    </a:p>
+                  </a:txBody>
+                  <a:tcPr marL="73152" marR="73152" marT="45720" marB="45720">
+                    <a:solidFill>
+                      <a:srgbClr val="EEF1F4"/>
+                    </a:solidFill>
+                  </a:tcPr>
+                </a:tc>
+                <a:tc>
+                  <a:txBody>
+                    <a:bodyPr wrap="square"/>
+                    <a:lstStyle/>
+                    <a:p>
+                      <a:r>
+                        <a:rPr sz="1300" b="1">
+                          <a:solidFill>
+                            <a:srgbClr val="0C1116"/>
+                          </a:solidFill>
+                          <a:latin typeface="Arial"/>
+                        </a:rPr>
+                        <a:t>Cache kept</a:t>
+                      </a:r>
+                    </a:p>
+                  </a:txBody>
+                  <a:tcPr marL="73152" marR="73152" marT="45720" marB="45720">
+                    <a:solidFill>
+                      <a:srgbClr val="EEF1F4"/>
+                    </a:solidFill>
+                  </a:tcPr>
+                </a:tc>
+              </a:tr>
+              <a:tr h="352697">
+                <a:tc>
+                  <a:txBody>
+                    <a:bodyPr wrap="square"/>
+                    <a:lstStyle/>
+                    <a:p>
+                      <a:r>
+                        <a:rPr sz="1300" b="0">
+                          <a:solidFill>
+                            <a:srgbClr val="38424E"/>
+                          </a:solidFill>
+                          <a:latin typeface="Arial"/>
+                        </a:rPr>
+                        <a:t>SnapKV</a:t>
+                      </a:r>
+                    </a:p>
+                  </a:txBody>
+                  <a:tcPr marL="73152" marR="73152" marT="45720" marB="45720">
+                    <a:solidFill>
+                      <a:srgbClr val="FFFFFF"/>
+                    </a:solidFill>
+                  </a:tcPr>
+                </a:tc>
+                <a:tc>
+                  <a:txBody>
+                    <a:bodyPr wrap="square"/>
+                    <a:lstStyle/>
+                    <a:p>
+                      <a:r>
+                        <a:rPr sz="1300" b="0">
+                          <a:solidFill>
+                            <a:srgbClr val="38424E"/>
+                          </a:solidFill>
+                          <a:latin typeface="Arial"/>
+                        </a:rPr>
+                        <a:t>8.2x memory efficiency at 16K inputs</a:t>
+                      </a:r>
+                    </a:p>
+                  </a:txBody>
+                  <a:tcPr marL="73152" marR="73152" marT="45720" marB="45720">
+                    <a:solidFill>
+                      <a:srgbClr val="FFFFFF"/>
+                    </a:solidFill>
+                  </a:tcPr>
+                </a:tc>
+                <a:tc>
+                  <a:txBody>
+                    <a:bodyPr wrap="square"/>
+                    <a:lstStyle/>
+                    <a:p>
+                      <a:r>
+                        <a:rPr sz="1300" b="0">
+                          <a:solidFill>
+                            <a:srgbClr val="38424E"/>
+                          </a:solidFill>
+                          <a:latin typeface="Arial"/>
+                        </a:rPr>
+                        <a:t>2048 per head</a:t>
+                      </a:r>
+                    </a:p>
+                  </a:txBody>
+                  <a:tcPr marL="73152" marR="73152" marT="45720" marB="45720">
+                    <a:solidFill>
+                      <a:srgbClr val="FFFFFF"/>
+                    </a:solidFill>
+                  </a:tcPr>
+                </a:tc>
+                <a:tc>
+                  <a:txBody>
+                    <a:bodyPr wrap="square"/>
+                    <a:lstStyle/>
+                    <a:p>
+                      <a:r>
+                        <a:rPr sz="1300" b="0">
+                          <a:solidFill>
+                            <a:srgbClr val="38424E"/>
+                          </a:solidFill>
+                          <a:latin typeface="Arial"/>
+                        </a:rPr>
+                        <a:t>94%</a:t>
+                      </a:r>
+                    </a:p>
+                  </a:txBody>
+                  <a:tcPr marL="73152" marR="73152" marT="45720" marB="45720">
+                    <a:solidFill>
+                      <a:srgbClr val="FFFFFF"/>
+                    </a:solidFill>
+                  </a:tcPr>
+                </a:tc>
+              </a:tr>
+              <a:tr h="352697">
+                <a:tc>
+                  <a:txBody>
+                    <a:bodyPr wrap="square"/>
+                    <a:lstStyle/>
+                    <a:p>
+                      <a:r>
+                        <a:rPr sz="1300" b="0">
+                          <a:solidFill>
+                            <a:srgbClr val="38424E"/>
+                          </a:solidFill>
+                          <a:latin typeface="Arial"/>
+                        </a:rPr>
+                        <a:t>H2O</a:t>
+                      </a:r>
+                    </a:p>
+                  </a:txBody>
+                  <a:tcPr marL="73152" marR="73152" marT="45720" marB="45720">
+                    <a:solidFill>
+                      <a:srgbClr val="F7F9FB"/>
+                    </a:solidFill>
+                  </a:tcPr>
+                </a:tc>
+                <a:tc>
+                  <a:txBody>
+                    <a:bodyPr wrap="square"/>
+                    <a:lstStyle/>
+                    <a:p>
+                      <a:r>
+                        <a:rPr sz="1300" b="0">
+                          <a:solidFill>
+                            <a:srgbClr val="38424E"/>
+                          </a:solidFill>
+                          <a:latin typeface="Arial"/>
+                        </a:rPr>
+                        <a:t>5 to 10x smaller KV cache</a:t>
+                      </a:r>
+                    </a:p>
+                  </a:txBody>
+                  <a:tcPr marL="73152" marR="73152" marT="45720" marB="45720">
+                    <a:solidFill>
+                      <a:srgbClr val="F7F9FB"/>
+                    </a:solidFill>
+                  </a:tcPr>
+                </a:tc>
+                <a:tc>
+                  <a:txBody>
+                    <a:bodyPr wrap="square"/>
+                    <a:lstStyle/>
+                    <a:p>
+                      <a:r>
+                        <a:rPr sz="1300" b="0">
+                          <a:solidFill>
+                            <a:srgbClr val="38424E"/>
+                          </a:solidFill>
+                          <a:latin typeface="Arial"/>
+                        </a:rPr>
+                        <a:t>20% of the prompt</a:t>
+                      </a:r>
+                    </a:p>
+                  </a:txBody>
+                  <a:tcPr marL="73152" marR="73152" marT="45720" marB="45720">
+                    <a:solidFill>
+                      <a:srgbClr val="F7F9FB"/>
+                    </a:solidFill>
+                  </a:tcPr>
+                </a:tc>
+                <a:tc>
+                  <a:txBody>
+                    <a:bodyPr wrap="square"/>
+                    <a:lstStyle/>
+                    <a:p>
+                      <a:r>
+                        <a:rPr sz="1300" b="0">
+                          <a:solidFill>
+                            <a:srgbClr val="38424E"/>
+                          </a:solidFill>
+                          <a:latin typeface="Arial"/>
+                        </a:rPr>
+                        <a:t>92%</a:t>
+                      </a:r>
+                    </a:p>
+                  </a:txBody>
+                  <a:tcPr marL="73152" marR="73152" marT="45720" marB="45720">
+                    <a:solidFill>
+                      <a:srgbClr val="F7F9FB"/>
+                    </a:solidFill>
+                  </a:tcPr>
+                </a:tc>
+              </a:tr>
+              <a:tr h="352697">
+                <a:tc>
+                  <a:txBody>
+                    <a:bodyPr wrap="square"/>
+                    <a:lstStyle/>
+                    <a:p>
+                      <a:r>
+                        <a:rPr sz="1300" b="0">
+                          <a:solidFill>
+                            <a:srgbClr val="38424E"/>
+                          </a:solidFill>
+                          <a:latin typeface="Arial"/>
+                        </a:rPr>
+                        <a:t>TOVA</a:t>
+                      </a:r>
+                    </a:p>
+                  </a:txBody>
+                  <a:tcPr marL="73152" marR="73152" marT="45720" marB="45720">
+                    <a:solidFill>
+                      <a:srgbClr val="FFFFFF"/>
+                    </a:solidFill>
+                  </a:tcPr>
+                </a:tc>
+                <a:tc>
+                  <a:txBody>
+                    <a:bodyPr wrap="square"/>
+                    <a:lstStyle/>
+                    <a:p>
+                      <a:r>
+                        <a:rPr sz="1300" b="0">
+                          <a:solidFill>
+                            <a:srgbClr val="38424E"/>
+                          </a:solidFill>
+                          <a:latin typeface="Arial"/>
+                        </a:rPr>
+                        <a:t>full quality at 1/8 of the cache</a:t>
+                      </a:r>
+                    </a:p>
+                  </a:txBody>
+                  <a:tcPr marL="73152" marR="73152" marT="45720" marB="45720">
+                    <a:solidFill>
+                      <a:srgbClr val="FFFFFF"/>
+                    </a:solidFill>
+                  </a:tcPr>
+                </a:tc>
+                <a:tc>
+                  <a:txBody>
+                    <a:bodyPr wrap="square"/>
+                    <a:lstStyle/>
+                    <a:p>
+                      <a:r>
+                        <a:rPr sz="1300" b="0">
+                          <a:solidFill>
+                            <a:srgbClr val="38424E"/>
+                          </a:solidFill>
+                          <a:latin typeface="Arial"/>
+                        </a:rPr>
+                        <a:t>2048 per layer</a:t>
+                      </a:r>
+                    </a:p>
+                  </a:txBody>
+                  <a:tcPr marL="73152" marR="73152" marT="45720" marB="45720">
+                    <a:solidFill>
+                      <a:srgbClr val="FFFFFF"/>
+                    </a:solidFill>
+                  </a:tcPr>
+                </a:tc>
+                <a:tc>
+                  <a:txBody>
+                    <a:bodyPr wrap="square"/>
+                    <a:lstStyle/>
+                    <a:p>
+                      <a:r>
+                        <a:rPr sz="1300" b="0">
+                          <a:solidFill>
+                            <a:srgbClr val="38424E"/>
+                          </a:solidFill>
+                          <a:latin typeface="Arial"/>
+                        </a:rPr>
+                        <a:t>77%</a:t>
+                      </a:r>
+                    </a:p>
+                  </a:txBody>
+                  <a:tcPr marL="73152" marR="73152" marT="45720" marB="45720">
+                    <a:solidFill>
+                      <a:srgbClr val="FFFFFF"/>
+                    </a:solidFill>
+                  </a:tcPr>
+                </a:tc>
+              </a:tr>
+              <a:tr h="352697">
+                <a:tc>
+                  <a:txBody>
+                    <a:bodyPr wrap="square"/>
+                    <a:lstStyle/>
+                    <a:p>
+                      <a:r>
+                        <a:rPr sz="1300" b="0">
+                          <a:solidFill>
+                            <a:srgbClr val="38424E"/>
+                          </a:solidFill>
+                          <a:latin typeface="Arial"/>
+                        </a:rPr>
+                        <a:t>Ada-KV</a:t>
+                      </a:r>
+                    </a:p>
+                  </a:txBody>
+                  <a:tcPr marL="73152" marR="73152" marT="45720" marB="45720">
+                    <a:solidFill>
+                      <a:srgbClr val="F7F9FB"/>
+                    </a:solidFill>
+                  </a:tcPr>
+                </a:tc>
+                <a:tc>
+                  <a:txBody>
+                    <a:bodyPr wrap="square"/>
+                    <a:lstStyle/>
+                    <a:p>
+                      <a:r>
+                        <a:rPr sz="1300" b="0">
+                          <a:solidFill>
+                            <a:srgbClr val="38424E"/>
+                          </a:solidFill>
+                          <a:latin typeface="Arial"/>
+                        </a:rPr>
+                        <a:t>no ratio of its own; it reallocates a given budget</a:t>
+                      </a:r>
+                    </a:p>
+                  </a:txBody>
+                  <a:tcPr marL="73152" marR="73152" marT="45720" marB="45720">
+                    <a:solidFill>
+                      <a:srgbClr val="F7F9FB"/>
+                    </a:solidFill>
+                  </a:tcPr>
+                </a:tc>
+                <a:tc>
+                  <a:txBody>
+                    <a:bodyPr wrap="square"/>
+                    <a:lstStyle/>
+                    <a:p>
+                      <a:r>
+                        <a:rPr sz="1300" b="0">
+                          <a:solidFill>
+                            <a:srgbClr val="38424E"/>
+                          </a:solidFill>
+                          <a:latin typeface="Arial"/>
+                        </a:rPr>
+                        <a:t>2048 per head, reallocated across heads</a:t>
+                      </a:r>
+                    </a:p>
+                  </a:txBody>
+                  <a:tcPr marL="73152" marR="73152" marT="45720" marB="45720">
+                    <a:solidFill>
+                      <a:srgbClr val="F7F9FB"/>
+                    </a:solidFill>
+                  </a:tcPr>
+                </a:tc>
+                <a:tc>
+                  <a:txBody>
+                    <a:bodyPr wrap="square"/>
+                    <a:lstStyle/>
+                    <a:p>
+                      <a:r>
+                        <a:rPr sz="1300" b="0">
+                          <a:solidFill>
+                            <a:srgbClr val="38424E"/>
+                          </a:solidFill>
+                          <a:latin typeface="Arial"/>
+                        </a:rPr>
+                        <a:t>71%</a:t>
+                      </a:r>
+                    </a:p>
+                  </a:txBody>
+                  <a:tcPr marL="73152" marR="73152" marT="45720" marB="45720">
+                    <a:solidFill>
+                      <a:srgbClr val="F7F9FB"/>
+                    </a:solidFill>
+                  </a:tcPr>
+                </a:tc>
+              </a:tr>
+              <a:tr h="352697">
+                <a:tc>
+                  <a:txBody>
+                    <a:bodyPr wrap="square"/>
+                    <a:lstStyle/>
+                    <a:p>
+                      <a:r>
+                        <a:rPr sz="1300" b="0">
+                          <a:solidFill>
+                            <a:srgbClr val="38424E"/>
+                          </a:solidFill>
+                          <a:latin typeface="Arial"/>
+                        </a:rPr>
+                        <a:t>StreamingLLM</a:t>
+                      </a:r>
+                    </a:p>
+                  </a:txBody>
+                  <a:tcPr marL="73152" marR="73152" marT="45720" marB="45720">
+                    <a:solidFill>
+                      <a:srgbClr val="FFFFFF"/>
+                    </a:solidFill>
+                  </a:tcPr>
+                </a:tc>
+                <a:tc>
+                  <a:txBody>
+                    <a:bodyPr wrap="square"/>
+                    <a:lstStyle/>
+                    <a:p>
+                      <a:r>
+                        <a:rPr sz="1300" b="0">
+                          <a:solidFill>
+                            <a:srgbClr val="38424E"/>
+                          </a:solidFill>
+                          <a:latin typeface="Arial"/>
+                        </a:rPr>
+                        <a:t>22.2x over sliding-window recompute</a:t>
+                      </a:r>
+                    </a:p>
+                  </a:txBody>
+                  <a:tcPr marL="73152" marR="73152" marT="45720" marB="45720">
+                    <a:solidFill>
+                      <a:srgbClr val="FFFFFF"/>
+                    </a:solidFill>
+                  </a:tcPr>
+                </a:tc>
+                <a:tc>
+                  <a:txBody>
+                    <a:bodyPr wrap="square"/>
+                    <a:lstStyle/>
+                    <a:p>
+                      <a:r>
+                        <a:rPr sz="1300" b="0">
+                          <a:solidFill>
+                            <a:srgbClr val="38424E"/>
+                          </a:solidFill>
+                          <a:latin typeface="Arial"/>
+                        </a:rPr>
+                        <a:t>4 sinks + 2000 recent</a:t>
+                      </a:r>
+                    </a:p>
+                  </a:txBody>
+                  <a:tcPr marL="73152" marR="73152" marT="45720" marB="45720">
+                    <a:solidFill>
+                      <a:srgbClr val="FFFFFF"/>
+                    </a:solidFill>
+                  </a:tcPr>
+                </a:tc>
+                <a:tc>
+                  <a:txBody>
+                    <a:bodyPr wrap="square"/>
+                    <a:lstStyle/>
+                    <a:p>
+                      <a:r>
+                        <a:rPr sz="1300" b="0">
+                          <a:solidFill>
+                            <a:srgbClr val="38424E"/>
+                          </a:solidFill>
+                          <a:latin typeface="Arial"/>
+                        </a:rPr>
+                        <a:t>33%</a:t>
+                      </a:r>
+                    </a:p>
+                  </a:txBody>
+                  <a:tcPr marL="73152" marR="73152" marT="45720" marB="45720">
+                    <a:solidFill>
+                      <a:srgbClr val="FFFFFF"/>
+                    </a:solidFill>
+                  </a:tcPr>
+                </a:tc>
+              </a:tr>
+              <a:tr h="352698">
+                <a:tc>
+                  <a:txBody>
+                    <a:bodyPr wrap="square"/>
+                    <a:lstStyle/>
+                    <a:p>
+                      <a:r>
+                        <a:rPr sz="1300" b="1">
+                          <a:solidFill>
+                            <a:srgbClr val="0C1116"/>
+                          </a:solidFill>
+                          <a:latin typeface="Arial"/>
+                        </a:rPr>
+                        <a:t>μKV</a:t>
+                      </a:r>
+                    </a:p>
+                  </a:txBody>
+                  <a:tcPr marL="73152" marR="73152" marT="45720" marB="45720">
+                    <a:solidFill>
+                      <a:srgbClr val="F7F9FB"/>
+                    </a:solidFill>
+                  </a:tcPr>
+                </a:tc>
+                <a:tc>
+                  <a:txBody>
+                    <a:bodyPr wrap="square"/>
+                    <a:lstStyle/>
+                    <a:p>
+                      <a:r>
+                        <a:rPr sz="1300" b="1">
+                          <a:solidFill>
+                            <a:srgbClr val="0C1116"/>
+                          </a:solidFill>
+                          <a:latin typeface="Arial"/>
+                        </a:rPr>
+                        <a:t>this work</a:t>
+                      </a:r>
+                    </a:p>
+                  </a:txBody>
+                  <a:tcPr marL="73152" marR="73152" marT="45720" marB="45720">
+                    <a:solidFill>
+                      <a:srgbClr val="F7F9FB"/>
+                    </a:solidFill>
+                  </a:tcPr>
+                </a:tc>
+                <a:tc>
+                  <a:txBody>
+                    <a:bodyPr wrap="square"/>
+                    <a:lstStyle/>
+                    <a:p>
+                      <a:r>
+                        <a:rPr sz="1300" b="1">
+                          <a:solidFill>
+                            <a:srgbClr val="0C1116"/>
+                          </a:solidFill>
+                          <a:latin typeface="Arial"/>
+                        </a:rPr>
+                        <a:t>1024, sequence-level</a:t>
+                      </a:r>
+                    </a:p>
+                  </a:txBody>
+                  <a:tcPr marL="73152" marR="73152" marT="45720" marB="45720">
+                    <a:solidFill>
+                      <a:srgbClr val="F7F9FB"/>
+                    </a:solidFill>
+                  </a:tcPr>
+                </a:tc>
+                <a:tc>
+                  <a:txBody>
+                    <a:bodyPr wrap="square"/>
+                    <a:lstStyle/>
+                    <a:p>
+                      <a:r>
+                        <a:rPr sz="1300" b="1">
+                          <a:solidFill>
+                            <a:srgbClr val="0C1116"/>
+                          </a:solidFill>
+                          <a:latin typeface="Arial"/>
+                        </a:rPr>
+                        <a:t>14%</a:t>
+                      </a:r>
+                    </a:p>
+                  </a:txBody>
+                  <a:tcPr marL="73152" marR="73152" marT="45720" marB="45720">
+                    <a:solidFill>
+                      <a:srgbClr val="F7F9FB"/>
+                    </a:solidFill>
+                  </a:tcPr>
+                </a:tc>
+              </a:tr>
+            </a:tbl>
+          </a:graphicData>
+        </a:graphic>
+      </p:graphicFrame>
+      <p:sp>
+        <p:nvSpPr>
+          <p:cNvPr id="8" name="TextBox 7"/>
+          <p:cNvSpPr txBox="1"/>
+          <p:nvPr/>
+        </p:nvSpPr>
+        <p:spPr>
+          <a:xfrm>
+            <a:off x="548640" y="4572000"/>
+            <a:ext cx="11064240" cy="1188720"/>
+          </a:xfrm>
+          <a:prstGeom prst="rect">
+            <a:avLst/>
+          </a:prstGeom>
+          <a:noFill/>
+        </p:spPr>
+        <p:txBody>
+          <a:bodyPr wrap="square" anchor="t" lIns="36576" rIns="36576" tIns="18288" bIns="18288">
+            <a:spAutoFit/>
+          </a:bodyPr>
+          <a:lstStyle/>
+          <a:p>
+            <a:pPr algn="l">
+              <a:lnSpc>
+                <a:spcPct val="115000"/>
+              </a:lnSpc>
+            </a:pPr>
+            <a:r>
+              <a:rPr sz="1600" b="0">
                 <a:solidFill>
                   <a:srgbClr val="38424E"/>
                 </a:solidFill>
                 <a:latin typeface="Arial"/>
               </a:rPr>
-              <a:t>The claim is not wrong on a server. It is a claim about how many scores were dropped, not about how much memory came back.</a:t>
+              <a:t>No claim above is wrong on a server. Each is a statement about how many scores were dropped, not about how much memory came back.</a:t>
             </a:r>
           </a:p>
           <a:p>
@@ -4156,7 +4285,7 @@
               </a:lnSpc>
             </a:pPr>
             <a:r>
-              <a:rPr sz="1700" b="0">
+              <a:rPr sz="1600" b="0">
                 <a:solidFill>
                   <a:srgbClr val="38424E"/>
                 </a:solidFill>
@@ -4169,14 +4298,14 @@
       </p:sp>
       <p:sp>
         <p:nvSpPr>
-          <p:cNvPr id="8" name="TextBox 7"/>
+          <p:cNvPr id="9" name="TextBox 8"/>
           <p:cNvSpPr txBox="1"/>
           <p:nvPr/>
         </p:nvSpPr>
         <p:spPr>
           <a:xfrm>
-            <a:off x="548640" y="5669280"/>
-            <a:ext cx="11064240" cy="640080"/>
+            <a:off x="548640" y="5806440"/>
+            <a:ext cx="11064240" cy="548640"/>
           </a:xfrm>
           <a:prstGeom prst="rect">
             <a:avLst/>
@@ -32576,7 +32705,7 @@
                 </a:solidFill>
                 <a:latin typeface="Arial"/>
               </a:rPr>
-              <a:t>TABLE 1 continued  ·  THREE MORE MODELS, EACH BASELINE AT ITS OWN BUDGET</a:t>
+              <a:t>TABLE 1 continued</a:t>
             </a:r>
           </a:p>
         </p:txBody>
@@ -32609,13 +32738,13 @@
               </a:lnSpc>
             </a:pPr>
             <a:r>
-              <a:rPr sz="2800" b="1">
+              <a:rPr sz="2400" b="1">
                 <a:solidFill>
                   <a:srgbClr val="0C1116"/>
                 </a:solidFill>
                 <a:latin typeface="Arial"/>
               </a:rPr>
-              <a:t/>
+              <a:t>Three more models, each baseline at its own published budget</a:t>
             </a:r>
           </a:p>
         </p:txBody>

--- a/muKV_full_deck.pptx
+++ b/muKV_full_deck.pptx
@@ -3456,7 +3456,7 @@
                 </a:solidFill>
                 <a:latin typeface="Arial"/>
               </a:rPr>
-              <a:t>What each paper claims, and what the phone gives back</a:t>
+              <a:t>What each paper actually says, and what the phone gives back</a:t>
             </a:r>
           </a:p>
         </p:txBody>
@@ -3552,7 +3552,7 @@
         </p:nvSpPr>
         <p:spPr>
           <a:xfrm>
-            <a:off x="548640" y="1417320"/>
+            <a:off x="548640" y="1389888"/>
             <a:ext cx="11064240" cy="365760"/>
           </a:xfrm>
           <a:prstGeom prst="rect">
@@ -3572,7 +3572,7 @@
               </a:lnSpc>
             </a:pPr>
             <a:r>
-              <a:rPr sz="1400" b="0">
+              <a:rPr sz="1350" b="0">
                 <a:solidFill>
                   <a:srgbClr val="6B7785"/>
                 </a:solidFill>
@@ -3592,8 +3592,8 @@
           <p:nvPr/>
         </p:nvGraphicFramePr>
         <p:xfrm>
-          <a:off x="548640" y="1828800"/>
-          <a:ext cx="11064240" cy="2468880"/>
+          <a:off x="548640" y="1783080"/>
+          <a:ext cx="11064240" cy="2697480"/>
         </p:xfrm>
         <a:graphic>
           <a:graphicData uri="http://schemas.openxmlformats.org/drawingml/2006/table">
@@ -3602,19 +3602,19 @@
                 <a:tableStyleId>{5C22544A-7EE6-4342-B048-85BDC9FD1C3A}</a:tableStyleId>
               </a:tblPr>
               <a:tblGrid>
-                <a:gridCol w="1737360"/>
-                <a:gridCol w="4206240"/>
-                <a:gridCol w="3566160"/>
+                <a:gridCol w="2103120"/>
+                <a:gridCol w="4754880"/>
+                <a:gridCol w="2651760"/>
                 <a:gridCol w="1554480"/>
               </a:tblGrid>
-              <a:tr h="352697">
-                <a:tc>
-                  <a:txBody>
-                    <a:bodyPr wrap="square"/>
-                    <a:lstStyle/>
-                    <a:p>
-                      <a:r>
-                        <a:rPr sz="1300" b="1">
+              <a:tr h="299720">
+                <a:tc>
+                  <a:txBody>
+                    <a:bodyPr wrap="square"/>
+                    <a:lstStyle/>
+                    <a:p>
+                      <a:r>
+                        <a:rPr sz="1150" b="1">
                           <a:solidFill>
                             <a:srgbClr val="0C1116"/>
                           </a:solidFill>
@@ -3636,13 +3636,13 @@
                     <a:lstStyle/>
                     <a:p>
                       <a:r>
-                        <a:rPr sz="1300" b="1">
+                        <a:rPr sz="1150" b="1">
                           <a:solidFill>
                             <a:srgbClr val="0C1116"/>
                           </a:solidFill>
                           <a:latin typeface="Arial"/>
                         </a:rPr>
-                        <a:t>What its own paper claims</a:t>
+                        <a:t>What the paper actually says</a:t>
                       </a:r>
                     </a:p>
                   </a:txBody>
@@ -3658,7 +3658,7 @@
                     <a:lstStyle/>
                     <a:p>
                       <a:r>
-                        <a:rPr sz="1300" b="1">
+                        <a:rPr sz="1150" b="1">
                           <a:solidFill>
                             <a:srgbClr val="0C1116"/>
                           </a:solidFill>
@@ -3680,7 +3680,7 @@
                     <a:lstStyle/>
                     <a:p>
                       <a:r>
-                        <a:rPr sz="1300" b="1">
+                        <a:rPr sz="1150" b="1">
                           <a:solidFill>
                             <a:srgbClr val="0C1116"/>
                           </a:solidFill>
@@ -3697,14 +3697,104 @@
                   </a:tcPr>
                 </a:tc>
               </a:tr>
-              <a:tr h="352697">
-                <a:tc>
-                  <a:txBody>
-                    <a:bodyPr wrap="square"/>
-                    <a:lstStyle/>
-                    <a:p>
-                      <a:r>
-                        <a:rPr sz="1300" b="0">
+              <a:tr h="299720">
+                <a:tc>
+                  <a:txBody>
+                    <a:bodyPr wrap="square"/>
+                    <a:lstStyle/>
+                    <a:p>
+                      <a:r>
+                        <a:rPr sz="1150" b="1">
+                          <a:solidFill>
+                            <a:srgbClr val="0C1116"/>
+                          </a:solidFill>
+                          <a:latin typeface="Arial"/>
+                        </a:rPr>
+                        <a:t/>
+                      </a:r>
+                    </a:p>
+                  </a:txBody>
+                  <a:tcPr marL="73152" marR="73152" marT="45720" marB="45720">
+                    <a:solidFill>
+                      <a:srgbClr val="FFFFFF"/>
+                    </a:solidFill>
+                  </a:tcPr>
+                </a:tc>
+                <a:tc>
+                  <a:txBody>
+                    <a:bodyPr wrap="square"/>
+                    <a:lstStyle/>
+                    <a:p>
+                      <a:r>
+                        <a:rPr sz="1150" b="1">
+                          <a:solidFill>
+                            <a:srgbClr val="0C1116"/>
+                          </a:solidFill>
+                          <a:latin typeface="Arial"/>
+                        </a:rPr>
+                        <a:t>CLAIMS A MEMORY REDUCTION</a:t>
+                      </a:r>
+                    </a:p>
+                  </a:txBody>
+                  <a:tcPr marL="73152" marR="73152" marT="45720" marB="45720">
+                    <a:solidFill>
+                      <a:srgbClr val="FFFFFF"/>
+                    </a:solidFill>
+                  </a:tcPr>
+                </a:tc>
+                <a:tc>
+                  <a:txBody>
+                    <a:bodyPr wrap="square"/>
+                    <a:lstStyle/>
+                    <a:p>
+                      <a:r>
+                        <a:rPr sz="1150" b="1">
+                          <a:solidFill>
+                            <a:srgbClr val="0C1116"/>
+                          </a:solidFill>
+                          <a:latin typeface="Arial"/>
+                        </a:rPr>
+                        <a:t/>
+                      </a:r>
+                    </a:p>
+                  </a:txBody>
+                  <a:tcPr marL="73152" marR="73152" marT="45720" marB="45720">
+                    <a:solidFill>
+                      <a:srgbClr val="FFFFFF"/>
+                    </a:solidFill>
+                  </a:tcPr>
+                </a:tc>
+                <a:tc>
+                  <a:txBody>
+                    <a:bodyPr wrap="square"/>
+                    <a:lstStyle/>
+                    <a:p>
+                      <a:r>
+                        <a:rPr sz="1150" b="1">
+                          <a:solidFill>
+                            <a:srgbClr val="0C1116"/>
+                          </a:solidFill>
+                          <a:latin typeface="Arial"/>
+                        </a:rPr>
+                        <a:t/>
+                      </a:r>
+                    </a:p>
+                  </a:txBody>
+                  <a:tcPr marL="73152" marR="73152" marT="45720" marB="45720">
+                    <a:solidFill>
+                      <a:srgbClr val="FFFFFF"/>
+                    </a:solidFill>
+                  </a:tcPr>
+                </a:tc>
+              </a:tr>
+              <a:tr h="299720">
+                <a:tc>
+                  <a:txBody>
+                    <a:bodyPr wrap="square"/>
+                    <a:lstStyle/>
+                    <a:p>
+                      <a:r>
+                        <a:rPr sz="1150" b="0">
                           <a:solidFill>
                             <a:srgbClr val="38424E"/>
                           </a:solidFill>
@@ -3716,39 +3806,39 @@
                   </a:txBody>
                   <a:tcPr marL="73152" marR="73152" marT="45720" marB="45720">
                     <a:solidFill>
-                      <a:srgbClr val="FFFFFF"/>
-                    </a:solidFill>
-                  </a:tcPr>
-                </a:tc>
-                <a:tc>
-                  <a:txBody>
-                    <a:bodyPr wrap="square"/>
-                    <a:lstStyle/>
-                    <a:p>
-                      <a:r>
-                        <a:rPr sz="1300" b="0">
-                          <a:solidFill>
-                            <a:srgbClr val="38424E"/>
-                          </a:solidFill>
-                          <a:latin typeface="Arial"/>
-                        </a:rPr>
-                        <a:t>8.2x memory efficiency at 16K inputs</a:t>
-                      </a:r>
-                    </a:p>
-                  </a:txBody>
-                  <a:tcPr marL="73152" marR="73152" marT="45720" marB="45720">
-                    <a:solidFill>
-                      <a:srgbClr val="FFFFFF"/>
-                    </a:solidFill>
-                  </a:tcPr>
-                </a:tc>
-                <a:tc>
-                  <a:txBody>
-                    <a:bodyPr wrap="square"/>
-                    <a:lstStyle/>
-                    <a:p>
-                      <a:r>
-                        <a:rPr sz="1300" b="0">
+                      <a:srgbClr val="F7F9FB"/>
+                    </a:solidFill>
+                  </a:tcPr>
+                </a:tc>
+                <a:tc>
+                  <a:txBody>
+                    <a:bodyPr wrap="square"/>
+                    <a:lstStyle/>
+                    <a:p>
+                      <a:r>
+                        <a:rPr sz="1150" b="0">
+                          <a:solidFill>
+                            <a:srgbClr val="38424E"/>
+                          </a:solidFill>
+                          <a:latin typeface="Arial"/>
+                        </a:rPr>
+                        <a:t>“an 8.2x enhancement in memory efficiency” at 16K inputs</a:t>
+                      </a:r>
+                    </a:p>
+                  </a:txBody>
+                  <a:tcPr marL="73152" marR="73152" marT="45720" marB="45720">
+                    <a:solidFill>
+                      <a:srgbClr val="F7F9FB"/>
+                    </a:solidFill>
+                  </a:tcPr>
+                </a:tc>
+                <a:tc>
+                  <a:txBody>
+                    <a:bodyPr wrap="square"/>
+                    <a:lstStyle/>
+                    <a:p>
+                      <a:r>
+                        <a:rPr sz="1150" b="0">
                           <a:solidFill>
                             <a:srgbClr val="38424E"/>
                           </a:solidFill>
@@ -3760,17 +3850,17 @@
                   </a:txBody>
                   <a:tcPr marL="73152" marR="73152" marT="45720" marB="45720">
                     <a:solidFill>
-                      <a:srgbClr val="FFFFFF"/>
-                    </a:solidFill>
-                  </a:tcPr>
-                </a:tc>
-                <a:tc>
-                  <a:txBody>
-                    <a:bodyPr wrap="square"/>
-                    <a:lstStyle/>
-                    <a:p>
-                      <a:r>
-                        <a:rPr sz="1300" b="0">
+                      <a:srgbClr val="F7F9FB"/>
+                    </a:solidFill>
+                  </a:tcPr>
+                </a:tc>
+                <a:tc>
+                  <a:txBody>
+                    <a:bodyPr wrap="square"/>
+                    <a:lstStyle/>
+                    <a:p>
+                      <a:r>
+                        <a:rPr sz="1150" b="0">
                           <a:solidFill>
                             <a:srgbClr val="38424E"/>
                           </a:solidFill>
@@ -3782,19 +3872,19 @@
                   </a:txBody>
                   <a:tcPr marL="73152" marR="73152" marT="45720" marB="45720">
                     <a:solidFill>
-                      <a:srgbClr val="FFFFFF"/>
+                      <a:srgbClr val="F7F9FB"/>
                     </a:solidFill>
                   </a:tcPr>
                 </a:tc>
               </a:tr>
-              <a:tr h="352697">
-                <a:tc>
-                  <a:txBody>
-                    <a:bodyPr wrap="square"/>
-                    <a:lstStyle/>
-                    <a:p>
-                      <a:r>
-                        <a:rPr sz="1300" b="0">
+              <a:tr h="299720">
+                <a:tc>
+                  <a:txBody>
+                    <a:bodyPr wrap="square"/>
+                    <a:lstStyle/>
+                    <a:p>
+                      <a:r>
+                        <a:rPr sz="1150" b="0">
                           <a:solidFill>
                             <a:srgbClr val="38424E"/>
                           </a:solidFill>
@@ -3806,39 +3896,39 @@
                   </a:txBody>
                   <a:tcPr marL="73152" marR="73152" marT="45720" marB="45720">
                     <a:solidFill>
-                      <a:srgbClr val="F7F9FB"/>
-                    </a:solidFill>
-                  </a:tcPr>
-                </a:tc>
-                <a:tc>
-                  <a:txBody>
-                    <a:bodyPr wrap="square"/>
-                    <a:lstStyle/>
-                    <a:p>
-                      <a:r>
-                        <a:rPr sz="1300" b="0">
-                          <a:solidFill>
-                            <a:srgbClr val="38424E"/>
-                          </a:solidFill>
-                          <a:latin typeface="Arial"/>
-                        </a:rPr>
-                        <a:t>5 to 10x smaller KV cache</a:t>
-                      </a:r>
-                    </a:p>
-                  </a:txBody>
-                  <a:tcPr marL="73152" marR="73152" marT="45720" marB="45720">
-                    <a:solidFill>
-                      <a:srgbClr val="F7F9FB"/>
-                    </a:solidFill>
-                  </a:tcPr>
-                </a:tc>
-                <a:tc>
-                  <a:txBody>
-                    <a:bodyPr wrap="square"/>
-                    <a:lstStyle/>
-                    <a:p>
-                      <a:r>
-                        <a:rPr sz="1300" b="0">
+                      <a:srgbClr val="FFFFFF"/>
+                    </a:solidFill>
+                  </a:tcPr>
+                </a:tc>
+                <a:tc>
+                  <a:txBody>
+                    <a:bodyPr wrap="square"/>
+                    <a:lstStyle/>
+                    <a:p>
+                      <a:r>
+                        <a:rPr sz="1150" b="0">
+                          <a:solidFill>
+                            <a:srgbClr val="38424E"/>
+                          </a:solidFill>
+                          <a:latin typeface="Arial"/>
+                        </a:rPr>
+                        <a:t>“reduce KV cache memory footprint by 5-10x”</a:t>
+                      </a:r>
+                    </a:p>
+                  </a:txBody>
+                  <a:tcPr marL="73152" marR="73152" marT="45720" marB="45720">
+                    <a:solidFill>
+                      <a:srgbClr val="FFFFFF"/>
+                    </a:solidFill>
+                  </a:tcPr>
+                </a:tc>
+                <a:tc>
+                  <a:txBody>
+                    <a:bodyPr wrap="square"/>
+                    <a:lstStyle/>
+                    <a:p>
+                      <a:r>
+                        <a:rPr sz="1150" b="0">
                           <a:solidFill>
                             <a:srgbClr val="38424E"/>
                           </a:solidFill>
@@ -3850,17 +3940,17 @@
                   </a:txBody>
                   <a:tcPr marL="73152" marR="73152" marT="45720" marB="45720">
                     <a:solidFill>
-                      <a:srgbClr val="F7F9FB"/>
-                    </a:solidFill>
-                  </a:tcPr>
-                </a:tc>
-                <a:tc>
-                  <a:txBody>
-                    <a:bodyPr wrap="square"/>
-                    <a:lstStyle/>
-                    <a:p>
-                      <a:r>
-                        <a:rPr sz="1300" b="0">
+                      <a:srgbClr val="FFFFFF"/>
+                    </a:solidFill>
+                  </a:tcPr>
+                </a:tc>
+                <a:tc>
+                  <a:txBody>
+                    <a:bodyPr wrap="square"/>
+                    <a:lstStyle/>
+                    <a:p>
+                      <a:r>
+                        <a:rPr sz="1150" b="0">
                           <a:solidFill>
                             <a:srgbClr val="38424E"/>
                           </a:solidFill>
@@ -3872,19 +3962,19 @@
                   </a:txBody>
                   <a:tcPr marL="73152" marR="73152" marT="45720" marB="45720">
                     <a:solidFill>
-                      <a:srgbClr val="F7F9FB"/>
+                      <a:srgbClr val="FFFFFF"/>
                     </a:solidFill>
                   </a:tcPr>
                 </a:tc>
               </a:tr>
-              <a:tr h="352697">
-                <a:tc>
-                  <a:txBody>
-                    <a:bodyPr wrap="square"/>
-                    <a:lstStyle/>
-                    <a:p>
-                      <a:r>
-                        <a:rPr sz="1300" b="0">
+              <a:tr h="299720">
+                <a:tc>
+                  <a:txBody>
+                    <a:bodyPr wrap="square"/>
+                    <a:lstStyle/>
+                    <a:p>
+                      <a:r>
+                        <a:rPr sz="1150" b="0">
                           <a:solidFill>
                             <a:srgbClr val="38424E"/>
                           </a:solidFill>
@@ -3896,39 +3986,39 @@
                   </a:txBody>
                   <a:tcPr marL="73152" marR="73152" marT="45720" marB="45720">
                     <a:solidFill>
-                      <a:srgbClr val="FFFFFF"/>
-                    </a:solidFill>
-                  </a:tcPr>
-                </a:tc>
-                <a:tc>
-                  <a:txBody>
-                    <a:bodyPr wrap="square"/>
-                    <a:lstStyle/>
-                    <a:p>
-                      <a:r>
-                        <a:rPr sz="1300" b="0">
-                          <a:solidFill>
-                            <a:srgbClr val="38424E"/>
-                          </a:solidFill>
-                          <a:latin typeface="Arial"/>
-                        </a:rPr>
-                        <a:t>full quality at 1/8 of the cache</a:t>
-                      </a:r>
-                    </a:p>
-                  </a:txBody>
-                  <a:tcPr marL="73152" marR="73152" marT="45720" marB="45720">
-                    <a:solidFill>
-                      <a:srgbClr val="FFFFFF"/>
-                    </a:solidFill>
-                  </a:tcPr>
-                </a:tc>
-                <a:tc>
-                  <a:txBody>
-                    <a:bodyPr wrap="square"/>
-                    <a:lstStyle/>
-                    <a:p>
-                      <a:r>
-                        <a:rPr sz="1300" b="0">
+                      <a:srgbClr val="F7F9FB"/>
+                    </a:solidFill>
+                  </a:tcPr>
+                </a:tc>
+                <a:tc>
+                  <a:txBody>
+                    <a:bodyPr wrap="square"/>
+                    <a:lstStyle/>
+                    <a:p>
+                      <a:r>
+                        <a:rPr sz="1150" b="0">
+                          <a:solidFill>
+                            <a:srgbClr val="38424E"/>
+                          </a:solidFill>
+                          <a:latin typeface="Arial"/>
+                        </a:rPr>
+                        <a:t>“nearly on par …, in some cases only 1/8 of the original cache”</a:t>
+                      </a:r>
+                    </a:p>
+                  </a:txBody>
+                  <a:tcPr marL="73152" marR="73152" marT="45720" marB="45720">
+                    <a:solidFill>
+                      <a:srgbClr val="F7F9FB"/>
+                    </a:solidFill>
+                  </a:tcPr>
+                </a:tc>
+                <a:tc>
+                  <a:txBody>
+                    <a:bodyPr wrap="square"/>
+                    <a:lstStyle/>
+                    <a:p>
+                      <a:r>
+                        <a:rPr sz="1150" b="0">
                           <a:solidFill>
                             <a:srgbClr val="38424E"/>
                           </a:solidFill>
@@ -3940,17 +4030,17 @@
                   </a:txBody>
                   <a:tcPr marL="73152" marR="73152" marT="45720" marB="45720">
                     <a:solidFill>
-                      <a:srgbClr val="FFFFFF"/>
-                    </a:solidFill>
-                  </a:tcPr>
-                </a:tc>
-                <a:tc>
-                  <a:txBody>
-                    <a:bodyPr wrap="square"/>
-                    <a:lstStyle/>
-                    <a:p>
-                      <a:r>
-                        <a:rPr sz="1300" b="0">
+                      <a:srgbClr val="F7F9FB"/>
+                    </a:solidFill>
+                  </a:tcPr>
+                </a:tc>
+                <a:tc>
+                  <a:txBody>
+                    <a:bodyPr wrap="square"/>
+                    <a:lstStyle/>
+                    <a:p>
+                      <a:r>
+                        <a:rPr sz="1150" b="0">
                           <a:solidFill>
                             <a:srgbClr val="38424E"/>
                           </a:solidFill>
@@ -3962,19 +4052,109 @@
                   </a:txBody>
                   <a:tcPr marL="73152" marR="73152" marT="45720" marB="45720">
                     <a:solidFill>
-                      <a:srgbClr val="FFFFFF"/>
+                      <a:srgbClr val="F7F9FB"/>
                     </a:solidFill>
                   </a:tcPr>
                 </a:tc>
               </a:tr>
-              <a:tr h="352697">
-                <a:tc>
-                  <a:txBody>
-                    <a:bodyPr wrap="square"/>
-                    <a:lstStyle/>
-                    <a:p>
-                      <a:r>
-                        <a:rPr sz="1300" b="0">
+              <a:tr h="299720">
+                <a:tc>
+                  <a:txBody>
+                    <a:bodyPr wrap="square"/>
+                    <a:lstStyle/>
+                    <a:p>
+                      <a:r>
+                        <a:rPr sz="1150" b="1">
+                          <a:solidFill>
+                            <a:srgbClr val="0C1116"/>
+                          </a:solidFill>
+                          <a:latin typeface="Arial"/>
+                        </a:rPr>
+                        <a:t/>
+                      </a:r>
+                    </a:p>
+                  </a:txBody>
+                  <a:tcPr marL="73152" marR="73152" marT="45720" marB="45720">
+                    <a:solidFill>
+                      <a:srgbClr val="FFFFFF"/>
+                    </a:solidFill>
+                  </a:tcPr>
+                </a:tc>
+                <a:tc>
+                  <a:txBody>
+                    <a:bodyPr wrap="square"/>
+                    <a:lstStyle/>
+                    <a:p>
+                      <a:r>
+                        <a:rPr sz="1150" b="1">
+                          <a:solidFill>
+                            <a:srgbClr val="0C1116"/>
+                          </a:solidFill>
+                          <a:latin typeface="Arial"/>
+                        </a:rPr>
+                        <a:t>MAKES NO MEMORY-REDUCTION CLAIM</a:t>
+                      </a:r>
+                    </a:p>
+                  </a:txBody>
+                  <a:tcPr marL="73152" marR="73152" marT="45720" marB="45720">
+                    <a:solidFill>
+                      <a:srgbClr val="FFFFFF"/>
+                    </a:solidFill>
+                  </a:tcPr>
+                </a:tc>
+                <a:tc>
+                  <a:txBody>
+                    <a:bodyPr wrap="square"/>
+                    <a:lstStyle/>
+                    <a:p>
+                      <a:r>
+                        <a:rPr sz="1150" b="1">
+                          <a:solidFill>
+                            <a:srgbClr val="0C1116"/>
+                          </a:solidFill>
+                          <a:latin typeface="Arial"/>
+                        </a:rPr>
+                        <a:t/>
+                      </a:r>
+                    </a:p>
+                  </a:txBody>
+                  <a:tcPr marL="73152" marR="73152" marT="45720" marB="45720">
+                    <a:solidFill>
+                      <a:srgbClr val="FFFFFF"/>
+                    </a:solidFill>
+                  </a:tcPr>
+                </a:tc>
+                <a:tc>
+                  <a:txBody>
+                    <a:bodyPr wrap="square"/>
+                    <a:lstStyle/>
+                    <a:p>
+                      <a:r>
+                        <a:rPr sz="1150" b="1">
+                          <a:solidFill>
+                            <a:srgbClr val="0C1116"/>
+                          </a:solidFill>
+                          <a:latin typeface="Arial"/>
+                        </a:rPr>
+                        <a:t/>
+                      </a:r>
+                    </a:p>
+                  </a:txBody>
+                  <a:tcPr marL="73152" marR="73152" marT="45720" marB="45720">
+                    <a:solidFill>
+                      <a:srgbClr val="FFFFFF"/>
+                    </a:solidFill>
+                  </a:tcPr>
+                </a:tc>
+              </a:tr>
+              <a:tr h="299720">
+                <a:tc>
+                  <a:txBody>
+                    <a:bodyPr wrap="square"/>
+                    <a:lstStyle/>
+                    <a:p>
+                      <a:r>
+                        <a:rPr sz="1150" b="0">
                           <a:solidFill>
                             <a:srgbClr val="38424E"/>
                           </a:solidFill>
@@ -3996,51 +4176,51 @@
                     <a:lstStyle/>
                     <a:p>
                       <a:r>
-                        <a:rPr sz="1300" b="0">
-                          <a:solidFill>
-                            <a:srgbClr val="38424E"/>
-                          </a:solidFill>
-                          <a:latin typeface="Arial"/>
-                        </a:rPr>
-                        <a:t>no ratio of its own; it reallocates a given budget</a:t>
-                      </a:r>
-                    </a:p>
-                  </a:txBody>
-                  <a:tcPr marL="73152" marR="73152" marT="45720" marB="45720">
-                    <a:solidFill>
-                      <a:srgbClr val="F7F9FB"/>
-                    </a:solidFill>
-                  </a:tcPr>
-                </a:tc>
-                <a:tc>
-                  <a:txBody>
-                    <a:bodyPr wrap="square"/>
-                    <a:lstStyle/>
-                    <a:p>
-                      <a:r>
-                        <a:rPr sz="1300" b="0">
-                          <a:solidFill>
-                            <a:srgbClr val="38424E"/>
-                          </a:solidFill>
-                          <a:latin typeface="Arial"/>
-                        </a:rPr>
-                        <a:t>2048 per head, reallocated across heads</a:t>
-                      </a:r>
-                    </a:p>
-                  </a:txBody>
-                  <a:tcPr marL="73152" marR="73152" marT="45720" marB="45720">
-                    <a:solidFill>
-                      <a:srgbClr val="F7F9FB"/>
-                    </a:solidFill>
-                  </a:tcPr>
-                </a:tc>
-                <a:tc>
-                  <a:txBody>
-                    <a:bodyPr wrap="square"/>
-                    <a:lstStyle/>
-                    <a:p>
-                      <a:r>
-                        <a:rPr sz="1300" b="0">
+                        <a:rPr sz="1150" b="0">
+                          <a:solidFill>
+                            <a:srgbClr val="38424E"/>
+                          </a:solidFill>
+                          <a:latin typeface="Arial"/>
+                        </a:rPr>
+                        <a:t>“the first head-wise adaptive budget allocation strategy”</a:t>
+                      </a:r>
+                    </a:p>
+                  </a:txBody>
+                  <a:tcPr marL="73152" marR="73152" marT="45720" marB="45720">
+                    <a:solidFill>
+                      <a:srgbClr val="F7F9FB"/>
+                    </a:solidFill>
+                  </a:tcPr>
+                </a:tc>
+                <a:tc>
+                  <a:txBody>
+                    <a:bodyPr wrap="square"/>
+                    <a:lstStyle/>
+                    <a:p>
+                      <a:r>
+                        <a:rPr sz="1150" b="0">
+                          <a:solidFill>
+                            <a:srgbClr val="38424E"/>
+                          </a:solidFill>
+                          <a:latin typeface="Arial"/>
+                        </a:rPr>
+                        <a:t>2048 per head, reallocated</a:t>
+                      </a:r>
+                    </a:p>
+                  </a:txBody>
+                  <a:tcPr marL="73152" marR="73152" marT="45720" marB="45720">
+                    <a:solidFill>
+                      <a:srgbClr val="F7F9FB"/>
+                    </a:solidFill>
+                  </a:tcPr>
+                </a:tc>
+                <a:tc>
+                  <a:txBody>
+                    <a:bodyPr wrap="square"/>
+                    <a:lstStyle/>
+                    <a:p>
+                      <a:r>
+                        <a:rPr sz="1150" b="0">
                           <a:solidFill>
                             <a:srgbClr val="38424E"/>
                           </a:solidFill>
@@ -4057,14 +4237,14 @@
                   </a:tcPr>
                 </a:tc>
               </a:tr>
-              <a:tr h="352697">
-                <a:tc>
-                  <a:txBody>
-                    <a:bodyPr wrap="square"/>
-                    <a:lstStyle/>
-                    <a:p>
-                      <a:r>
-                        <a:rPr sz="1300" b="0">
+              <a:tr h="299720">
+                <a:tc>
+                  <a:txBody>
+                    <a:bodyPr wrap="square"/>
+                    <a:lstStyle/>
+                    <a:p>
+                      <a:r>
+                        <a:rPr sz="1150" b="0">
                           <a:solidFill>
                             <a:srgbClr val="38424E"/>
                           </a:solidFill>
@@ -4086,29 +4266,29 @@
                     <a:lstStyle/>
                     <a:p>
                       <a:r>
-                        <a:rPr sz="1300" b="0">
-                          <a:solidFill>
-                            <a:srgbClr val="38424E"/>
-                          </a:solidFill>
-                          <a:latin typeface="Arial"/>
-                        </a:rPr>
-                        <a:t>22.2x over sliding-window recompute</a:t>
-                      </a:r>
-                    </a:p>
-                  </a:txBody>
-                  <a:tcPr marL="73152" marR="73152" marT="45720" marB="45720">
-                    <a:solidFill>
-                      <a:srgbClr val="FFFFFF"/>
-                    </a:solidFill>
-                  </a:tcPr>
-                </a:tc>
-                <a:tc>
-                  <a:txBody>
-                    <a:bodyPr wrap="square"/>
-                    <a:lstStyle/>
-                    <a:p>
-                      <a:r>
-                        <a:rPr sz="1300" b="0">
+                        <a:rPr sz="1150" b="0">
+                          <a:solidFill>
+                            <a:srgbClr val="38424E"/>
+                          </a:solidFill>
+                          <a:latin typeface="Arial"/>
+                        </a:rPr>
+                        <a:t>a speed claim: “up to 22.2x speedup” over recompute</a:t>
+                      </a:r>
+                    </a:p>
+                  </a:txBody>
+                  <a:tcPr marL="73152" marR="73152" marT="45720" marB="45720">
+                    <a:solidFill>
+                      <a:srgbClr val="FFFFFF"/>
+                    </a:solidFill>
+                  </a:tcPr>
+                </a:tc>
+                <a:tc>
+                  <a:txBody>
+                    <a:bodyPr wrap="square"/>
+                    <a:lstStyle/>
+                    <a:p>
+                      <a:r>
+                        <a:rPr sz="1150" b="0">
                           <a:solidFill>
                             <a:srgbClr val="38424E"/>
                           </a:solidFill>
@@ -4130,7 +4310,7 @@
                     <a:lstStyle/>
                     <a:p>
                       <a:r>
-                        <a:rPr sz="1300" b="0">
+                        <a:rPr sz="1150" b="0">
                           <a:solidFill>
                             <a:srgbClr val="38424E"/>
                           </a:solidFill>
@@ -4147,58 +4327,58 @@
                   </a:tcPr>
                 </a:tc>
               </a:tr>
-              <a:tr h="352698">
-                <a:tc>
-                  <a:txBody>
-                    <a:bodyPr wrap="square"/>
-                    <a:lstStyle/>
-                    <a:p>
-                      <a:r>
-                        <a:rPr sz="1300" b="1">
+              <a:tr h="299720">
+                <a:tc>
+                  <a:txBody>
+                    <a:bodyPr wrap="square"/>
+                    <a:lstStyle/>
+                    <a:p>
+                      <a:r>
+                        <a:rPr sz="1150" b="1">
                           <a:solidFill>
                             <a:srgbClr val="0C1116"/>
                           </a:solidFill>
                           <a:latin typeface="Arial"/>
                         </a:rPr>
-                        <a:t>μKV</a:t>
-                      </a:r>
-                    </a:p>
-                  </a:txBody>
-                  <a:tcPr marL="73152" marR="73152" marT="45720" marB="45720">
-                    <a:solidFill>
-                      <a:srgbClr val="F7F9FB"/>
-                    </a:solidFill>
-                  </a:tcPr>
-                </a:tc>
-                <a:tc>
-                  <a:txBody>
-                    <a:bodyPr wrap="square"/>
-                    <a:lstStyle/>
-                    <a:p>
-                      <a:r>
-                        <a:rPr sz="1300" b="1">
+                        <a:t>μKV (this work)</a:t>
+                      </a:r>
+                    </a:p>
+                  </a:txBody>
+                  <a:tcPr marL="73152" marR="73152" marT="45720" marB="45720">
+                    <a:solidFill>
+                      <a:srgbClr val="F7F9FB"/>
+                    </a:solidFill>
+                  </a:tcPr>
+                </a:tc>
+                <a:tc>
+                  <a:txBody>
+                    <a:bodyPr wrap="square"/>
+                    <a:lstStyle/>
+                    <a:p>
+                      <a:r>
+                        <a:rPr sz="1150" b="1">
                           <a:solidFill>
                             <a:srgbClr val="0C1116"/>
                           </a:solidFill>
                           <a:latin typeface="Arial"/>
                         </a:rPr>
-                        <a:t>this work</a:t>
-                      </a:r>
-                    </a:p>
-                  </a:txBody>
-                  <a:tcPr marL="73152" marR="73152" marT="45720" marB="45720">
-                    <a:solidFill>
-                      <a:srgbClr val="F7F9FB"/>
-                    </a:solidFill>
-                  </a:tcPr>
-                </a:tc>
-                <a:tc>
-                  <a:txBody>
-                    <a:bodyPr wrap="square"/>
-                    <a:lstStyle/>
-                    <a:p>
-                      <a:r>
-                        <a:rPr sz="1300" b="1">
+                        <a:t>—</a:t>
+                      </a:r>
+                    </a:p>
+                  </a:txBody>
+                  <a:tcPr marL="73152" marR="73152" marT="45720" marB="45720">
+                    <a:solidFill>
+                      <a:srgbClr val="F7F9FB"/>
+                    </a:solidFill>
+                  </a:tcPr>
+                </a:tc>
+                <a:tc>
+                  <a:txBody>
+                    <a:bodyPr wrap="square"/>
+                    <a:lstStyle/>
+                    <a:p>
+                      <a:r>
+                        <a:rPr sz="1150" b="1">
                           <a:solidFill>
                             <a:srgbClr val="0C1116"/>
                           </a:solidFill>
@@ -4220,7 +4400,7 @@
                     <a:lstStyle/>
                     <a:p>
                       <a:r>
-                        <a:rPr sz="1300" b="1">
+                        <a:rPr sz="1150" b="1">
                           <a:solidFill>
                             <a:srgbClr val="0C1116"/>
                           </a:solidFill>
@@ -4249,8 +4429,8 @@
         </p:nvSpPr>
         <p:spPr>
           <a:xfrm>
-            <a:off x="548640" y="4572000"/>
-            <a:ext cx="11064240" cy="1188720"/>
+            <a:off x="548640" y="4709160"/>
+            <a:ext cx="11064240" cy="1280160"/>
           </a:xfrm>
           <a:prstGeom prst="rect">
             <a:avLst/>
@@ -4269,13 +4449,13 @@
               </a:lnSpc>
             </a:pPr>
             <a:r>
-              <a:rPr sz="1600" b="0">
+              <a:rPr sz="1450" b="0">
                 <a:solidFill>
                   <a:srgbClr val="38424E"/>
                 </a:solidFill>
                 <a:latin typeface="Arial"/>
               </a:rPr>
-              <a:t>No claim above is wrong on a server. Each is a statement about how many scores were dropped, not about how much memory came back.</a:t>
+              <a:t>The contradiction is only a contradiction where a memory claim was made. SnapKV and H2O claim a ratio and do not deliver it here. TOVA hedges its own claim.</a:t>
             </a:r>
           </a:p>
           <a:p>
@@ -4285,13 +4465,13 @@
               </a:lnSpc>
             </a:pPr>
             <a:r>
-              <a:rPr sz="1600" b="0">
+              <a:rPr sz="1450" b="0">
                 <a:solidFill>
                   <a:srgbClr val="38424E"/>
                 </a:solidFill>
                 <a:latin typeface="Arial"/>
               </a:rPr>
-              <a:t>On a shared cell array those are different numbers, and only the second one changes the phone's DRAM traffic.</a:t>
+              <a:t>Ada-KV claims quality gains at a budget you give it, and StreamingLLM claims speed. Their rows report what a per-head or windowed budget simply leaves live on this engine.</a:t>
             </a:r>
           </a:p>
         </p:txBody>
@@ -4304,8 +4484,8 @@
         </p:nvSpPr>
         <p:spPr>
           <a:xfrm>
-            <a:off x="548640" y="5806440"/>
-            <a:ext cx="11064240" cy="548640"/>
+            <a:off x="548640" y="6035040"/>
+            <a:ext cx="11064240" cy="457200"/>
           </a:xfrm>
           <a:prstGeom prst="rect">
             <a:avLst/>
@@ -4324,7 +4504,7 @@
               </a:lnSpc>
             </a:pPr>
             <a:r>
-              <a:rPr sz="2000" b="1">
+              <a:rPr sz="1800" b="1">
                 <a:solidFill>
                   <a:srgbClr val="C4581A"/>
                 </a:solidFill>

--- a/muKV_full_deck.pptx
+++ b/muKV_full_deck.pptx
@@ -5915,7 +5915,7 @@
                           </a:solidFill>
                           <a:latin typeface="Arial"/>
                         </a:rPr>
-                        <a:t>42.4</a:t>
+                        <a:t>42.3</a:t>
                       </a:r>
                     </a:p>
                   </a:txBody>

--- a/muKV_full_deck.pptx
+++ b/muKV_full_deck.pptx
@@ -29333,8 +29333,8 @@
         </p:blipFill>
         <p:spPr>
           <a:xfrm>
-            <a:off x="1615862" y="1600200"/>
-            <a:ext cx="8966371" cy="3931920"/>
+            <a:off x="1630957" y="1600200"/>
+            <a:ext cx="8936181" cy="3931920"/>
           </a:xfrm>
           <a:prstGeom prst="rect">
             <a:avLst/>

--- a/muKV_full_deck.pptx
+++ b/muKV_full_deck.pptx
@@ -17512,7 +17512,7 @@
                 </a:solidFill>
                 <a:latin typeface="Arial"/>
               </a:rPr>
-              <a:t>Numbers match the architecture figure, so the same part carries the same number in both. Run is steps 1 to 3. No online policy learning runs on the phone; the decision is a deterministic table walk.</a:t>
+              <a:t>The lower half of the figure above, enlarged. Run is steps 1 to 3. No online policy learning runs on the phone; the decision is a deterministic table walk.</a:t>
             </a:r>
           </a:p>
         </p:txBody>
@@ -29319,7 +29319,7 @@
       </p:sp>
       <p:pic>
         <p:nvPicPr>
-          <p:cNvPr id="6" name="Picture 5" descr="fig_architecture_tikz.png"/>
+          <p:cNvPr id="6" name="Picture 5" descr="fig_architecture_merged.png"/>
           <p:cNvPicPr>
             <a:picLocks noChangeAspect="1"/>
           </p:cNvPicPr>
@@ -29333,8 +29333,8 @@
         </p:blipFill>
         <p:spPr>
           <a:xfrm>
-            <a:off x="1630957" y="1600200"/>
-            <a:ext cx="8936181" cy="3931920"/>
+            <a:off x="2350395" y="1600200"/>
+            <a:ext cx="7497305" cy="3931920"/>
           </a:xfrm>
           <a:prstGeom prst="rect">
             <a:avLst/>
@@ -29375,7 +29375,7 @@
                 </a:solidFill>
                 <a:latin typeface="Arial"/>
               </a:rPr>
-              <a:t>Circled numbers are shared with the control-plane figure: 1-3 the pass, 4 sense, 5 decide, 6 act, 7 measure, 8 learn, 9 thermal guard. Same part, same number, both figures.</a:t>
+              <a:t>One figure, nine parts: 1-3 the pass, 4 sense, 5 decide, 6 act, 7 measure, 8 learn, 9 thermal guard. The paper's architecture and control-plane figures are now merged into this one.</a:t>
             </a:r>
           </a:p>
         </p:txBody>
